--- a/Apresentacao_Suzano_IT.pptx
+++ b/Apresentacao_Suzano_IT.pptx
@@ -19,6 +19,7 @@
     <p:sldId id="267" r:id="rId18"/>
     <p:sldId id="268" r:id="rId19"/>
     <p:sldId id="269" r:id="rId20"/>
+    <p:sldId id="270" r:id="rId21"/>
   </p:sldIdLst>
   <p:sldSz cx="12191695" cy="6858000" type="screen4x3"/>
   <p:notesSz cx="6858000" cy="9144000"/>
@@ -3094,14 +3095,6 @@
 <file path=ppt/slides/slide1.xml><?xml version="1.0" encoding="utf-8"?>
 <p:sld xmlns:a="http://schemas.openxmlformats.org/drawingml/2006/main" xmlns:p="http://schemas.openxmlformats.org/presentationml/2006/main" xmlns:r="http://schemas.openxmlformats.org/officeDocument/2006/relationships">
   <p:cSld>
-    <p:bg>
-      <p:bgPr>
-        <a:solidFill>
-          <a:srgbClr val="080B11"/>
-        </a:solidFill>
-        <a:effectLst/>
-      </p:bgPr>
-    </p:bg>
     <p:spTree>
       <p:nvGrpSpPr>
         <p:cNvPr id="1" name=""/>
@@ -3109,61 +3102,112 @@
         <p:nvPr/>
       </p:nvGrpSpPr>
       <p:grpSpPr/>
-      <p:sp>
-        <p:nvSpPr>
-          <p:cNvPr id="2" name="Rectangle 1"/>
-          <p:cNvSpPr/>
-          <p:nvPr/>
-        </p:nvSpPr>
-        <p:spPr>
-          <a:xfrm>
-            <a:off x="731520" y="2011680"/>
-            <a:ext cx="137160" cy="2926080"/>
-          </a:xfrm>
-          <a:prstGeom prst="rect">
-            <a:avLst/>
-          </a:prstGeom>
-          <a:solidFill>
-            <a:srgbClr val="6366F1"/>
-          </a:solidFill>
-          <a:ln w="12700">
-            <a:solidFill>
-              <a:srgbClr val="1E293B"/>
-            </a:solidFill>
-          </a:ln>
-        </p:spPr>
-        <p:style>
-          <a:lnRef idx="1">
-            <a:schemeClr val="accent1"/>
-          </a:lnRef>
-          <a:fillRef idx="3">
-            <a:schemeClr val="accent1"/>
-          </a:fillRef>
-          <a:effectRef idx="2">
-            <a:schemeClr val="accent1"/>
-          </a:effectRef>
-          <a:fontRef idx="minor">
-            <a:schemeClr val="lt1"/>
-          </a:fontRef>
-        </p:style>
-        <p:txBody>
-          <a:bodyPr rtlCol="0" anchor="ctr"/>
-          <a:lstStyle/>
-          <a:p>
-            <a:pPr algn="ctr"/>
-          </a:p>
-        </p:txBody>
-      </p:sp>
-      <p:sp>
-        <p:nvSpPr>
-          <p:cNvPr id="3" name="TextBox 2"/>
+      <p:pic>
+        <p:nvPicPr>
+          <p:cNvPr id="2" name="Picture 1" descr="background.png"/>
+          <p:cNvPicPr>
+            <a:picLocks noChangeAspect="1"/>
+          </p:cNvPicPr>
+          <p:nvPr/>
+        </p:nvPicPr>
+        <p:blipFill>
+          <a:blip r:embed="rId2"/>
+          <a:stretch>
+            <a:fillRect/>
+          </a:stretch>
+        </p:blipFill>
+        <p:spPr>
+          <a:xfrm>
+            <a:off x="0" y="0"/>
+            <a:ext cx="12191695" cy="6858000"/>
+          </a:xfrm>
+          <a:prstGeom prst="rect">
+            <a:avLst/>
+          </a:prstGeom>
+        </p:spPr>
+      </p:pic>
+      <p:pic>
+        <p:nvPicPr>
+          <p:cNvPr id="3" name="Picture 2" descr="logo.png"/>
+          <p:cNvPicPr>
+            <a:picLocks noChangeAspect="1"/>
+          </p:cNvPicPr>
+          <p:nvPr/>
+        </p:nvPicPr>
+        <p:blipFill>
+          <a:blip r:embed="rId3"/>
+          <a:stretch>
+            <a:fillRect/>
+          </a:stretch>
+        </p:blipFill>
+        <p:spPr>
+          <a:xfrm>
+            <a:off x="2560320" y="2011680"/>
+            <a:ext cx="1463040" cy="1463040"/>
+          </a:xfrm>
+          <a:prstGeom prst="rect">
+            <a:avLst/>
+          </a:prstGeom>
+        </p:spPr>
+      </p:pic>
+      <p:sp>
+        <p:nvSpPr>
+          <p:cNvPr id="4" name="TextBox 3"/>
           <p:cNvSpPr txBox="1"/>
           <p:nvPr/>
         </p:nvSpPr>
         <p:spPr>
           <a:xfrm>
-            <a:off x="1097280" y="1920240"/>
-            <a:ext cx="9601200" cy="3657600"/>
+            <a:off x="4297680" y="1920240"/>
+            <a:ext cx="5486400" cy="1645920"/>
+          </a:xfrm>
+          <a:prstGeom prst="rect">
+            <a:avLst/>
+          </a:prstGeom>
+          <a:noFill/>
+        </p:spPr>
+        <p:txBody>
+          <a:bodyPr wrap="square" lIns="0" tIns="0">
+            <a:spAutoFit/>
+          </a:bodyPr>
+          <a:lstStyle/>
+          <a:p>
+            <a:pPr>
+              <a:spcAft>
+                <a:spcPts val="0"/>
+              </a:spcAft>
+            </a:pPr>
+            <a:r>
+              <a:rPr sz="6800" b="1">
+                <a:solidFill>
+                  <a:srgbClr val="FFFFFF"/>
+                </a:solidFill>
+                <a:latin typeface="Arial"/>
+              </a:rPr>
+              <a:t>Suzano</a:t>
+            </a:r>
+            <a:r>
+              <a:rPr sz="6800" b="1">
+                <a:solidFill>
+                  <a:srgbClr val="FF7900"/>
+                </a:solidFill>
+                <a:latin typeface="Arial"/>
+              </a:rPr>
+              <a:t> IT</a:t>
+            </a:r>
+          </a:p>
+        </p:txBody>
+      </p:sp>
+      <p:sp>
+        <p:nvSpPr>
+          <p:cNvPr id="5" name="TextBox 4"/>
+          <p:cNvSpPr txBox="1"/>
+          <p:nvPr/>
+        </p:nvSpPr>
+        <p:spPr>
+          <a:xfrm>
+            <a:off x="1523390" y="3931920"/>
+            <a:ext cx="9144000" cy="914400"/>
           </a:xfrm>
           <a:prstGeom prst="rect">
             <a:avLst/>
@@ -3176,90 +3220,23 @@
           </a:bodyPr>
           <a:lstStyle/>
           <a:p>
-            <a:pPr>
-              <a:spcAft>
-                <a:spcPts val="1200"/>
-              </a:spcAft>
-              <a:defRPr sz="6400" b="1">
-                <a:solidFill>
-                  <a:srgbClr val="F8FAFC"/>
-                </a:solidFill>
-                <a:latin typeface="Arial"/>
-              </a:defRPr>
-            </a:pPr>
-            <a:r>
-              <a:t>SUZANO IT</a:t>
-            </a:r>
-          </a:p>
-          <a:p>
-            <a:pPr>
-              <a:spcAft>
-                <a:spcPts val="2800"/>
-              </a:spcAft>
-              <a:defRPr sz="2400" b="0">
-                <a:solidFill>
-                  <a:srgbClr val="38BDF8"/>
-                </a:solidFill>
-                <a:latin typeface="Arial"/>
-              </a:defRPr>
-            </a:pPr>
-            <a:r>
-              <a:t>Tecnologia Inteligente para Gestão de Oficinas e Frotas</a:t>
-            </a:r>
-          </a:p>
-          <a:p>
-            <a:pPr>
-              <a:spcAft>
-                <a:spcPts val="400"/>
-              </a:spcAft>
-              <a:defRPr sz="1400">
-                <a:solidFill>
-                  <a:srgbClr val="94A3B8"/>
-                </a:solidFill>
-                <a:latin typeface="Arial"/>
-              </a:defRPr>
-            </a:pPr>
-            <a:r>
-              <a:t>•  Plataforma SaaS Multiempresa (Multi-Tenant)</a:t>
-            </a:r>
-          </a:p>
-          <a:p>
-            <a:pPr>
-              <a:spcAft>
-                <a:spcPts val="400"/>
-              </a:spcAft>
-              <a:defRPr sz="1400">
-                <a:solidFill>
-                  <a:srgbClr val="94A3B8"/>
-                </a:solidFill>
-                <a:latin typeface="Arial"/>
-              </a:defRPr>
-            </a:pPr>
-            <a:r>
-              <a:t>•  Inteligência Artificial aplicada ao pós-venda automotivo</a:t>
-            </a:r>
-          </a:p>
-          <a:p>
-            <a:pPr>
-              <a:spcAft>
-                <a:spcPts val="400"/>
-              </a:spcAft>
-              <a:defRPr sz="1400">
-                <a:solidFill>
-                  <a:srgbClr val="94A3B8"/>
-                </a:solidFill>
-                <a:latin typeface="Arial"/>
-              </a:defRPr>
-            </a:pPr>
-            <a:r>
-              <a:t>•  Gestão unificada de ordens de serviço, peças, financeiros e frotas</a:t>
-            </a:r>
-          </a:p>
-        </p:txBody>
-      </p:sp>
-      <p:sp>
-        <p:nvSpPr>
-          <p:cNvPr id="4" name="TextBox 3"/>
+            <a:pPr algn="ctr">
+              <a:defRPr sz="2200" b="0">
+                <a:solidFill>
+                  <a:srgbClr val="FFFFFF"/>
+                </a:solidFill>
+                <a:latin typeface="Arial"/>
+              </a:defRPr>
+            </a:pPr>
+            <a:r>
+              <a:t>Tecnologia que move frotas.</a:t>
+            </a:r>
+          </a:p>
+        </p:txBody>
+      </p:sp>
+      <p:sp>
+        <p:nvSpPr>
+          <p:cNvPr id="6" name="TextBox 5"/>
           <p:cNvSpPr txBox="1"/>
           <p:nvPr/>
         </p:nvSpPr>
@@ -3282,13 +3259,13 @@
             <a:pPr>
               <a:defRPr sz="850">
                 <a:solidFill>
-                  <a:srgbClr val="94A3B8"/>
-                </a:solidFill>
-                <a:latin typeface="Arial"/>
-              </a:defRPr>
-            </a:pPr>
-            <a:r>
-              <a:t>SUZANO IT   |   Tecnologia para Oficinas e Frotas                                                                                   Slide 1 de 14</a:t>
+                  <a:srgbClr val="A1A1AA"/>
+                </a:solidFill>
+                <a:latin typeface="Arial"/>
+              </a:defRPr>
+            </a:pPr>
+            <a:r>
+              <a:t>SUZANO IT   |   Tecnologia que move frotas.                                                                                          Slide 1 de 15</a:t>
             </a:r>
           </a:p>
         </p:txBody>
@@ -3304,14 +3281,6 @@
 <file path=ppt/slides/slide10.xml><?xml version="1.0" encoding="utf-8"?>
 <p:sld xmlns:a="http://schemas.openxmlformats.org/drawingml/2006/main" xmlns:p="http://schemas.openxmlformats.org/presentationml/2006/main" xmlns:r="http://schemas.openxmlformats.org/officeDocument/2006/relationships">
   <p:cSld>
-    <p:bg>
-      <p:bgPr>
-        <a:solidFill>
-          <a:srgbClr val="080B11"/>
-        </a:solidFill>
-        <a:effectLst/>
-      </p:bgPr>
-    </p:bg>
     <p:spTree>
       <p:nvGrpSpPr>
         <p:cNvPr id="1" name=""/>
@@ -3319,9 +3288,33 @@
         <p:nvPr/>
       </p:nvGrpSpPr>
       <p:grpSpPr/>
-      <p:sp>
-        <p:nvSpPr>
-          <p:cNvPr id="2" name="TextBox 1"/>
+      <p:pic>
+        <p:nvPicPr>
+          <p:cNvPr id="2" name="Picture 1" descr="background.png"/>
+          <p:cNvPicPr>
+            <a:picLocks noChangeAspect="1"/>
+          </p:cNvPicPr>
+          <p:nvPr/>
+        </p:nvPicPr>
+        <p:blipFill>
+          <a:blip r:embed="rId2"/>
+          <a:stretch>
+            <a:fillRect/>
+          </a:stretch>
+        </p:blipFill>
+        <p:spPr>
+          <a:xfrm>
+            <a:off x="0" y="0"/>
+            <a:ext cx="12191695" cy="6858000"/>
+          </a:xfrm>
+          <a:prstGeom prst="rect">
+            <a:avLst/>
+          </a:prstGeom>
+        </p:spPr>
+      </p:pic>
+      <p:sp>
+        <p:nvSpPr>
+          <p:cNvPr id="3" name="TextBox 2"/>
           <p:cNvSpPr txBox="1"/>
           <p:nvPr/>
         </p:nvSpPr>
@@ -3344,20 +3337,20 @@
             <a:pPr>
               <a:defRPr sz="1000" b="1">
                 <a:solidFill>
-                  <a:srgbClr val="38BDF8"/>
-                </a:solidFill>
-                <a:latin typeface="Arial"/>
-              </a:defRPr>
-            </a:pPr>
-            <a:r>
-              <a:t>PÚBLICO E POTENCIAL</a:t>
-            </a:r>
-          </a:p>
-        </p:txBody>
-      </p:sp>
-      <p:sp>
-        <p:nvSpPr>
-          <p:cNvPr id="3" name="TextBox 2"/>
+                  <a:srgbClr val="FF7900"/>
+                </a:solidFill>
+                <a:latin typeface="Arial"/>
+              </a:defRPr>
+            </a:pPr>
+            <a:r>
+              <a:t>MONETIZAÇÃO SAAS</a:t>
+            </a:r>
+          </a:p>
+        </p:txBody>
+      </p:sp>
+      <p:sp>
+        <p:nvSpPr>
+          <p:cNvPr id="4" name="TextBox 3"/>
           <p:cNvSpPr txBox="1"/>
           <p:nvPr/>
         </p:nvSpPr>
@@ -3380,27 +3373,27 @@
             <a:pPr>
               <a:defRPr sz="2800" b="1">
                 <a:solidFill>
-                  <a:srgbClr val="F8FAFC"/>
-                </a:solidFill>
-                <a:latin typeface="Arial"/>
-              </a:defRPr>
-            </a:pPr>
-            <a:r>
-              <a:t>Mercado Alvo</a:t>
-            </a:r>
-          </a:p>
-        </p:txBody>
-      </p:sp>
-      <p:sp>
-        <p:nvSpPr>
-          <p:cNvPr id="4" name="TextBox 3"/>
+                  <a:srgbClr val="FFFFFF"/>
+                </a:solidFill>
+                <a:latin typeface="Arial"/>
+              </a:defRPr>
+            </a:pPr>
+            <a:r>
+              <a:t>Modelo de Negócio</a:t>
+            </a:r>
+          </a:p>
+        </p:txBody>
+      </p:sp>
+      <p:sp>
+        <p:nvSpPr>
+          <p:cNvPr id="5" name="TextBox 4"/>
           <p:cNvSpPr txBox="1"/>
           <p:nvPr/>
         </p:nvSpPr>
         <p:spPr>
           <a:xfrm>
-            <a:off x="731520" y="1645920"/>
-            <a:ext cx="5303520" cy="4389120"/>
+            <a:off x="731520" y="1463040"/>
+            <a:ext cx="10698480" cy="548640"/>
           </a:xfrm>
           <a:prstGeom prst="rect">
             <a:avLst/>
@@ -3408,128 +3401,45 @@
           <a:noFill/>
         </p:spPr>
         <p:txBody>
-          <a:bodyPr wrap="square">
+          <a:bodyPr wrap="none">
             <a:spAutoFit/>
           </a:bodyPr>
           <a:lstStyle/>
           <a:p>
             <a:pPr>
-              <a:spcAft>
-                <a:spcPts val="1400"/>
-              </a:spcAft>
-              <a:defRPr sz="1800" b="1">
-                <a:solidFill>
-                  <a:srgbClr val="F8FAFC"/>
-                </a:solidFill>
-                <a:latin typeface="Arial"/>
-              </a:defRPr>
-            </a:pPr>
-            <a:r>
-              <a:t>Quem são nossos clientes:</a:t>
-            </a:r>
-          </a:p>
-          <a:p>
-            <a:pPr>
-              <a:spcAft>
-                <a:spcPts val="1200"/>
-              </a:spcAft>
-              <a:defRPr sz="1400">
-                <a:solidFill>
-                  <a:srgbClr val="94A3B8"/>
-                </a:solidFill>
-                <a:latin typeface="Arial"/>
-              </a:defRPr>
-            </a:pPr>
-            <a:r>
-              <a:t>•  Oficinas mecânicas e auto centers independentes.</a:t>
-            </a:r>
-          </a:p>
-          <a:p>
-            <a:pPr>
-              <a:spcAft>
-                <a:spcPts val="1200"/>
-              </a:spcAft>
-              <a:defRPr sz="1400">
-                <a:solidFill>
-                  <a:srgbClr val="94A3B8"/>
-                </a:solidFill>
-                <a:latin typeface="Arial"/>
-              </a:defRPr>
-            </a:pPr>
-            <a:r>
-              <a:t>•  Transportadoras, frotas corporativas e logísticas.</a:t>
-            </a:r>
-          </a:p>
-          <a:p>
-            <a:pPr>
-              <a:spcAft>
-                <a:spcPts val="1200"/>
-              </a:spcAft>
-              <a:defRPr sz="1400">
-                <a:solidFill>
-                  <a:srgbClr val="94A3B8"/>
-                </a:solidFill>
-                <a:latin typeface="Arial"/>
-              </a:defRPr>
-            </a:pPr>
-            <a:r>
-              <a:t>•  Locadoras de veículos e cooperativas de táxi/aplicativos.</a:t>
-            </a:r>
-          </a:p>
-          <a:p>
-            <a:pPr>
-              <a:spcAft>
-                <a:spcPts val="1200"/>
-              </a:spcAft>
-              <a:defRPr sz="1400">
-                <a:solidFill>
-                  <a:srgbClr val="94A3B8"/>
-                </a:solidFill>
-                <a:latin typeface="Arial"/>
-              </a:defRPr>
-            </a:pPr>
-            <a:r>
-              <a:t>•  Concessionárias de veículos e redes de autopeças.</a:t>
-            </a:r>
-          </a:p>
-          <a:p>
-            <a:pPr>
-              <a:spcAft>
-                <a:spcPts val="1200"/>
-              </a:spcAft>
-              <a:defRPr sz="1400">
-                <a:solidFill>
-                  <a:srgbClr val="94A3B8"/>
-                </a:solidFill>
-                <a:latin typeface="Arial"/>
-              </a:defRPr>
-            </a:pPr>
-            <a:r>
-              <a:t>•  Prefeituras municipais e órgãos governamentais.</a:t>
-            </a:r>
-          </a:p>
-        </p:txBody>
-      </p:sp>
-      <p:sp>
-        <p:nvSpPr>
-          <p:cNvPr id="5" name="Rectangle 4"/>
+              <a:defRPr sz="1600">
+                <a:solidFill>
+                  <a:srgbClr val="A1A1AA"/>
+                </a:solidFill>
+                <a:latin typeface="Arial"/>
+              </a:defRPr>
+            </a:pPr>
+            <a:r>
+              <a:t>Assinaturas mensais recorrentes (MRR) estruturadas para crescer conforme o uso e porte do cliente.</a:t>
+            </a:r>
+          </a:p>
+        </p:txBody>
+      </p:sp>
+      <p:sp>
+        <p:nvSpPr>
+          <p:cNvPr id="6" name="Rectangle 5"/>
           <p:cNvSpPr/>
           <p:nvPr/>
         </p:nvSpPr>
         <p:spPr>
           <a:xfrm>
-            <a:off x="6400800" y="1645920"/>
-            <a:ext cx="5029200" cy="4114800"/>
+            <a:off x="731520" y="2103120"/>
+            <a:ext cx="3413455" cy="3931920"/>
           </a:xfrm>
           <a:prstGeom prst="rect">
             <a:avLst/>
           </a:prstGeom>
           <a:solidFill>
-            <a:srgbClr val="101725"/>
+            <a:srgbClr val="121316"/>
           </a:solidFill>
           <a:ln w="12700">
             <a:solidFill>
-              <a:srgbClr val="1E293B"/>
+              <a:srgbClr val="2D2D32"/>
             </a:solidFill>
           </a:ln>
         </p:spPr>
@@ -3557,14 +3467,14 @@
       </p:sp>
       <p:sp>
         <p:nvSpPr>
-          <p:cNvPr id="6" name="TextBox 5"/>
+          <p:cNvPr id="7" name="TextBox 6"/>
           <p:cNvSpPr txBox="1"/>
           <p:nvPr/>
         </p:nvSpPr>
         <p:spPr>
           <a:xfrm>
-            <a:off x="6675120" y="1920240"/>
-            <a:ext cx="4480560" cy="3566160"/>
+            <a:off x="822960" y="2286000"/>
+            <a:ext cx="3230575" cy="3566160"/>
           </a:xfrm>
           <a:prstGeom prst="rect">
             <a:avLst/>
@@ -3579,42 +3489,480 @@
           <a:p>
             <a:pPr>
               <a:spcAft>
+                <a:spcPts val="400"/>
+              </a:spcAft>
+              <a:defRPr sz="1800" b="1">
+                <a:solidFill>
+                  <a:srgbClr val="FF7900"/>
+                </a:solidFill>
+                <a:latin typeface="Arial"/>
+              </a:defRPr>
+            </a:pPr>
+            <a:r>
+              <a:t>STARTER</a:t>
+            </a:r>
+          </a:p>
+          <a:p>
+            <a:pPr>
+              <a:spcAft>
+                <a:spcPts val="200"/>
+              </a:spcAft>
+              <a:defRPr sz="2200" b="1">
+                <a:solidFill>
+                  <a:srgbClr val="FFFFFF"/>
+                </a:solidFill>
+                <a:latin typeface="Arial"/>
+              </a:defRPr>
+            </a:pPr>
+            <a:r>
+              <a:t>R$ 199 / mês</a:t>
+            </a:r>
+          </a:p>
+          <a:p>
+            <a:pPr>
+              <a:spcAft>
                 <a:spcPts val="1800"/>
               </a:spcAft>
-              <a:defRPr sz="1400" b="1">
-                <a:solidFill>
-                  <a:srgbClr val="38BDF8"/>
-                </a:solidFill>
-                <a:latin typeface="Arial"/>
-              </a:defRPr>
-            </a:pPr>
-            <a:r>
-              <a:t>POTENCIAL DE CRESCIMENTO</a:t>
-            </a:r>
-          </a:p>
-          <a:p>
-            <a:pPr>
-              <a:defRPr sz="1500">
-                <a:solidFill>
-                  <a:srgbClr val="94A3B8"/>
-                </a:solidFill>
-                <a:latin typeface="Arial"/>
-              </a:defRPr>
-            </a:pPr>
-            <a:r>
-              <a:t>O mercado brasileiro conta com mais de 100 mil oficinas de pós-venda cadastradas e um crescimento acelerado no número de empresas optando por gerenciar frotas próprias para reduzir custos de distribuição.</a:t>
-            </a:r>
-            <a:br/>
-            <a:br/>
-            <a:r>
-              <a:t>A digitalização e a inteligência operacional são as maiores prioridades para o setor nos próximos anos.</a:t>
-            </a:r>
-          </a:p>
-        </p:txBody>
-      </p:sp>
-      <p:sp>
-        <p:nvSpPr>
-          <p:cNvPr id="7" name="TextBox 6"/>
+              <a:defRPr sz="1200">
+                <a:solidFill>
+                  <a:srgbClr val="A1A1AA"/>
+                </a:solidFill>
+                <a:latin typeface="Arial"/>
+              </a:defRPr>
+            </a:pPr>
+            <a:r>
+              <a:t>Pequenas Oficinas</a:t>
+            </a:r>
+          </a:p>
+          <a:p>
+            <a:pPr>
+              <a:spcAft>
+                <a:spcPts val="600"/>
+              </a:spcAft>
+              <a:defRPr sz="1200">
+                <a:solidFill>
+                  <a:srgbClr val="A1A1AA"/>
+                </a:solidFill>
+                <a:latin typeface="Arial"/>
+              </a:defRPr>
+            </a:pPr>
+            <a:r>
+              <a:t>•  Funcionalidades essenciais</a:t>
+            </a:r>
+          </a:p>
+          <a:p>
+            <a:pPr>
+              <a:spcAft>
+                <a:spcPts val="600"/>
+              </a:spcAft>
+              <a:defRPr sz="1200">
+                <a:solidFill>
+                  <a:srgbClr val="A1A1AA"/>
+                </a:solidFill>
+                <a:latin typeface="Arial"/>
+              </a:defRPr>
+            </a:pPr>
+            <a:r>
+              <a:t>•  Gestão de OS e Cadastros</a:t>
+            </a:r>
+          </a:p>
+          <a:p>
+            <a:pPr>
+              <a:spcAft>
+                <a:spcPts val="600"/>
+              </a:spcAft>
+              <a:defRPr sz="1200">
+                <a:solidFill>
+                  <a:srgbClr val="A1A1AA"/>
+                </a:solidFill>
+                <a:latin typeface="Arial"/>
+              </a:defRPr>
+            </a:pPr>
+            <a:r>
+              <a:t>•  Orçamentos comerciais</a:t>
+            </a:r>
+          </a:p>
+          <a:p>
+            <a:pPr>
+              <a:spcAft>
+                <a:spcPts val="600"/>
+              </a:spcAft>
+              <a:defRPr sz="1200">
+                <a:solidFill>
+                  <a:srgbClr val="A1A1AA"/>
+                </a:solidFill>
+                <a:latin typeface="Arial"/>
+              </a:defRPr>
+            </a:pPr>
+            <a:r>
+              <a:t>•  Suporte digital básico</a:t>
+            </a:r>
+          </a:p>
+        </p:txBody>
+      </p:sp>
+      <p:sp>
+        <p:nvSpPr>
+          <p:cNvPr id="8" name="Rectangle 7"/>
+          <p:cNvSpPr/>
+          <p:nvPr/>
+        </p:nvSpPr>
+        <p:spPr>
+          <a:xfrm>
+            <a:off x="4389120" y="2103120"/>
+            <a:ext cx="3413455" cy="3931920"/>
+          </a:xfrm>
+          <a:prstGeom prst="rect">
+            <a:avLst/>
+          </a:prstGeom>
+          <a:solidFill>
+            <a:srgbClr val="121E31"/>
+          </a:solidFill>
+          <a:ln w="12700">
+            <a:solidFill>
+              <a:srgbClr val="2D2D32"/>
+            </a:solidFill>
+          </a:ln>
+        </p:spPr>
+        <p:style>
+          <a:lnRef idx="1">
+            <a:schemeClr val="accent1"/>
+          </a:lnRef>
+          <a:fillRef idx="3">
+            <a:schemeClr val="accent1"/>
+          </a:fillRef>
+          <a:effectRef idx="2">
+            <a:schemeClr val="accent1"/>
+          </a:effectRef>
+          <a:fontRef idx="minor">
+            <a:schemeClr val="lt1"/>
+          </a:fontRef>
+        </p:style>
+        <p:txBody>
+          <a:bodyPr rtlCol="0" anchor="ctr"/>
+          <a:lstStyle/>
+          <a:p>
+            <a:pPr algn="ctr"/>
+          </a:p>
+        </p:txBody>
+      </p:sp>
+      <p:sp>
+        <p:nvSpPr>
+          <p:cNvPr id="9" name="TextBox 8"/>
+          <p:cNvSpPr txBox="1"/>
+          <p:nvPr/>
+        </p:nvSpPr>
+        <p:spPr>
+          <a:xfrm>
+            <a:off x="4480559" y="2286000"/>
+            <a:ext cx="3230575" cy="3566160"/>
+          </a:xfrm>
+          <a:prstGeom prst="rect">
+            <a:avLst/>
+          </a:prstGeom>
+          <a:noFill/>
+        </p:spPr>
+        <p:txBody>
+          <a:bodyPr wrap="square">
+            <a:spAutoFit/>
+          </a:bodyPr>
+          <a:lstStyle/>
+          <a:p>
+            <a:pPr>
+              <a:spcAft>
+                <a:spcPts val="400"/>
+              </a:spcAft>
+              <a:defRPr sz="1800" b="1">
+                <a:solidFill>
+                  <a:srgbClr val="FF7900"/>
+                </a:solidFill>
+                <a:latin typeface="Arial"/>
+              </a:defRPr>
+            </a:pPr>
+            <a:r>
+              <a:t>PROFESSIONAL</a:t>
+            </a:r>
+          </a:p>
+          <a:p>
+            <a:pPr>
+              <a:spcAft>
+                <a:spcPts val="200"/>
+              </a:spcAft>
+              <a:defRPr sz="2200" b="1">
+                <a:solidFill>
+                  <a:srgbClr val="FFFFFF"/>
+                </a:solidFill>
+                <a:latin typeface="Arial"/>
+              </a:defRPr>
+            </a:pPr>
+            <a:r>
+              <a:t>R$ 499 / mês</a:t>
+            </a:r>
+          </a:p>
+          <a:p>
+            <a:pPr>
+              <a:spcAft>
+                <a:spcPts val="1800"/>
+              </a:spcAft>
+              <a:defRPr sz="1200">
+                <a:solidFill>
+                  <a:srgbClr val="A1A1AA"/>
+                </a:solidFill>
+                <a:latin typeface="Arial"/>
+              </a:defRPr>
+            </a:pPr>
+            <a:r>
+              <a:t>Empresas em Crescimento</a:t>
+            </a:r>
+          </a:p>
+          <a:p>
+            <a:pPr>
+              <a:spcAft>
+                <a:spcPts val="600"/>
+              </a:spcAft>
+              <a:defRPr sz="1200">
+                <a:solidFill>
+                  <a:srgbClr val="A1A1AA"/>
+                </a:solidFill>
+                <a:latin typeface="Arial"/>
+              </a:defRPr>
+            </a:pPr>
+            <a:r>
+              <a:t>•  Gestão de Oficina completa</a:t>
+            </a:r>
+          </a:p>
+          <a:p>
+            <a:pPr>
+              <a:spcAft>
+                <a:spcPts val="600"/>
+              </a:spcAft>
+              <a:defRPr sz="1200">
+                <a:solidFill>
+                  <a:srgbClr val="A1A1AA"/>
+                </a:solidFill>
+                <a:latin typeface="Arial"/>
+              </a:defRPr>
+            </a:pPr>
+            <a:r>
+              <a:t>•  Módulo de Frotas básico</a:t>
+            </a:r>
+          </a:p>
+          <a:p>
+            <a:pPr>
+              <a:spcAft>
+                <a:spcPts val="600"/>
+              </a:spcAft>
+              <a:defRPr sz="1200">
+                <a:solidFill>
+                  <a:srgbClr val="A1A1AA"/>
+                </a:solidFill>
+                <a:latin typeface="Arial"/>
+              </a:defRPr>
+            </a:pPr>
+            <a:r>
+              <a:t>•  Controle financeiro avançado</a:t>
+            </a:r>
+          </a:p>
+          <a:p>
+            <a:pPr>
+              <a:spcAft>
+                <a:spcPts val="600"/>
+              </a:spcAft>
+              <a:defRPr sz="1200">
+                <a:solidFill>
+                  <a:srgbClr val="A1A1AA"/>
+                </a:solidFill>
+                <a:latin typeface="Arial"/>
+              </a:defRPr>
+            </a:pPr>
+            <a:r>
+              <a:t>•  Emissão integrada de NF-e</a:t>
+            </a:r>
+          </a:p>
+        </p:txBody>
+      </p:sp>
+      <p:sp>
+        <p:nvSpPr>
+          <p:cNvPr id="10" name="Rectangle 9"/>
+          <p:cNvSpPr/>
+          <p:nvPr/>
+        </p:nvSpPr>
+        <p:spPr>
+          <a:xfrm>
+            <a:off x="8046720" y="2103120"/>
+            <a:ext cx="3413455" cy="3931920"/>
+          </a:xfrm>
+          <a:prstGeom prst="rect">
+            <a:avLst/>
+          </a:prstGeom>
+          <a:solidFill>
+            <a:srgbClr val="121316"/>
+          </a:solidFill>
+          <a:ln w="12700">
+            <a:solidFill>
+              <a:srgbClr val="2D2D32"/>
+            </a:solidFill>
+          </a:ln>
+        </p:spPr>
+        <p:style>
+          <a:lnRef idx="1">
+            <a:schemeClr val="accent1"/>
+          </a:lnRef>
+          <a:fillRef idx="3">
+            <a:schemeClr val="accent1"/>
+          </a:fillRef>
+          <a:effectRef idx="2">
+            <a:schemeClr val="accent1"/>
+          </a:effectRef>
+          <a:fontRef idx="minor">
+            <a:schemeClr val="lt1"/>
+          </a:fontRef>
+        </p:style>
+        <p:txBody>
+          <a:bodyPr rtlCol="0" anchor="ctr"/>
+          <a:lstStyle/>
+          <a:p>
+            <a:pPr algn="ctr"/>
+          </a:p>
+        </p:txBody>
+      </p:sp>
+      <p:sp>
+        <p:nvSpPr>
+          <p:cNvPr id="11" name="TextBox 10"/>
+          <p:cNvSpPr txBox="1"/>
+          <p:nvPr/>
+        </p:nvSpPr>
+        <p:spPr>
+          <a:xfrm>
+            <a:off x="8138160" y="2286000"/>
+            <a:ext cx="3230575" cy="3566160"/>
+          </a:xfrm>
+          <a:prstGeom prst="rect">
+            <a:avLst/>
+          </a:prstGeom>
+          <a:noFill/>
+        </p:spPr>
+        <p:txBody>
+          <a:bodyPr wrap="square">
+            <a:spAutoFit/>
+          </a:bodyPr>
+          <a:lstStyle/>
+          <a:p>
+            <a:pPr>
+              <a:spcAft>
+                <a:spcPts val="400"/>
+              </a:spcAft>
+              <a:defRPr sz="1800" b="1">
+                <a:solidFill>
+                  <a:srgbClr val="FF7900"/>
+                </a:solidFill>
+                <a:latin typeface="Arial"/>
+              </a:defRPr>
+            </a:pPr>
+            <a:r>
+              <a:t>ENTERPRISE</a:t>
+            </a:r>
+          </a:p>
+          <a:p>
+            <a:pPr>
+              <a:spcAft>
+                <a:spcPts val="200"/>
+              </a:spcAft>
+              <a:defRPr sz="2200" b="1">
+                <a:solidFill>
+                  <a:srgbClr val="FFFFFF"/>
+                </a:solidFill>
+                <a:latin typeface="Arial"/>
+              </a:defRPr>
+            </a:pPr>
+            <a:r>
+              <a:t>Sob Consulta</a:t>
+            </a:r>
+          </a:p>
+          <a:p>
+            <a:pPr>
+              <a:spcAft>
+                <a:spcPts val="1800"/>
+              </a:spcAft>
+              <a:defRPr sz="1200">
+                <a:solidFill>
+                  <a:srgbClr val="A1A1AA"/>
+                </a:solidFill>
+                <a:latin typeface="Arial"/>
+              </a:defRPr>
+            </a:pPr>
+            <a:r>
+              <a:t>Grandes Operações</a:t>
+            </a:r>
+          </a:p>
+          <a:p>
+            <a:pPr>
+              <a:spcAft>
+                <a:spcPts val="600"/>
+              </a:spcAft>
+              <a:defRPr sz="1200">
+                <a:solidFill>
+                  <a:srgbClr val="A1A1AA"/>
+                </a:solidFill>
+                <a:latin typeface="Arial"/>
+              </a:defRPr>
+            </a:pPr>
+            <a:r>
+              <a:t>•  Frotistas e transportadoras</a:t>
+            </a:r>
+          </a:p>
+          <a:p>
+            <a:pPr>
+              <a:spcAft>
+                <a:spcPts val="600"/>
+              </a:spcAft>
+              <a:defRPr sz="1200">
+                <a:solidFill>
+                  <a:srgbClr val="A1A1AA"/>
+                </a:solidFill>
+                <a:latin typeface="Arial"/>
+              </a:defRPr>
+            </a:pPr>
+            <a:r>
+              <a:t>•  Integrações de API personalizadas</a:t>
+            </a:r>
+          </a:p>
+          <a:p>
+            <a:pPr>
+              <a:spcAft>
+                <a:spcPts val="600"/>
+              </a:spcAft>
+              <a:defRPr sz="1200">
+                <a:solidFill>
+                  <a:srgbClr val="A1A1AA"/>
+                </a:solidFill>
+                <a:latin typeface="Arial"/>
+              </a:defRPr>
+            </a:pPr>
+            <a:r>
+              <a:t>•  Arquitetura sob demanda</a:t>
+            </a:r>
+          </a:p>
+          <a:p>
+            <a:pPr>
+              <a:spcAft>
+                <a:spcPts val="600"/>
+              </a:spcAft>
+              <a:defRPr sz="1200">
+                <a:solidFill>
+                  <a:srgbClr val="A1A1AA"/>
+                </a:solidFill>
+                <a:latin typeface="Arial"/>
+              </a:defRPr>
+            </a:pPr>
+            <a:r>
+              <a:t>•  Suporte e SLA dedicado</a:t>
+            </a:r>
+          </a:p>
+        </p:txBody>
+      </p:sp>
+      <p:sp>
+        <p:nvSpPr>
+          <p:cNvPr id="12" name="TextBox 11"/>
           <p:cNvSpPr txBox="1"/>
           <p:nvPr/>
         </p:nvSpPr>
@@ -3637,13 +3985,13 @@
             <a:pPr>
               <a:defRPr sz="850">
                 <a:solidFill>
-                  <a:srgbClr val="94A3B8"/>
-                </a:solidFill>
-                <a:latin typeface="Arial"/>
-              </a:defRPr>
-            </a:pPr>
-            <a:r>
-              <a:t>SUZANO IT   |   Tecnologia para Oficinas e Frotas                                                                                   Slide 10 de 14</a:t>
+                  <a:srgbClr val="A1A1AA"/>
+                </a:solidFill>
+                <a:latin typeface="Arial"/>
+              </a:defRPr>
+            </a:pPr>
+            <a:r>
+              <a:t>SUZANO IT   |   Tecnologia que move frotas.                                                                                          Slide 10 de 15</a:t>
             </a:r>
           </a:p>
         </p:txBody>
@@ -3659,14 +4007,6 @@
 <file path=ppt/slides/slide11.xml><?xml version="1.0" encoding="utf-8"?>
 <p:sld xmlns:a="http://schemas.openxmlformats.org/drawingml/2006/main" xmlns:p="http://schemas.openxmlformats.org/presentationml/2006/main" xmlns:r="http://schemas.openxmlformats.org/officeDocument/2006/relationships">
   <p:cSld>
-    <p:bg>
-      <p:bgPr>
-        <a:solidFill>
-          <a:srgbClr val="080B11"/>
-        </a:solidFill>
-        <a:effectLst/>
-      </p:bgPr>
-    </p:bg>
     <p:spTree>
       <p:nvGrpSpPr>
         <p:cNvPr id="1" name=""/>
@@ -3674,9 +4014,33 @@
         <p:nvPr/>
       </p:nvGrpSpPr>
       <p:grpSpPr/>
-      <p:sp>
-        <p:nvSpPr>
-          <p:cNvPr id="2" name="TextBox 1"/>
+      <p:pic>
+        <p:nvPicPr>
+          <p:cNvPr id="2" name="Picture 1" descr="background.png"/>
+          <p:cNvPicPr>
+            <a:picLocks noChangeAspect="1"/>
+          </p:cNvPicPr>
+          <p:nvPr/>
+        </p:nvPicPr>
+        <p:blipFill>
+          <a:blip r:embed="rId2"/>
+          <a:stretch>
+            <a:fillRect/>
+          </a:stretch>
+        </p:blipFill>
+        <p:spPr>
+          <a:xfrm>
+            <a:off x="0" y="0"/>
+            <a:ext cx="12191695" cy="6858000"/>
+          </a:xfrm>
+          <a:prstGeom prst="rect">
+            <a:avLst/>
+          </a:prstGeom>
+        </p:spPr>
+      </p:pic>
+      <p:sp>
+        <p:nvSpPr>
+          <p:cNvPr id="3" name="TextBox 2"/>
           <p:cNvSpPr txBox="1"/>
           <p:nvPr/>
         </p:nvSpPr>
@@ -3699,20 +4063,20 @@
             <a:pPr>
               <a:defRPr sz="1000" b="1">
                 <a:solidFill>
-                  <a:srgbClr val="38BDF8"/>
-                </a:solidFill>
-                <a:latin typeface="Arial"/>
-              </a:defRPr>
-            </a:pPr>
-            <a:r>
-              <a:t>TECNOLOGIA E PERFORMANCE</a:t>
-            </a:r>
-          </a:p>
-        </p:txBody>
-      </p:sp>
-      <p:sp>
-        <p:nvSpPr>
-          <p:cNvPr id="3" name="TextBox 2"/>
+                  <a:srgbClr val="FF7900"/>
+                </a:solidFill>
+                <a:latin typeface="Arial"/>
+              </a:defRPr>
+            </a:pPr>
+            <a:r>
+              <a:t>PÚBLICO E POTENCIAL</a:t>
+            </a:r>
+          </a:p>
+        </p:txBody>
+      </p:sp>
+      <p:sp>
+        <p:nvSpPr>
+          <p:cNvPr id="4" name="TextBox 3"/>
           <p:cNvSpPr txBox="1"/>
           <p:nvPr/>
         </p:nvSpPr>
@@ -3735,37 +4099,156 @@
             <a:pPr>
               <a:defRPr sz="2800" b="1">
                 <a:solidFill>
-                  <a:srgbClr val="F8FAFC"/>
-                </a:solidFill>
-                <a:latin typeface="Arial"/>
-              </a:defRPr>
-            </a:pPr>
-            <a:r>
-              <a:t>Arquitetura Tecnológica</a:t>
-            </a:r>
-          </a:p>
-        </p:txBody>
-      </p:sp>
-      <p:sp>
-        <p:nvSpPr>
-          <p:cNvPr id="4" name="Rectangle 3"/>
+                  <a:srgbClr val="FFFFFF"/>
+                </a:solidFill>
+                <a:latin typeface="Arial"/>
+              </a:defRPr>
+            </a:pPr>
+            <a:r>
+              <a:t>Mercado Alvo</a:t>
+            </a:r>
+          </a:p>
+        </p:txBody>
+      </p:sp>
+      <p:sp>
+        <p:nvSpPr>
+          <p:cNvPr id="5" name="TextBox 4"/>
+          <p:cNvSpPr txBox="1"/>
+          <p:nvPr/>
+        </p:nvSpPr>
+        <p:spPr>
+          <a:xfrm>
+            <a:off x="731520" y="1645920"/>
+            <a:ext cx="5303520" cy="4389120"/>
+          </a:xfrm>
+          <a:prstGeom prst="rect">
+            <a:avLst/>
+          </a:prstGeom>
+          <a:noFill/>
+        </p:spPr>
+        <p:txBody>
+          <a:bodyPr wrap="square">
+            <a:spAutoFit/>
+          </a:bodyPr>
+          <a:lstStyle/>
+          <a:p>
+            <a:pPr>
+              <a:spcAft>
+                <a:spcPts val="1400"/>
+              </a:spcAft>
+              <a:defRPr sz="1800" b="1">
+                <a:solidFill>
+                  <a:srgbClr val="FFFFFF"/>
+                </a:solidFill>
+                <a:latin typeface="Arial"/>
+              </a:defRPr>
+            </a:pPr>
+            <a:r>
+              <a:t>Quem são nossos clientes:</a:t>
+            </a:r>
+          </a:p>
+          <a:p>
+            <a:pPr>
+              <a:spcAft>
+                <a:spcPts val="1200"/>
+              </a:spcAft>
+              <a:defRPr sz="1400">
+                <a:solidFill>
+                  <a:srgbClr val="A1A1AA"/>
+                </a:solidFill>
+                <a:latin typeface="Arial"/>
+              </a:defRPr>
+            </a:pPr>
+            <a:r>
+              <a:t>•  Oficinas mecânicas e auto centers independentes.</a:t>
+            </a:r>
+          </a:p>
+          <a:p>
+            <a:pPr>
+              <a:spcAft>
+                <a:spcPts val="1200"/>
+              </a:spcAft>
+              <a:defRPr sz="1400">
+                <a:solidFill>
+                  <a:srgbClr val="A1A1AA"/>
+                </a:solidFill>
+                <a:latin typeface="Arial"/>
+              </a:defRPr>
+            </a:pPr>
+            <a:r>
+              <a:t>•  Transportadoras, frotas corporativas e logísticas.</a:t>
+            </a:r>
+          </a:p>
+          <a:p>
+            <a:pPr>
+              <a:spcAft>
+                <a:spcPts val="1200"/>
+              </a:spcAft>
+              <a:defRPr sz="1400">
+                <a:solidFill>
+                  <a:srgbClr val="A1A1AA"/>
+                </a:solidFill>
+                <a:latin typeface="Arial"/>
+              </a:defRPr>
+            </a:pPr>
+            <a:r>
+              <a:t>•  Locadoras de veículos e cooperativas de táxi/aplicativos.</a:t>
+            </a:r>
+          </a:p>
+          <a:p>
+            <a:pPr>
+              <a:spcAft>
+                <a:spcPts val="1200"/>
+              </a:spcAft>
+              <a:defRPr sz="1400">
+                <a:solidFill>
+                  <a:srgbClr val="A1A1AA"/>
+                </a:solidFill>
+                <a:latin typeface="Arial"/>
+              </a:defRPr>
+            </a:pPr>
+            <a:r>
+              <a:t>•  Concessionárias de veículos e redes de autopeças.</a:t>
+            </a:r>
+          </a:p>
+          <a:p>
+            <a:pPr>
+              <a:spcAft>
+                <a:spcPts val="1200"/>
+              </a:spcAft>
+              <a:defRPr sz="1400">
+                <a:solidFill>
+                  <a:srgbClr val="A1A1AA"/>
+                </a:solidFill>
+                <a:latin typeface="Arial"/>
+              </a:defRPr>
+            </a:pPr>
+            <a:r>
+              <a:t>•  Prefeituras municipais e órgãos governamentais.</a:t>
+            </a:r>
+          </a:p>
+        </p:txBody>
+      </p:sp>
+      <p:sp>
+        <p:nvSpPr>
+          <p:cNvPr id="6" name="Rectangle 5"/>
           <p:cNvSpPr/>
           <p:nvPr/>
         </p:nvSpPr>
         <p:spPr>
           <a:xfrm>
-            <a:off x="731520" y="1828800"/>
-            <a:ext cx="2499055" cy="3931920"/>
+            <a:off x="6400800" y="1645920"/>
+            <a:ext cx="5029200" cy="4114800"/>
           </a:xfrm>
           <a:prstGeom prst="rect">
             <a:avLst/>
           </a:prstGeom>
           <a:solidFill>
-            <a:srgbClr val="101725"/>
+            <a:srgbClr val="121316"/>
           </a:solidFill>
           <a:ln w="12700">
             <a:solidFill>
-              <a:srgbClr val="1E293B"/>
+              <a:srgbClr val="2D2D32"/>
             </a:solidFill>
           </a:ln>
         </p:spPr>
@@ -3793,14 +4276,14 @@
       </p:sp>
       <p:sp>
         <p:nvSpPr>
-          <p:cNvPr id="5" name="TextBox 4"/>
+          <p:cNvPr id="7" name="TextBox 6"/>
           <p:cNvSpPr txBox="1"/>
           <p:nvPr/>
         </p:nvSpPr>
         <p:spPr>
           <a:xfrm>
-            <a:off x="822960" y="2011680"/>
-            <a:ext cx="2316175" cy="3566160"/>
+            <a:off x="6675120" y="1920240"/>
+            <a:ext cx="4480560" cy="3566160"/>
           </a:xfrm>
           <a:prstGeom prst="rect">
             <a:avLst/>
@@ -3815,373 +4298,42 @@
           <a:p>
             <a:pPr>
               <a:spcAft>
-                <a:spcPts val="1400"/>
+                <a:spcPts val="1800"/>
               </a:spcAft>
-              <a:defRPr sz="1800" b="1">
-                <a:solidFill>
-                  <a:srgbClr val="38BDF8"/>
-                </a:solidFill>
-                <a:latin typeface="Arial"/>
-              </a:defRPr>
-            </a:pPr>
-            <a:r>
-              <a:t>Frontend</a:t>
-            </a:r>
-          </a:p>
-          <a:p>
-            <a:pPr>
-              <a:defRPr sz="1200">
-                <a:solidFill>
-                  <a:srgbClr val="94A3B8"/>
-                </a:solidFill>
-                <a:latin typeface="Arial"/>
-              </a:defRPr>
-            </a:pPr>
-            <a:r>
-              <a:t>React</a:t>
-            </a:r>
-            <a:br/>
-            <a:r>
-              <a:t>TypeScript</a:t>
-            </a:r>
-            <a:br/>
-            <a:r>
-              <a:t>Tailwind CSS</a:t>
+              <a:defRPr sz="1400" b="1">
+                <a:solidFill>
+                  <a:srgbClr val="FF7900"/>
+                </a:solidFill>
+                <a:latin typeface="Arial"/>
+              </a:defRPr>
+            </a:pPr>
+            <a:r>
+              <a:t>POTENCIAL DE CRESCIMENTO</a:t>
+            </a:r>
+          </a:p>
+          <a:p>
+            <a:pPr>
+              <a:defRPr sz="1500">
+                <a:solidFill>
+                  <a:srgbClr val="A1A1AA"/>
+                </a:solidFill>
+                <a:latin typeface="Arial"/>
+              </a:defRPr>
+            </a:pPr>
+            <a:r>
+              <a:t>O mercado brasileiro conta com mais de 100 mil oficinas de pós-venda cadastradas e um crescimento acelerado no número de empresas optando por gerenciar frotas próprias para reduzir custos de distribuição.</a:t>
             </a:r>
             <a:br/>
             <a:br/>
             <a:r>
-              <a:t>•  Interface SPA responsiva e veloz.</a:t>
-            </a:r>
-          </a:p>
-        </p:txBody>
-      </p:sp>
-      <p:sp>
-        <p:nvSpPr>
-          <p:cNvPr id="6" name="Rectangle 5"/>
-          <p:cNvSpPr/>
-          <p:nvPr/>
-        </p:nvSpPr>
-        <p:spPr>
-          <a:xfrm>
-            <a:off x="3474720" y="1828800"/>
-            <a:ext cx="2499055" cy="3931920"/>
-          </a:xfrm>
-          <a:prstGeom prst="rect">
-            <a:avLst/>
-          </a:prstGeom>
-          <a:solidFill>
-            <a:srgbClr val="101725"/>
-          </a:solidFill>
-          <a:ln w="12700">
-            <a:solidFill>
-              <a:srgbClr val="1E293B"/>
-            </a:solidFill>
-          </a:ln>
-        </p:spPr>
-        <p:style>
-          <a:lnRef idx="1">
-            <a:schemeClr val="accent1"/>
-          </a:lnRef>
-          <a:fillRef idx="3">
-            <a:schemeClr val="accent1"/>
-          </a:fillRef>
-          <a:effectRef idx="2">
-            <a:schemeClr val="accent1"/>
-          </a:effectRef>
-          <a:fontRef idx="minor">
-            <a:schemeClr val="lt1"/>
-          </a:fontRef>
-        </p:style>
-        <p:txBody>
-          <a:bodyPr rtlCol="0" anchor="ctr"/>
-          <a:lstStyle/>
-          <a:p>
-            <a:pPr algn="ctr"/>
-          </a:p>
-        </p:txBody>
-      </p:sp>
-      <p:sp>
-        <p:nvSpPr>
-          <p:cNvPr id="7" name="TextBox 6"/>
-          <p:cNvSpPr txBox="1"/>
-          <p:nvPr/>
-        </p:nvSpPr>
-        <p:spPr>
-          <a:xfrm>
-            <a:off x="3566160" y="2011680"/>
-            <a:ext cx="2316175" cy="3566160"/>
-          </a:xfrm>
-          <a:prstGeom prst="rect">
-            <a:avLst/>
-          </a:prstGeom>
-          <a:noFill/>
-        </p:spPr>
-        <p:txBody>
-          <a:bodyPr wrap="square">
-            <a:spAutoFit/>
-          </a:bodyPr>
-          <a:lstStyle/>
-          <a:p>
-            <a:pPr>
-              <a:spcAft>
-                <a:spcPts val="1400"/>
-              </a:spcAft>
-              <a:defRPr sz="1800" b="1">
-                <a:solidFill>
-                  <a:srgbClr val="38BDF8"/>
-                </a:solidFill>
-                <a:latin typeface="Arial"/>
-              </a:defRPr>
-            </a:pPr>
-            <a:r>
-              <a:t>Backend</a:t>
-            </a:r>
-          </a:p>
-          <a:p>
-            <a:pPr>
-              <a:defRPr sz="1200">
-                <a:solidFill>
-                  <a:srgbClr val="94A3B8"/>
-                </a:solidFill>
-                <a:latin typeface="Arial"/>
-              </a:defRPr>
-            </a:pPr>
-            <a:r>
-              <a:t>Kotlin</a:t>
-            </a:r>
-            <a:br/>
-            <a:r>
-              <a:t>Spring Boot</a:t>
-            </a:r>
-            <a:br/>
-            <a:r>
-              <a:t>Java Virtual Machine</a:t>
-            </a:r>
-            <a:br/>
-            <a:br/>
-            <a:r>
-              <a:t>•  Segurança robusta e performance corporativa.</a:t>
-            </a:r>
-          </a:p>
-        </p:txBody>
-      </p:sp>
-      <p:sp>
-        <p:nvSpPr>
-          <p:cNvPr id="8" name="Rectangle 7"/>
-          <p:cNvSpPr/>
-          <p:nvPr/>
-        </p:nvSpPr>
-        <p:spPr>
-          <a:xfrm>
-            <a:off x="6217920" y="1828800"/>
-            <a:ext cx="2499055" cy="3931920"/>
-          </a:xfrm>
-          <a:prstGeom prst="rect">
-            <a:avLst/>
-          </a:prstGeom>
-          <a:solidFill>
-            <a:srgbClr val="101725"/>
-          </a:solidFill>
-          <a:ln w="12700">
-            <a:solidFill>
-              <a:srgbClr val="1E293B"/>
-            </a:solidFill>
-          </a:ln>
-        </p:spPr>
-        <p:style>
-          <a:lnRef idx="1">
-            <a:schemeClr val="accent1"/>
-          </a:lnRef>
-          <a:fillRef idx="3">
-            <a:schemeClr val="accent1"/>
-          </a:fillRef>
-          <a:effectRef idx="2">
-            <a:schemeClr val="accent1"/>
-          </a:effectRef>
-          <a:fontRef idx="minor">
-            <a:schemeClr val="lt1"/>
-          </a:fontRef>
-        </p:style>
-        <p:txBody>
-          <a:bodyPr rtlCol="0" anchor="ctr"/>
-          <a:lstStyle/>
-          <a:p>
-            <a:pPr algn="ctr"/>
-          </a:p>
-        </p:txBody>
-      </p:sp>
-      <p:sp>
-        <p:nvSpPr>
-          <p:cNvPr id="9" name="TextBox 8"/>
-          <p:cNvSpPr txBox="1"/>
-          <p:nvPr/>
-        </p:nvSpPr>
-        <p:spPr>
-          <a:xfrm>
-            <a:off x="6309359" y="2011680"/>
-            <a:ext cx="2316175" cy="3566160"/>
-          </a:xfrm>
-          <a:prstGeom prst="rect">
-            <a:avLst/>
-          </a:prstGeom>
-          <a:noFill/>
-        </p:spPr>
-        <p:txBody>
-          <a:bodyPr wrap="square">
-            <a:spAutoFit/>
-          </a:bodyPr>
-          <a:lstStyle/>
-          <a:p>
-            <a:pPr>
-              <a:spcAft>
-                <a:spcPts val="1400"/>
-              </a:spcAft>
-              <a:defRPr sz="1800" b="1">
-                <a:solidFill>
-                  <a:srgbClr val="38BDF8"/>
-                </a:solidFill>
-                <a:latin typeface="Arial"/>
-              </a:defRPr>
-            </a:pPr>
-            <a:r>
-              <a:t>Banco de Dados</a:t>
-            </a:r>
-          </a:p>
-          <a:p>
-            <a:pPr>
-              <a:defRPr sz="1200">
-                <a:solidFill>
-                  <a:srgbClr val="94A3B8"/>
-                </a:solidFill>
-                <a:latin typeface="Arial"/>
-              </a:defRPr>
-            </a:pPr>
-            <a:r>
-              <a:t>PostgreSQL</a:t>
-            </a:r>
-            <a:br/>
-            <a:br/>
-            <a:br/>
-            <a:r>
-              <a:t>•  Persistência relacional estável com alta auditabilidade.</a:t>
-            </a:r>
-          </a:p>
-        </p:txBody>
-      </p:sp>
-      <p:sp>
-        <p:nvSpPr>
-          <p:cNvPr id="10" name="Rectangle 9"/>
-          <p:cNvSpPr/>
-          <p:nvPr/>
-        </p:nvSpPr>
-        <p:spPr>
-          <a:xfrm>
-            <a:off x="8961120" y="1828800"/>
-            <a:ext cx="2499055" cy="3931920"/>
-          </a:xfrm>
-          <a:prstGeom prst="rect">
-            <a:avLst/>
-          </a:prstGeom>
-          <a:solidFill>
-            <a:srgbClr val="101725"/>
-          </a:solidFill>
-          <a:ln w="12700">
-            <a:solidFill>
-              <a:srgbClr val="1E293B"/>
-            </a:solidFill>
-          </a:ln>
-        </p:spPr>
-        <p:style>
-          <a:lnRef idx="1">
-            <a:schemeClr val="accent1"/>
-          </a:lnRef>
-          <a:fillRef idx="3">
-            <a:schemeClr val="accent1"/>
-          </a:fillRef>
-          <a:effectRef idx="2">
-            <a:schemeClr val="accent1"/>
-          </a:effectRef>
-          <a:fontRef idx="minor">
-            <a:schemeClr val="lt1"/>
-          </a:fontRef>
-        </p:style>
-        <p:txBody>
-          <a:bodyPr rtlCol="0" anchor="ctr"/>
-          <a:lstStyle/>
-          <a:p>
-            <a:pPr algn="ctr"/>
-          </a:p>
-        </p:txBody>
-      </p:sp>
-      <p:sp>
-        <p:nvSpPr>
-          <p:cNvPr id="11" name="TextBox 10"/>
-          <p:cNvSpPr txBox="1"/>
-          <p:nvPr/>
-        </p:nvSpPr>
-        <p:spPr>
-          <a:xfrm>
-            <a:off x="9052560" y="2011680"/>
-            <a:ext cx="2316175" cy="3566160"/>
-          </a:xfrm>
-          <a:prstGeom prst="rect">
-            <a:avLst/>
-          </a:prstGeom>
-          <a:noFill/>
-        </p:spPr>
-        <p:txBody>
-          <a:bodyPr wrap="square">
-            <a:spAutoFit/>
-          </a:bodyPr>
-          <a:lstStyle/>
-          <a:p>
-            <a:pPr>
-              <a:spcAft>
-                <a:spcPts val="1400"/>
-              </a:spcAft>
-              <a:defRPr sz="1800" b="1">
-                <a:solidFill>
-                  <a:srgbClr val="38BDF8"/>
-                </a:solidFill>
-                <a:latin typeface="Arial"/>
-              </a:defRPr>
-            </a:pPr>
-            <a:r>
-              <a:t>Segurança &amp; Cloud</a:t>
-            </a:r>
-          </a:p>
-          <a:p>
-            <a:pPr>
-              <a:defRPr sz="1200">
-                <a:solidFill>
-                  <a:srgbClr val="94A3B8"/>
-                </a:solidFill>
-                <a:latin typeface="Arial"/>
-              </a:defRPr>
-            </a:pPr>
-            <a:r>
-              <a:t>JWT Autenticação</a:t>
-            </a:r>
-            <a:br/>
-            <a:r>
-              <a:t>Docker Containers</a:t>
-            </a:r>
-            <a:br/>
-            <a:r>
-              <a:t>AWS Cloud</a:t>
-            </a:r>
-            <a:br/>
-            <a:br/>
-            <a:r>
-              <a:t>•  Segurança corporativa aderente à LGPD.</a:t>
-            </a:r>
-          </a:p>
-        </p:txBody>
-      </p:sp>
-      <p:sp>
-        <p:nvSpPr>
-          <p:cNvPr id="12" name="TextBox 11"/>
+              <a:t>A digitalização e a inteligência operacional são as maiores prioridades para o setor nos próximos anos.</a:t>
+            </a:r>
+          </a:p>
+        </p:txBody>
+      </p:sp>
+      <p:sp>
+        <p:nvSpPr>
+          <p:cNvPr id="8" name="TextBox 7"/>
           <p:cNvSpPr txBox="1"/>
           <p:nvPr/>
         </p:nvSpPr>
@@ -4204,13 +4356,13 @@
             <a:pPr>
               <a:defRPr sz="850">
                 <a:solidFill>
-                  <a:srgbClr val="94A3B8"/>
-                </a:solidFill>
-                <a:latin typeface="Arial"/>
-              </a:defRPr>
-            </a:pPr>
-            <a:r>
-              <a:t>SUZANO IT   |   Tecnologia para Oficinas e Frotas                                                                                   Slide 11 de 14</a:t>
+                  <a:srgbClr val="A1A1AA"/>
+                </a:solidFill>
+                <a:latin typeface="Arial"/>
+              </a:defRPr>
+            </a:pPr>
+            <a:r>
+              <a:t>SUZANO IT   |   Tecnologia que move frotas.                                                                                          Slide 11 de 15</a:t>
             </a:r>
           </a:p>
         </p:txBody>
@@ -4226,14 +4378,6 @@
 <file path=ppt/slides/slide12.xml><?xml version="1.0" encoding="utf-8"?>
 <p:sld xmlns:a="http://schemas.openxmlformats.org/drawingml/2006/main" xmlns:p="http://schemas.openxmlformats.org/presentationml/2006/main" xmlns:r="http://schemas.openxmlformats.org/officeDocument/2006/relationships">
   <p:cSld>
-    <p:bg>
-      <p:bgPr>
-        <a:solidFill>
-          <a:srgbClr val="080B11"/>
-        </a:solidFill>
-        <a:effectLst/>
-      </p:bgPr>
-    </p:bg>
     <p:spTree>
       <p:nvGrpSpPr>
         <p:cNvPr id="1" name=""/>
@@ -4241,9 +4385,33 @@
         <p:nvPr/>
       </p:nvGrpSpPr>
       <p:grpSpPr/>
-      <p:sp>
-        <p:nvSpPr>
-          <p:cNvPr id="2" name="TextBox 1"/>
+      <p:pic>
+        <p:nvPicPr>
+          <p:cNvPr id="2" name="Picture 1" descr="background.png"/>
+          <p:cNvPicPr>
+            <a:picLocks noChangeAspect="1"/>
+          </p:cNvPicPr>
+          <p:nvPr/>
+        </p:nvPicPr>
+        <p:blipFill>
+          <a:blip r:embed="rId2"/>
+          <a:stretch>
+            <a:fillRect/>
+          </a:stretch>
+        </p:blipFill>
+        <p:spPr>
+          <a:xfrm>
+            <a:off x="0" y="0"/>
+            <a:ext cx="12191695" cy="6858000"/>
+          </a:xfrm>
+          <a:prstGeom prst="rect">
+            <a:avLst/>
+          </a:prstGeom>
+        </p:spPr>
+      </p:pic>
+      <p:sp>
+        <p:nvSpPr>
+          <p:cNvPr id="3" name="TextBox 2"/>
           <p:cNvSpPr txBox="1"/>
           <p:nvPr/>
         </p:nvSpPr>
@@ -4266,20 +4434,20 @@
             <a:pPr>
               <a:defRPr sz="1000" b="1">
                 <a:solidFill>
-                  <a:srgbClr val="38BDF8"/>
-                </a:solidFill>
-                <a:latin typeface="Arial"/>
-              </a:defRPr>
-            </a:pPr>
-            <a:r>
-              <a:t>CRONOGRAMA DE LANÇAMENTO</a:t>
-            </a:r>
-          </a:p>
-        </p:txBody>
-      </p:sp>
-      <p:sp>
-        <p:nvSpPr>
-          <p:cNvPr id="3" name="TextBox 2"/>
+                  <a:srgbClr val="FF7900"/>
+                </a:solidFill>
+                <a:latin typeface="Arial"/>
+              </a:defRPr>
+            </a:pPr>
+            <a:r>
+              <a:t>TECNOLOGIA E PERFORMANCE</a:t>
+            </a:r>
+          </a:p>
+        </p:txBody>
+      </p:sp>
+      <p:sp>
+        <p:nvSpPr>
+          <p:cNvPr id="4" name="TextBox 3"/>
           <p:cNvSpPr txBox="1"/>
           <p:nvPr/>
         </p:nvSpPr>
@@ -4302,37 +4470,37 @@
             <a:pPr>
               <a:defRPr sz="2800" b="1">
                 <a:solidFill>
-                  <a:srgbClr val="F8FAFC"/>
-                </a:solidFill>
-                <a:latin typeface="Arial"/>
-              </a:defRPr>
-            </a:pPr>
-            <a:r>
-              <a:t>Roadmap de Evolução</a:t>
-            </a:r>
-          </a:p>
-        </p:txBody>
-      </p:sp>
-      <p:sp>
-        <p:nvSpPr>
-          <p:cNvPr id="4" name="Rectangle 3"/>
+                  <a:srgbClr val="FFFFFF"/>
+                </a:solidFill>
+                <a:latin typeface="Arial"/>
+              </a:defRPr>
+            </a:pPr>
+            <a:r>
+              <a:t>Arquitetura Tecnológica</a:t>
+            </a:r>
+          </a:p>
+        </p:txBody>
+      </p:sp>
+      <p:sp>
+        <p:nvSpPr>
+          <p:cNvPr id="5" name="Rectangle 4"/>
           <p:cNvSpPr/>
           <p:nvPr/>
         </p:nvSpPr>
         <p:spPr>
           <a:xfrm>
-            <a:off x="731520" y="2103120"/>
-            <a:ext cx="1401775" cy="3474720"/>
+            <a:off x="731520" y="1828800"/>
+            <a:ext cx="2499055" cy="3931920"/>
           </a:xfrm>
           <a:prstGeom prst="rect">
             <a:avLst/>
           </a:prstGeom>
           <a:solidFill>
-            <a:srgbClr val="101B17"/>
+            <a:srgbClr val="121316"/>
           </a:solidFill>
           <a:ln w="12700">
             <a:solidFill>
-              <a:srgbClr val="1E293B"/>
+              <a:srgbClr val="2D2D32"/>
             </a:solidFill>
           </a:ln>
         </p:spPr>
@@ -4360,14 +4528,14 @@
       </p:sp>
       <p:sp>
         <p:nvSpPr>
-          <p:cNvPr id="5" name="TextBox 4"/>
+          <p:cNvPr id="6" name="TextBox 5"/>
           <p:cNvSpPr txBox="1"/>
           <p:nvPr/>
         </p:nvSpPr>
         <p:spPr>
           <a:xfrm>
-            <a:off x="777240" y="2286000"/>
-            <a:ext cx="1310335" cy="3108960"/>
+            <a:off x="822960" y="2011680"/>
+            <a:ext cx="2316175" cy="3566160"/>
           </a:xfrm>
           <a:prstGeom prst="rect">
             <a:avLst/>
@@ -4384,68 +4552,65 @@
               <a:spcAft>
                 <a:spcPts val="1400"/>
               </a:spcAft>
-              <a:defRPr sz="1600" b="1">
-                <a:solidFill>
-                  <a:srgbClr val="F8FAFC"/>
-                </a:solidFill>
-                <a:latin typeface="Arial"/>
-              </a:defRPr>
-            </a:pPr>
-            <a:r>
-              <a:t>Fase 1</a:t>
-            </a:r>
-          </a:p>
-          <a:p>
-            <a:pPr>
-              <a:spcAft>
-                <a:spcPts val="1800"/>
-              </a:spcAft>
-              <a:defRPr sz="1200" b="1">
-                <a:solidFill>
-                  <a:srgbClr val="38BDF8"/>
-                </a:solidFill>
-                <a:latin typeface="Arial"/>
-              </a:defRPr>
-            </a:pPr>
-            <a:r>
-              <a:t>Gestão Oficina</a:t>
-            </a:r>
-          </a:p>
-          <a:p>
-            <a:pPr>
-              <a:defRPr sz="1100">
-                <a:solidFill>
-                  <a:srgbClr val="22C55E"/>
-                </a:solidFill>
-                <a:latin typeface="Arial"/>
-              </a:defRPr>
-            </a:pPr>
-            <a:r>
-              <a:t>✓ Concluído</a:t>
-            </a:r>
-          </a:p>
-        </p:txBody>
-      </p:sp>
-      <p:sp>
-        <p:nvSpPr>
-          <p:cNvPr id="6" name="Rectangle 5"/>
+              <a:defRPr sz="1800" b="1">
+                <a:solidFill>
+                  <a:srgbClr val="FF7900"/>
+                </a:solidFill>
+                <a:latin typeface="Arial"/>
+              </a:defRPr>
+            </a:pPr>
+            <a:r>
+              <a:t>Frontend</a:t>
+            </a:r>
+          </a:p>
+          <a:p>
+            <a:pPr>
+              <a:defRPr sz="1200">
+                <a:solidFill>
+                  <a:srgbClr val="A1A1AA"/>
+                </a:solidFill>
+                <a:latin typeface="Arial"/>
+              </a:defRPr>
+            </a:pPr>
+            <a:r>
+              <a:t>React</a:t>
+            </a:r>
+            <a:br/>
+            <a:r>
+              <a:t>TypeScript</a:t>
+            </a:r>
+            <a:br/>
+            <a:r>
+              <a:t>Tailwind CSS</a:t>
+            </a:r>
+            <a:br/>
+            <a:br/>
+            <a:r>
+              <a:t>•  Interface SPA responsiva e veloz.</a:t>
+            </a:r>
+          </a:p>
+        </p:txBody>
+      </p:sp>
+      <p:sp>
+        <p:nvSpPr>
+          <p:cNvPr id="7" name="Rectangle 6"/>
           <p:cNvSpPr/>
           <p:nvPr/>
         </p:nvSpPr>
         <p:spPr>
           <a:xfrm>
-            <a:off x="2286000" y="2103120"/>
-            <a:ext cx="1401775" cy="3474720"/>
+            <a:off x="3474720" y="1828800"/>
+            <a:ext cx="2499055" cy="3931920"/>
           </a:xfrm>
           <a:prstGeom prst="rect">
             <a:avLst/>
           </a:prstGeom>
           <a:solidFill>
-            <a:srgbClr val="101B17"/>
+            <a:srgbClr val="121316"/>
           </a:solidFill>
           <a:ln w="12700">
             <a:solidFill>
-              <a:srgbClr val="1E293B"/>
+              <a:srgbClr val="2D2D32"/>
             </a:solidFill>
           </a:ln>
         </p:spPr>
@@ -4473,14 +4638,14 @@
       </p:sp>
       <p:sp>
         <p:nvSpPr>
-          <p:cNvPr id="7" name="TextBox 6"/>
+          <p:cNvPr id="8" name="TextBox 7"/>
           <p:cNvSpPr txBox="1"/>
           <p:nvPr/>
         </p:nvSpPr>
         <p:spPr>
           <a:xfrm>
-            <a:off x="2331720" y="2286000"/>
-            <a:ext cx="1310335" cy="3108960"/>
+            <a:off x="3566160" y="2011680"/>
+            <a:ext cx="2316175" cy="3566160"/>
           </a:xfrm>
           <a:prstGeom prst="rect">
             <a:avLst/>
@@ -4497,68 +4662,65 @@
               <a:spcAft>
                 <a:spcPts val="1400"/>
               </a:spcAft>
-              <a:defRPr sz="1600" b="1">
-                <a:solidFill>
-                  <a:srgbClr val="F8FAFC"/>
-                </a:solidFill>
-                <a:latin typeface="Arial"/>
-              </a:defRPr>
-            </a:pPr>
-            <a:r>
-              <a:t>Fase 2</a:t>
-            </a:r>
-          </a:p>
-          <a:p>
-            <a:pPr>
-              <a:spcAft>
-                <a:spcPts val="1800"/>
-              </a:spcAft>
-              <a:defRPr sz="1200" b="1">
-                <a:solidFill>
-                  <a:srgbClr val="38BDF8"/>
-                </a:solidFill>
-                <a:latin typeface="Arial"/>
-              </a:defRPr>
-            </a:pPr>
-            <a:r>
-              <a:t>Gestão Frota</a:t>
-            </a:r>
-          </a:p>
-          <a:p>
-            <a:pPr>
-              <a:defRPr sz="1100">
-                <a:solidFill>
-                  <a:srgbClr val="22C55E"/>
-                </a:solidFill>
-                <a:latin typeface="Arial"/>
-              </a:defRPr>
-            </a:pPr>
-            <a:r>
-              <a:t>✓ Concluído</a:t>
-            </a:r>
-          </a:p>
-        </p:txBody>
-      </p:sp>
-      <p:sp>
-        <p:nvSpPr>
-          <p:cNvPr id="8" name="Rectangle 7"/>
+              <a:defRPr sz="1800" b="1">
+                <a:solidFill>
+                  <a:srgbClr val="FF7900"/>
+                </a:solidFill>
+                <a:latin typeface="Arial"/>
+              </a:defRPr>
+            </a:pPr>
+            <a:r>
+              <a:t>Backend</a:t>
+            </a:r>
+          </a:p>
+          <a:p>
+            <a:pPr>
+              <a:defRPr sz="1200">
+                <a:solidFill>
+                  <a:srgbClr val="A1A1AA"/>
+                </a:solidFill>
+                <a:latin typeface="Arial"/>
+              </a:defRPr>
+            </a:pPr>
+            <a:r>
+              <a:t>Kotlin</a:t>
+            </a:r>
+            <a:br/>
+            <a:r>
+              <a:t>Spring Boot</a:t>
+            </a:r>
+            <a:br/>
+            <a:r>
+              <a:t>Java Virtual Machine</a:t>
+            </a:r>
+            <a:br/>
+            <a:br/>
+            <a:r>
+              <a:t>•  Segurança robusta e performance corporativa.</a:t>
+            </a:r>
+          </a:p>
+        </p:txBody>
+      </p:sp>
+      <p:sp>
+        <p:nvSpPr>
+          <p:cNvPr id="9" name="Rectangle 8"/>
           <p:cNvSpPr/>
           <p:nvPr/>
         </p:nvSpPr>
         <p:spPr>
           <a:xfrm>
-            <a:off x="3840480" y="2103120"/>
-            <a:ext cx="1401775" cy="3474720"/>
+            <a:off x="6217920" y="1828800"/>
+            <a:ext cx="2499055" cy="3931920"/>
           </a:xfrm>
           <a:prstGeom prst="rect">
             <a:avLst/>
           </a:prstGeom>
           <a:solidFill>
-            <a:srgbClr val="101B17"/>
+            <a:srgbClr val="121316"/>
           </a:solidFill>
           <a:ln w="12700">
             <a:solidFill>
-              <a:srgbClr val="1E293B"/>
+              <a:srgbClr val="2D2D32"/>
             </a:solidFill>
           </a:ln>
         </p:spPr>
@@ -4586,14 +4748,14 @@
       </p:sp>
       <p:sp>
         <p:nvSpPr>
-          <p:cNvPr id="9" name="TextBox 8"/>
+          <p:cNvPr id="10" name="TextBox 9"/>
           <p:cNvSpPr txBox="1"/>
           <p:nvPr/>
         </p:nvSpPr>
         <p:spPr>
           <a:xfrm>
-            <a:off x="3886200" y="2286000"/>
-            <a:ext cx="1310335" cy="3108960"/>
+            <a:off x="6309359" y="2011680"/>
+            <a:ext cx="2316175" cy="3566160"/>
           </a:xfrm>
           <a:prstGeom prst="rect">
             <a:avLst/>
@@ -4610,68 +4772,58 @@
               <a:spcAft>
                 <a:spcPts val="1400"/>
               </a:spcAft>
-              <a:defRPr sz="1600" b="1">
-                <a:solidFill>
-                  <a:srgbClr val="F8FAFC"/>
-                </a:solidFill>
-                <a:latin typeface="Arial"/>
-              </a:defRPr>
-            </a:pPr>
-            <a:r>
-              <a:t>Fase 3</a:t>
-            </a:r>
-          </a:p>
-          <a:p>
-            <a:pPr>
-              <a:spcAft>
-                <a:spcPts val="1800"/>
-              </a:spcAft>
-              <a:defRPr sz="1200" b="1">
-                <a:solidFill>
-                  <a:srgbClr val="38BDF8"/>
-                </a:solidFill>
-                <a:latin typeface="Arial"/>
-              </a:defRPr>
-            </a:pPr>
-            <a:r>
-              <a:t>Integração NF-e</a:t>
-            </a:r>
-          </a:p>
-          <a:p>
-            <a:pPr>
-              <a:defRPr sz="1100">
-                <a:solidFill>
-                  <a:srgbClr val="22C55E"/>
-                </a:solidFill>
-                <a:latin typeface="Arial"/>
-              </a:defRPr>
-            </a:pPr>
-            <a:r>
-              <a:t>✓ Concluído</a:t>
-            </a:r>
-          </a:p>
-        </p:txBody>
-      </p:sp>
-      <p:sp>
-        <p:nvSpPr>
-          <p:cNvPr id="10" name="Rectangle 9"/>
+              <a:defRPr sz="1800" b="1">
+                <a:solidFill>
+                  <a:srgbClr val="FF7900"/>
+                </a:solidFill>
+                <a:latin typeface="Arial"/>
+              </a:defRPr>
+            </a:pPr>
+            <a:r>
+              <a:t>Banco de Dados</a:t>
+            </a:r>
+          </a:p>
+          <a:p>
+            <a:pPr>
+              <a:defRPr sz="1200">
+                <a:solidFill>
+                  <a:srgbClr val="A1A1AA"/>
+                </a:solidFill>
+                <a:latin typeface="Arial"/>
+              </a:defRPr>
+            </a:pPr>
+            <a:r>
+              <a:t>PostgreSQL</a:t>
+            </a:r>
+            <a:br/>
+            <a:br/>
+            <a:br/>
+            <a:r>
+              <a:t>•  Persistência relacional estável com alta auditabilidade.</a:t>
+            </a:r>
+          </a:p>
+        </p:txBody>
+      </p:sp>
+      <p:sp>
+        <p:nvSpPr>
+          <p:cNvPr id="11" name="Rectangle 10"/>
           <p:cNvSpPr/>
           <p:nvPr/>
         </p:nvSpPr>
         <p:spPr>
           <a:xfrm>
-            <a:off x="5394960" y="2103120"/>
-            <a:ext cx="1401775" cy="3474720"/>
+            <a:off x="8961120" y="1828800"/>
+            <a:ext cx="2499055" cy="3931920"/>
           </a:xfrm>
           <a:prstGeom prst="rect">
             <a:avLst/>
           </a:prstGeom>
           <a:solidFill>
-            <a:srgbClr val="101B17"/>
+            <a:srgbClr val="121316"/>
           </a:solidFill>
           <a:ln w="12700">
             <a:solidFill>
-              <a:srgbClr val="1E293B"/>
+              <a:srgbClr val="2D2D32"/>
             </a:solidFill>
           </a:ln>
         </p:spPr>
@@ -4699,14 +4851,14 @@
       </p:sp>
       <p:sp>
         <p:nvSpPr>
-          <p:cNvPr id="11" name="TextBox 10"/>
+          <p:cNvPr id="12" name="TextBox 11"/>
           <p:cNvSpPr txBox="1"/>
           <p:nvPr/>
         </p:nvSpPr>
         <p:spPr>
           <a:xfrm>
-            <a:off x="5440680" y="2286000"/>
-            <a:ext cx="1310335" cy="3108960"/>
+            <a:off x="9052560" y="2011680"/>
+            <a:ext cx="2316175" cy="3566160"/>
           </a:xfrm>
           <a:prstGeom prst="rect">
             <a:avLst/>
@@ -4723,390 +4875,48 @@
               <a:spcAft>
                 <a:spcPts val="1400"/>
               </a:spcAft>
-              <a:defRPr sz="1600" b="1">
-                <a:solidFill>
-                  <a:srgbClr val="F8FAFC"/>
-                </a:solidFill>
-                <a:latin typeface="Arial"/>
-              </a:defRPr>
-            </a:pPr>
-            <a:r>
-              <a:t>Fase 4</a:t>
-            </a:r>
-          </a:p>
-          <a:p>
-            <a:pPr>
-              <a:spcAft>
-                <a:spcPts val="1800"/>
-              </a:spcAft>
-              <a:defRPr sz="1200" b="1">
-                <a:solidFill>
-                  <a:srgbClr val="38BDF8"/>
-                </a:solidFill>
-                <a:latin typeface="Arial"/>
-              </a:defRPr>
-            </a:pPr>
-            <a:r>
-              <a:t>Inteligência Artif.</a:t>
-            </a:r>
-          </a:p>
-          <a:p>
-            <a:pPr>
-              <a:defRPr sz="1100">
-                <a:solidFill>
-                  <a:srgbClr val="22C55E"/>
-                </a:solidFill>
-                <a:latin typeface="Arial"/>
-              </a:defRPr>
-            </a:pPr>
-            <a:r>
-              <a:t>✓ Concluído</a:t>
-            </a:r>
-          </a:p>
-        </p:txBody>
-      </p:sp>
-      <p:sp>
-        <p:nvSpPr>
-          <p:cNvPr id="12" name="Rectangle 11"/>
-          <p:cNvSpPr/>
-          <p:nvPr/>
-        </p:nvSpPr>
-        <p:spPr>
-          <a:xfrm>
-            <a:off x="6949440" y="2103120"/>
-            <a:ext cx="1401775" cy="3474720"/>
-          </a:xfrm>
-          <a:prstGeom prst="rect">
-            <a:avLst/>
-          </a:prstGeom>
-          <a:solidFill>
-            <a:srgbClr val="101728"/>
-          </a:solidFill>
-          <a:ln w="12700">
-            <a:solidFill>
-              <a:srgbClr val="1E293B"/>
-            </a:solidFill>
-          </a:ln>
-        </p:spPr>
-        <p:style>
-          <a:lnRef idx="1">
-            <a:schemeClr val="accent1"/>
-          </a:lnRef>
-          <a:fillRef idx="3">
-            <a:schemeClr val="accent1"/>
-          </a:fillRef>
-          <a:effectRef idx="2">
-            <a:schemeClr val="accent1"/>
-          </a:effectRef>
-          <a:fontRef idx="minor">
-            <a:schemeClr val="lt1"/>
-          </a:fontRef>
-        </p:style>
-        <p:txBody>
-          <a:bodyPr rtlCol="0" anchor="ctr"/>
-          <a:lstStyle/>
-          <a:p>
-            <a:pPr algn="ctr"/>
+              <a:defRPr sz="1800" b="1">
+                <a:solidFill>
+                  <a:srgbClr val="FF7900"/>
+                </a:solidFill>
+                <a:latin typeface="Arial"/>
+              </a:defRPr>
+            </a:pPr>
+            <a:r>
+              <a:t>Segurança &amp; Cloud</a:t>
+            </a:r>
+          </a:p>
+          <a:p>
+            <a:pPr>
+              <a:defRPr sz="1200">
+                <a:solidFill>
+                  <a:srgbClr val="A1A1AA"/>
+                </a:solidFill>
+                <a:latin typeface="Arial"/>
+              </a:defRPr>
+            </a:pPr>
+            <a:r>
+              <a:t>JWT Autenticação</a:t>
+            </a:r>
+            <a:br/>
+            <a:r>
+              <a:t>Docker Containers</a:t>
+            </a:r>
+            <a:br/>
+            <a:r>
+              <a:t>AWS Cloud</a:t>
+            </a:r>
+            <a:br/>
+            <a:br/>
+            <a:r>
+              <a:t>•  Segurança corporativa aderente à LGPD.</a:t>
+            </a:r>
           </a:p>
         </p:txBody>
       </p:sp>
       <p:sp>
         <p:nvSpPr>
           <p:cNvPr id="13" name="TextBox 12"/>
-          <p:cNvSpPr txBox="1"/>
-          <p:nvPr/>
-        </p:nvSpPr>
-        <p:spPr>
-          <a:xfrm>
-            <a:off x="6995159" y="2286000"/>
-            <a:ext cx="1310335" cy="3108960"/>
-          </a:xfrm>
-          <a:prstGeom prst="rect">
-            <a:avLst/>
-          </a:prstGeom>
-          <a:noFill/>
-        </p:spPr>
-        <p:txBody>
-          <a:bodyPr wrap="square">
-            <a:spAutoFit/>
-          </a:bodyPr>
-          <a:lstStyle/>
-          <a:p>
-            <a:pPr>
-              <a:spcAft>
-                <a:spcPts val="1400"/>
-              </a:spcAft>
-              <a:defRPr sz="1600" b="1">
-                <a:solidFill>
-                  <a:srgbClr val="F8FAFC"/>
-                </a:solidFill>
-                <a:latin typeface="Arial"/>
-              </a:defRPr>
-            </a:pPr>
-            <a:r>
-              <a:t>Fase 5</a:t>
-            </a:r>
-          </a:p>
-          <a:p>
-            <a:pPr>
-              <a:spcAft>
-                <a:spcPts val="1800"/>
-              </a:spcAft>
-              <a:defRPr sz="1200" b="1">
-                <a:solidFill>
-                  <a:srgbClr val="38BDF8"/>
-                </a:solidFill>
-                <a:latin typeface="Arial"/>
-              </a:defRPr>
-            </a:pPr>
-            <a:r>
-              <a:t>Aplicativo Mobile</a:t>
-            </a:r>
-          </a:p>
-          <a:p>
-            <a:pPr>
-              <a:defRPr sz="1100">
-                <a:solidFill>
-                  <a:srgbClr val="38BDF8"/>
-                </a:solidFill>
-                <a:latin typeface="Arial"/>
-              </a:defRPr>
-            </a:pPr>
-            <a:r>
-              <a:t>Próximo</a:t>
-            </a:r>
-          </a:p>
-        </p:txBody>
-      </p:sp>
-      <p:sp>
-        <p:nvSpPr>
-          <p:cNvPr id="14" name="Rectangle 13"/>
-          <p:cNvSpPr/>
-          <p:nvPr/>
-        </p:nvSpPr>
-        <p:spPr>
-          <a:xfrm>
-            <a:off x="8503920" y="2103120"/>
-            <a:ext cx="1401775" cy="3474720"/>
-          </a:xfrm>
-          <a:prstGeom prst="rect">
-            <a:avLst/>
-          </a:prstGeom>
-          <a:solidFill>
-            <a:srgbClr val="101725"/>
-          </a:solidFill>
-          <a:ln w="12700">
-            <a:solidFill>
-              <a:srgbClr val="1E293B"/>
-            </a:solidFill>
-          </a:ln>
-        </p:spPr>
-        <p:style>
-          <a:lnRef idx="1">
-            <a:schemeClr val="accent1"/>
-          </a:lnRef>
-          <a:fillRef idx="3">
-            <a:schemeClr val="accent1"/>
-          </a:fillRef>
-          <a:effectRef idx="2">
-            <a:schemeClr val="accent1"/>
-          </a:effectRef>
-          <a:fontRef idx="minor">
-            <a:schemeClr val="lt1"/>
-          </a:fontRef>
-        </p:style>
-        <p:txBody>
-          <a:bodyPr rtlCol="0" anchor="ctr"/>
-          <a:lstStyle/>
-          <a:p>
-            <a:pPr algn="ctr"/>
-          </a:p>
-        </p:txBody>
-      </p:sp>
-      <p:sp>
-        <p:nvSpPr>
-          <p:cNvPr id="15" name="TextBox 14"/>
-          <p:cNvSpPr txBox="1"/>
-          <p:nvPr/>
-        </p:nvSpPr>
-        <p:spPr>
-          <a:xfrm>
-            <a:off x="8549640" y="2286000"/>
-            <a:ext cx="1310335" cy="3108960"/>
-          </a:xfrm>
-          <a:prstGeom prst="rect">
-            <a:avLst/>
-          </a:prstGeom>
-          <a:noFill/>
-        </p:spPr>
-        <p:txBody>
-          <a:bodyPr wrap="square">
-            <a:spAutoFit/>
-          </a:bodyPr>
-          <a:lstStyle/>
-          <a:p>
-            <a:pPr>
-              <a:spcAft>
-                <a:spcPts val="1400"/>
-              </a:spcAft>
-              <a:defRPr sz="1600" b="1">
-                <a:solidFill>
-                  <a:srgbClr val="F8FAFC"/>
-                </a:solidFill>
-                <a:latin typeface="Arial"/>
-              </a:defRPr>
-            </a:pPr>
-            <a:r>
-              <a:t>Fase 6</a:t>
-            </a:r>
-          </a:p>
-          <a:p>
-            <a:pPr>
-              <a:spcAft>
-                <a:spcPts val="1800"/>
-              </a:spcAft>
-              <a:defRPr sz="1200" b="1">
-                <a:solidFill>
-                  <a:srgbClr val="38BDF8"/>
-                </a:solidFill>
-                <a:latin typeface="Arial"/>
-              </a:defRPr>
-            </a:pPr>
-            <a:r>
-              <a:t>Marketplace</a:t>
-            </a:r>
-          </a:p>
-          <a:p>
-            <a:pPr>
-              <a:defRPr sz="1100">
-                <a:solidFill>
-                  <a:srgbClr val="94A3B8"/>
-                </a:solidFill>
-                <a:latin typeface="Arial"/>
-              </a:defRPr>
-            </a:pPr>
-            <a:r>
-              <a:t>Futuro</a:t>
-            </a:r>
-          </a:p>
-        </p:txBody>
-      </p:sp>
-      <p:sp>
-        <p:nvSpPr>
-          <p:cNvPr id="16" name="Rectangle 15"/>
-          <p:cNvSpPr/>
-          <p:nvPr/>
-        </p:nvSpPr>
-        <p:spPr>
-          <a:xfrm>
-            <a:off x="10058400" y="2103120"/>
-            <a:ext cx="1401775" cy="3474720"/>
-          </a:xfrm>
-          <a:prstGeom prst="rect">
-            <a:avLst/>
-          </a:prstGeom>
-          <a:solidFill>
-            <a:srgbClr val="101725"/>
-          </a:solidFill>
-          <a:ln w="12700">
-            <a:solidFill>
-              <a:srgbClr val="1E293B"/>
-            </a:solidFill>
-          </a:ln>
-        </p:spPr>
-        <p:style>
-          <a:lnRef idx="1">
-            <a:schemeClr val="accent1"/>
-          </a:lnRef>
-          <a:fillRef idx="3">
-            <a:schemeClr val="accent1"/>
-          </a:fillRef>
-          <a:effectRef idx="2">
-            <a:schemeClr val="accent1"/>
-          </a:effectRef>
-          <a:fontRef idx="minor">
-            <a:schemeClr val="lt1"/>
-          </a:fontRef>
-        </p:style>
-        <p:txBody>
-          <a:bodyPr rtlCol="0" anchor="ctr"/>
-          <a:lstStyle/>
-          <a:p>
-            <a:pPr algn="ctr"/>
-          </a:p>
-        </p:txBody>
-      </p:sp>
-      <p:sp>
-        <p:nvSpPr>
-          <p:cNvPr id="17" name="TextBox 16"/>
-          <p:cNvSpPr txBox="1"/>
-          <p:nvPr/>
-        </p:nvSpPr>
-        <p:spPr>
-          <a:xfrm>
-            <a:off x="10104120" y="2286000"/>
-            <a:ext cx="1310335" cy="3108960"/>
-          </a:xfrm>
-          <a:prstGeom prst="rect">
-            <a:avLst/>
-          </a:prstGeom>
-          <a:noFill/>
-        </p:spPr>
-        <p:txBody>
-          <a:bodyPr wrap="square">
-            <a:spAutoFit/>
-          </a:bodyPr>
-          <a:lstStyle/>
-          <a:p>
-            <a:pPr>
-              <a:spcAft>
-                <a:spcPts val="1400"/>
-              </a:spcAft>
-              <a:defRPr sz="1600" b="1">
-                <a:solidFill>
-                  <a:srgbClr val="F8FAFC"/>
-                </a:solidFill>
-                <a:latin typeface="Arial"/>
-              </a:defRPr>
-            </a:pPr>
-            <a:r>
-              <a:t>Fase 7</a:t>
-            </a:r>
-          </a:p>
-          <a:p>
-            <a:pPr>
-              <a:spcAft>
-                <a:spcPts val="1800"/>
-              </a:spcAft>
-              <a:defRPr sz="1200" b="1">
-                <a:solidFill>
-                  <a:srgbClr val="38BDF8"/>
-                </a:solidFill>
-                <a:latin typeface="Arial"/>
-              </a:defRPr>
-            </a:pPr>
-            <a:r>
-              <a:t>BI &amp; Analytics</a:t>
-            </a:r>
-          </a:p>
-          <a:p>
-            <a:pPr>
-              <a:defRPr sz="1100">
-                <a:solidFill>
-                  <a:srgbClr val="94A3B8"/>
-                </a:solidFill>
-                <a:latin typeface="Arial"/>
-              </a:defRPr>
-            </a:pPr>
-            <a:r>
-              <a:t>Futuro</a:t>
-            </a:r>
-          </a:p>
-        </p:txBody>
-      </p:sp>
-      <p:sp>
-        <p:nvSpPr>
-          <p:cNvPr id="18" name="TextBox 17"/>
           <p:cNvSpPr txBox="1"/>
           <p:nvPr/>
         </p:nvSpPr>
@@ -5129,13 +4939,13 @@
             <a:pPr>
               <a:defRPr sz="850">
                 <a:solidFill>
-                  <a:srgbClr val="94A3B8"/>
-                </a:solidFill>
-                <a:latin typeface="Arial"/>
-              </a:defRPr>
-            </a:pPr>
-            <a:r>
-              <a:t>SUZANO IT   |   Tecnologia para Oficinas e Frotas                                                                                   Slide 12 de 14</a:t>
+                  <a:srgbClr val="A1A1AA"/>
+                </a:solidFill>
+                <a:latin typeface="Arial"/>
+              </a:defRPr>
+            </a:pPr>
+            <a:r>
+              <a:t>SUZANO IT   |   Tecnologia que move frotas.                                                                                          Slide 12 de 15</a:t>
             </a:r>
           </a:p>
         </p:txBody>
@@ -5151,14 +4961,6 @@
 <file path=ppt/slides/slide13.xml><?xml version="1.0" encoding="utf-8"?>
 <p:sld xmlns:a="http://schemas.openxmlformats.org/drawingml/2006/main" xmlns:p="http://schemas.openxmlformats.org/presentationml/2006/main" xmlns:r="http://schemas.openxmlformats.org/officeDocument/2006/relationships">
   <p:cSld>
-    <p:bg>
-      <p:bgPr>
-        <a:solidFill>
-          <a:srgbClr val="080B11"/>
-        </a:solidFill>
-        <a:effectLst/>
-      </p:bgPr>
-    </p:bg>
     <p:spTree>
       <p:nvGrpSpPr>
         <p:cNvPr id="1" name=""/>
@@ -5166,9 +4968,33 @@
         <p:nvPr/>
       </p:nvGrpSpPr>
       <p:grpSpPr/>
-      <p:sp>
-        <p:nvSpPr>
-          <p:cNvPr id="2" name="TextBox 1"/>
+      <p:pic>
+        <p:nvPicPr>
+          <p:cNvPr id="2" name="Picture 1" descr="background.png"/>
+          <p:cNvPicPr>
+            <a:picLocks noChangeAspect="1"/>
+          </p:cNvPicPr>
+          <p:nvPr/>
+        </p:nvPicPr>
+        <p:blipFill>
+          <a:blip r:embed="rId2"/>
+          <a:stretch>
+            <a:fillRect/>
+          </a:stretch>
+        </p:blipFill>
+        <p:spPr>
+          <a:xfrm>
+            <a:off x="0" y="0"/>
+            <a:ext cx="12191695" cy="6858000"/>
+          </a:xfrm>
+          <a:prstGeom prst="rect">
+            <a:avLst/>
+          </a:prstGeom>
+        </p:spPr>
+      </p:pic>
+      <p:sp>
+        <p:nvSpPr>
+          <p:cNvPr id="3" name="TextBox 2"/>
           <p:cNvSpPr txBox="1"/>
           <p:nvPr/>
         </p:nvSpPr>
@@ -5191,20 +5017,20 @@
             <a:pPr>
               <a:defRPr sz="1000" b="1">
                 <a:solidFill>
-                  <a:srgbClr val="38BDF8"/>
-                </a:solidFill>
-                <a:latin typeface="Arial"/>
-              </a:defRPr>
-            </a:pPr>
-            <a:r>
-              <a:t>RESULTADOS FINAIS</a:t>
-            </a:r>
-          </a:p>
-        </p:txBody>
-      </p:sp>
-      <p:sp>
-        <p:nvSpPr>
-          <p:cNvPr id="3" name="TextBox 2"/>
+                  <a:srgbClr val="FF7900"/>
+                </a:solidFill>
+                <a:latin typeface="Arial"/>
+              </a:defRPr>
+            </a:pPr>
+            <a:r>
+              <a:t>CRONOGRAMA DE LANÇAMENTO</a:t>
+            </a:r>
+          </a:p>
+        </p:txBody>
+      </p:sp>
+      <p:sp>
+        <p:nvSpPr>
+          <p:cNvPr id="4" name="TextBox 3"/>
           <p:cNvSpPr txBox="1"/>
           <p:nvPr/>
         </p:nvSpPr>
@@ -5227,37 +5053,37 @@
             <a:pPr>
               <a:defRPr sz="2800" b="1">
                 <a:solidFill>
-                  <a:srgbClr val="F8FAFC"/>
-                </a:solidFill>
-                <a:latin typeface="Arial"/>
-              </a:defRPr>
-            </a:pPr>
-            <a:r>
-              <a:t>Benefícios para o Cliente</a:t>
-            </a:r>
-          </a:p>
-        </p:txBody>
-      </p:sp>
-      <p:sp>
-        <p:nvSpPr>
-          <p:cNvPr id="4" name="Rectangle 3"/>
+                  <a:srgbClr val="FFFFFF"/>
+                </a:solidFill>
+                <a:latin typeface="Arial"/>
+              </a:defRPr>
+            </a:pPr>
+            <a:r>
+              <a:t>Roadmap de Evolução</a:t>
+            </a:r>
+          </a:p>
+        </p:txBody>
+      </p:sp>
+      <p:sp>
+        <p:nvSpPr>
+          <p:cNvPr id="5" name="Rectangle 4"/>
           <p:cNvSpPr/>
           <p:nvPr/>
         </p:nvSpPr>
         <p:spPr>
           <a:xfrm>
-            <a:off x="731520" y="2011680"/>
-            <a:ext cx="2499055" cy="3566160"/>
+            <a:off x="731520" y="2103120"/>
+            <a:ext cx="1401775" cy="3474720"/>
           </a:xfrm>
           <a:prstGeom prst="rect">
             <a:avLst/>
           </a:prstGeom>
           <a:solidFill>
-            <a:srgbClr val="101725"/>
+            <a:srgbClr val="101B17"/>
           </a:solidFill>
           <a:ln w="12700">
             <a:solidFill>
-              <a:srgbClr val="1E293B"/>
+              <a:srgbClr val="2D2D32"/>
             </a:solidFill>
           </a:ln>
         </p:spPr>
@@ -5285,14 +5111,14 @@
       </p:sp>
       <p:sp>
         <p:nvSpPr>
-          <p:cNvPr id="5" name="TextBox 4"/>
+          <p:cNvPr id="6" name="TextBox 5"/>
           <p:cNvSpPr txBox="1"/>
           <p:nvPr/>
         </p:nvSpPr>
         <p:spPr>
           <a:xfrm>
-            <a:off x="822960" y="2194560"/>
-            <a:ext cx="2316175" cy="3200400"/>
+            <a:off x="777240" y="2286000"/>
+            <a:ext cx="1310335" cy="3108960"/>
           </a:xfrm>
           <a:prstGeom prst="rect">
             <a:avLst/>
@@ -5307,54 +5133,70 @@
           <a:p>
             <a:pPr>
               <a:spcAft>
-                <a:spcPts val="1200"/>
+                <a:spcPts val="1400"/>
               </a:spcAft>
-              <a:defRPr sz="1800" b="1">
-                <a:solidFill>
-                  <a:srgbClr val="38BDF8"/>
-                </a:solidFill>
-                <a:latin typeface="Arial"/>
-              </a:defRPr>
-            </a:pPr>
-            <a:r>
-              <a:t>Redução de Custos</a:t>
-            </a:r>
-          </a:p>
-          <a:p>
-            <a:pPr>
-              <a:defRPr sz="1300">
-                <a:solidFill>
-                  <a:srgbClr val="94A3B8"/>
-                </a:solidFill>
-                <a:latin typeface="Arial"/>
-              </a:defRPr>
-            </a:pPr>
-            <a:r>
-              <a:t>Evita quebras inesperadas através de cronogramas rígidos de manutenção preventiva na frota.</a:t>
-            </a:r>
-          </a:p>
-        </p:txBody>
-      </p:sp>
-      <p:sp>
-        <p:nvSpPr>
-          <p:cNvPr id="6" name="Rectangle 5"/>
+              <a:defRPr sz="1600" b="1">
+                <a:solidFill>
+                  <a:srgbClr val="FFFFFF"/>
+                </a:solidFill>
+                <a:latin typeface="Arial"/>
+              </a:defRPr>
+            </a:pPr>
+            <a:r>
+              <a:t>Fase 1</a:t>
+            </a:r>
+          </a:p>
+          <a:p>
+            <a:pPr>
+              <a:spcAft>
+                <a:spcPts val="1800"/>
+              </a:spcAft>
+              <a:defRPr sz="1200" b="1">
+                <a:solidFill>
+                  <a:srgbClr val="FF7900"/>
+                </a:solidFill>
+                <a:latin typeface="Arial"/>
+              </a:defRPr>
+            </a:pPr>
+            <a:r>
+              <a:t>Gestão Oficina</a:t>
+            </a:r>
+          </a:p>
+          <a:p>
+            <a:pPr>
+              <a:defRPr sz="1100">
+                <a:solidFill>
+                  <a:srgbClr val="22C55E"/>
+                </a:solidFill>
+                <a:latin typeface="Arial"/>
+              </a:defRPr>
+            </a:pPr>
+            <a:r>
+              <a:t>✓ Concluído</a:t>
+            </a:r>
+          </a:p>
+        </p:txBody>
+      </p:sp>
+      <p:sp>
+        <p:nvSpPr>
+          <p:cNvPr id="7" name="Rectangle 6"/>
           <p:cNvSpPr/>
           <p:nvPr/>
         </p:nvSpPr>
         <p:spPr>
           <a:xfrm>
-            <a:off x="3474720" y="2011680"/>
-            <a:ext cx="2499055" cy="3566160"/>
+            <a:off x="2286000" y="2103120"/>
+            <a:ext cx="1401775" cy="3474720"/>
           </a:xfrm>
           <a:prstGeom prst="rect">
             <a:avLst/>
           </a:prstGeom>
           <a:solidFill>
-            <a:srgbClr val="101725"/>
+            <a:srgbClr val="101B17"/>
           </a:solidFill>
           <a:ln w="12700">
             <a:solidFill>
-              <a:srgbClr val="1E293B"/>
+              <a:srgbClr val="2D2D32"/>
             </a:solidFill>
           </a:ln>
         </p:spPr>
@@ -5382,14 +5224,14 @@
       </p:sp>
       <p:sp>
         <p:nvSpPr>
-          <p:cNvPr id="7" name="TextBox 6"/>
+          <p:cNvPr id="8" name="TextBox 7"/>
           <p:cNvSpPr txBox="1"/>
           <p:nvPr/>
         </p:nvSpPr>
         <p:spPr>
           <a:xfrm>
-            <a:off x="3566160" y="2194560"/>
-            <a:ext cx="2316175" cy="3200400"/>
+            <a:off x="2331720" y="2286000"/>
+            <a:ext cx="1310335" cy="3108960"/>
           </a:xfrm>
           <a:prstGeom prst="rect">
             <a:avLst/>
@@ -5404,54 +5246,70 @@
           <a:p>
             <a:pPr>
               <a:spcAft>
-                <a:spcPts val="1200"/>
+                <a:spcPts val="1400"/>
               </a:spcAft>
-              <a:defRPr sz="1800" b="1">
-                <a:solidFill>
-                  <a:srgbClr val="38BDF8"/>
-                </a:solidFill>
-                <a:latin typeface="Arial"/>
-              </a:defRPr>
-            </a:pPr>
-            <a:r>
-              <a:t>Organização Geral</a:t>
-            </a:r>
-          </a:p>
-          <a:p>
-            <a:pPr>
-              <a:defRPr sz="1300">
-                <a:solidFill>
-                  <a:srgbClr val="94A3B8"/>
-                </a:solidFill>
-                <a:latin typeface="Arial"/>
-              </a:defRPr>
-            </a:pPr>
-            <a:r>
-              <a:t>Fluxo operacional padronizado desde a abertura da OS até o faturamento e envio de laudos.</a:t>
-            </a:r>
-          </a:p>
-        </p:txBody>
-      </p:sp>
-      <p:sp>
-        <p:nvSpPr>
-          <p:cNvPr id="8" name="Rectangle 7"/>
+              <a:defRPr sz="1600" b="1">
+                <a:solidFill>
+                  <a:srgbClr val="FFFFFF"/>
+                </a:solidFill>
+                <a:latin typeface="Arial"/>
+              </a:defRPr>
+            </a:pPr>
+            <a:r>
+              <a:t>Fase 2</a:t>
+            </a:r>
+          </a:p>
+          <a:p>
+            <a:pPr>
+              <a:spcAft>
+                <a:spcPts val="1800"/>
+              </a:spcAft>
+              <a:defRPr sz="1200" b="1">
+                <a:solidFill>
+                  <a:srgbClr val="FF7900"/>
+                </a:solidFill>
+                <a:latin typeface="Arial"/>
+              </a:defRPr>
+            </a:pPr>
+            <a:r>
+              <a:t>Gestão Frota</a:t>
+            </a:r>
+          </a:p>
+          <a:p>
+            <a:pPr>
+              <a:defRPr sz="1100">
+                <a:solidFill>
+                  <a:srgbClr val="22C55E"/>
+                </a:solidFill>
+                <a:latin typeface="Arial"/>
+              </a:defRPr>
+            </a:pPr>
+            <a:r>
+              <a:t>✓ Concluído</a:t>
+            </a:r>
+          </a:p>
+        </p:txBody>
+      </p:sp>
+      <p:sp>
+        <p:nvSpPr>
+          <p:cNvPr id="9" name="Rectangle 8"/>
           <p:cNvSpPr/>
           <p:nvPr/>
         </p:nvSpPr>
         <p:spPr>
           <a:xfrm>
-            <a:off x="6217920" y="2011680"/>
-            <a:ext cx="2499055" cy="3566160"/>
+            <a:off x="3840480" y="2103120"/>
+            <a:ext cx="1401775" cy="3474720"/>
           </a:xfrm>
           <a:prstGeom prst="rect">
             <a:avLst/>
           </a:prstGeom>
           <a:solidFill>
-            <a:srgbClr val="101725"/>
+            <a:srgbClr val="101B17"/>
           </a:solidFill>
           <a:ln w="12700">
             <a:solidFill>
-              <a:srgbClr val="1E293B"/>
+              <a:srgbClr val="2D2D32"/>
             </a:solidFill>
           </a:ln>
         </p:spPr>
@@ -5479,14 +5337,14 @@
       </p:sp>
       <p:sp>
         <p:nvSpPr>
-          <p:cNvPr id="9" name="TextBox 8"/>
+          <p:cNvPr id="10" name="TextBox 9"/>
           <p:cNvSpPr txBox="1"/>
           <p:nvPr/>
         </p:nvSpPr>
         <p:spPr>
           <a:xfrm>
-            <a:off x="6309359" y="2194560"/>
-            <a:ext cx="2316175" cy="3200400"/>
+            <a:off x="3886200" y="2286000"/>
+            <a:ext cx="1310335" cy="3108960"/>
           </a:xfrm>
           <a:prstGeom prst="rect">
             <a:avLst/>
@@ -5501,54 +5359,70 @@
           <a:p>
             <a:pPr>
               <a:spcAft>
-                <a:spcPts val="1200"/>
+                <a:spcPts val="1400"/>
               </a:spcAft>
-              <a:defRPr sz="1800" b="1">
-                <a:solidFill>
-                  <a:srgbClr val="38BDF8"/>
-                </a:solidFill>
-                <a:latin typeface="Arial"/>
-              </a:defRPr>
-            </a:pPr>
-            <a:r>
-              <a:t>Decisões com Dados</a:t>
-            </a:r>
-          </a:p>
-          <a:p>
-            <a:pPr>
-              <a:defRPr sz="1300">
-                <a:solidFill>
-                  <a:srgbClr val="94A3B8"/>
-                </a:solidFill>
-                <a:latin typeface="Arial"/>
-              </a:defRPr>
-            </a:pPr>
-            <a:r>
-              <a:t>Indicadores e relatórios consolidados em dashboards executivos em tempo real.</a:t>
-            </a:r>
-          </a:p>
-        </p:txBody>
-      </p:sp>
-      <p:sp>
-        <p:nvSpPr>
-          <p:cNvPr id="10" name="Rectangle 9"/>
+              <a:defRPr sz="1600" b="1">
+                <a:solidFill>
+                  <a:srgbClr val="FFFFFF"/>
+                </a:solidFill>
+                <a:latin typeface="Arial"/>
+              </a:defRPr>
+            </a:pPr>
+            <a:r>
+              <a:t>Fase 3</a:t>
+            </a:r>
+          </a:p>
+          <a:p>
+            <a:pPr>
+              <a:spcAft>
+                <a:spcPts val="1800"/>
+              </a:spcAft>
+              <a:defRPr sz="1200" b="1">
+                <a:solidFill>
+                  <a:srgbClr val="FF7900"/>
+                </a:solidFill>
+                <a:latin typeface="Arial"/>
+              </a:defRPr>
+            </a:pPr>
+            <a:r>
+              <a:t>Integração NF-e</a:t>
+            </a:r>
+          </a:p>
+          <a:p>
+            <a:pPr>
+              <a:defRPr sz="1100">
+                <a:solidFill>
+                  <a:srgbClr val="22C55E"/>
+                </a:solidFill>
+                <a:latin typeface="Arial"/>
+              </a:defRPr>
+            </a:pPr>
+            <a:r>
+              <a:t>✓ Concluído</a:t>
+            </a:r>
+          </a:p>
+        </p:txBody>
+      </p:sp>
+      <p:sp>
+        <p:nvSpPr>
+          <p:cNvPr id="11" name="Rectangle 10"/>
           <p:cNvSpPr/>
           <p:nvPr/>
         </p:nvSpPr>
         <p:spPr>
           <a:xfrm>
-            <a:off x="8961120" y="2011680"/>
-            <a:ext cx="2499055" cy="3566160"/>
+            <a:off x="5394960" y="2103120"/>
+            <a:ext cx="1401775" cy="3474720"/>
           </a:xfrm>
           <a:prstGeom prst="rect">
             <a:avLst/>
           </a:prstGeom>
           <a:solidFill>
-            <a:srgbClr val="101725"/>
+            <a:srgbClr val="101B17"/>
           </a:solidFill>
           <a:ln w="12700">
             <a:solidFill>
-              <a:srgbClr val="1E293B"/>
+              <a:srgbClr val="2D2D32"/>
             </a:solidFill>
           </a:ln>
         </p:spPr>
@@ -5576,14 +5450,14 @@
       </p:sp>
       <p:sp>
         <p:nvSpPr>
-          <p:cNvPr id="11" name="TextBox 10"/>
+          <p:cNvPr id="12" name="TextBox 11"/>
           <p:cNvSpPr txBox="1"/>
           <p:nvPr/>
         </p:nvSpPr>
         <p:spPr>
           <a:xfrm>
-            <a:off x="9052560" y="2194560"/>
-            <a:ext cx="2316175" cy="3200400"/>
+            <a:off x="5440680" y="2286000"/>
+            <a:ext cx="1310335" cy="3108960"/>
           </a:xfrm>
           <a:prstGeom prst="rect">
             <a:avLst/>
@@ -5598,37 +5472,392 @@
           <a:p>
             <a:pPr>
               <a:spcAft>
-                <a:spcPts val="1200"/>
+                <a:spcPts val="1400"/>
               </a:spcAft>
-              <a:defRPr sz="1800" b="1">
-                <a:solidFill>
-                  <a:srgbClr val="38BDF8"/>
-                </a:solidFill>
-                <a:latin typeface="Arial"/>
-              </a:defRPr>
-            </a:pPr>
-            <a:r>
-              <a:t>Produtividade Elevada</a:t>
-            </a:r>
-          </a:p>
-          <a:p>
-            <a:pPr>
-              <a:defRPr sz="1300">
-                <a:solidFill>
-                  <a:srgbClr val="94A3B8"/>
-                </a:solidFill>
-                <a:latin typeface="Arial"/>
-              </a:defRPr>
-            </a:pPr>
-            <a:r>
-              <a:t>Eliminação de controles em papéis e digitação manual por meio de automação e Inteligência Artificial.</a:t>
-            </a:r>
-          </a:p>
-        </p:txBody>
-      </p:sp>
-      <p:sp>
-        <p:nvSpPr>
-          <p:cNvPr id="12" name="TextBox 11"/>
+              <a:defRPr sz="1600" b="1">
+                <a:solidFill>
+                  <a:srgbClr val="FFFFFF"/>
+                </a:solidFill>
+                <a:latin typeface="Arial"/>
+              </a:defRPr>
+            </a:pPr>
+            <a:r>
+              <a:t>Fase 4</a:t>
+            </a:r>
+          </a:p>
+          <a:p>
+            <a:pPr>
+              <a:spcAft>
+                <a:spcPts val="1800"/>
+              </a:spcAft>
+              <a:defRPr sz="1200" b="1">
+                <a:solidFill>
+                  <a:srgbClr val="FF7900"/>
+                </a:solidFill>
+                <a:latin typeface="Arial"/>
+              </a:defRPr>
+            </a:pPr>
+            <a:r>
+              <a:t>Inteligência Artif.</a:t>
+            </a:r>
+          </a:p>
+          <a:p>
+            <a:pPr>
+              <a:defRPr sz="1100">
+                <a:solidFill>
+                  <a:srgbClr val="22C55E"/>
+                </a:solidFill>
+                <a:latin typeface="Arial"/>
+              </a:defRPr>
+            </a:pPr>
+            <a:r>
+              <a:t>✓ Concluído</a:t>
+            </a:r>
+          </a:p>
+        </p:txBody>
+      </p:sp>
+      <p:sp>
+        <p:nvSpPr>
+          <p:cNvPr id="13" name="Rectangle 12"/>
+          <p:cNvSpPr/>
+          <p:nvPr/>
+        </p:nvSpPr>
+        <p:spPr>
+          <a:xfrm>
+            <a:off x="6949440" y="2103120"/>
+            <a:ext cx="1401775" cy="3474720"/>
+          </a:xfrm>
+          <a:prstGeom prst="rect">
+            <a:avLst/>
+          </a:prstGeom>
+          <a:solidFill>
+            <a:srgbClr val="101728"/>
+          </a:solidFill>
+          <a:ln w="12700">
+            <a:solidFill>
+              <a:srgbClr val="2D2D32"/>
+            </a:solidFill>
+          </a:ln>
+        </p:spPr>
+        <p:style>
+          <a:lnRef idx="1">
+            <a:schemeClr val="accent1"/>
+          </a:lnRef>
+          <a:fillRef idx="3">
+            <a:schemeClr val="accent1"/>
+          </a:fillRef>
+          <a:effectRef idx="2">
+            <a:schemeClr val="accent1"/>
+          </a:effectRef>
+          <a:fontRef idx="minor">
+            <a:schemeClr val="lt1"/>
+          </a:fontRef>
+        </p:style>
+        <p:txBody>
+          <a:bodyPr rtlCol="0" anchor="ctr"/>
+          <a:lstStyle/>
+          <a:p>
+            <a:pPr algn="ctr"/>
+          </a:p>
+        </p:txBody>
+      </p:sp>
+      <p:sp>
+        <p:nvSpPr>
+          <p:cNvPr id="14" name="TextBox 13"/>
+          <p:cNvSpPr txBox="1"/>
+          <p:nvPr/>
+        </p:nvSpPr>
+        <p:spPr>
+          <a:xfrm>
+            <a:off x="6995159" y="2286000"/>
+            <a:ext cx="1310335" cy="3108960"/>
+          </a:xfrm>
+          <a:prstGeom prst="rect">
+            <a:avLst/>
+          </a:prstGeom>
+          <a:noFill/>
+        </p:spPr>
+        <p:txBody>
+          <a:bodyPr wrap="square">
+            <a:spAutoFit/>
+          </a:bodyPr>
+          <a:lstStyle/>
+          <a:p>
+            <a:pPr>
+              <a:spcAft>
+                <a:spcPts val="1400"/>
+              </a:spcAft>
+              <a:defRPr sz="1600" b="1">
+                <a:solidFill>
+                  <a:srgbClr val="FFFFFF"/>
+                </a:solidFill>
+                <a:latin typeface="Arial"/>
+              </a:defRPr>
+            </a:pPr>
+            <a:r>
+              <a:t>Fase 5</a:t>
+            </a:r>
+          </a:p>
+          <a:p>
+            <a:pPr>
+              <a:spcAft>
+                <a:spcPts val="1800"/>
+              </a:spcAft>
+              <a:defRPr sz="1200" b="1">
+                <a:solidFill>
+                  <a:srgbClr val="FF7900"/>
+                </a:solidFill>
+                <a:latin typeface="Arial"/>
+              </a:defRPr>
+            </a:pPr>
+            <a:r>
+              <a:t>Aplicativo Mobile</a:t>
+            </a:r>
+          </a:p>
+          <a:p>
+            <a:pPr>
+              <a:defRPr sz="1100">
+                <a:solidFill>
+                  <a:srgbClr val="FF7900"/>
+                </a:solidFill>
+                <a:latin typeface="Arial"/>
+              </a:defRPr>
+            </a:pPr>
+            <a:r>
+              <a:t>Próximo</a:t>
+            </a:r>
+          </a:p>
+        </p:txBody>
+      </p:sp>
+      <p:sp>
+        <p:nvSpPr>
+          <p:cNvPr id="15" name="Rectangle 14"/>
+          <p:cNvSpPr/>
+          <p:nvPr/>
+        </p:nvSpPr>
+        <p:spPr>
+          <a:xfrm>
+            <a:off x="8503920" y="2103120"/>
+            <a:ext cx="1401775" cy="3474720"/>
+          </a:xfrm>
+          <a:prstGeom prst="rect">
+            <a:avLst/>
+          </a:prstGeom>
+          <a:solidFill>
+            <a:srgbClr val="121316"/>
+          </a:solidFill>
+          <a:ln w="12700">
+            <a:solidFill>
+              <a:srgbClr val="2D2D32"/>
+            </a:solidFill>
+          </a:ln>
+        </p:spPr>
+        <p:style>
+          <a:lnRef idx="1">
+            <a:schemeClr val="accent1"/>
+          </a:lnRef>
+          <a:fillRef idx="3">
+            <a:schemeClr val="accent1"/>
+          </a:fillRef>
+          <a:effectRef idx="2">
+            <a:schemeClr val="accent1"/>
+          </a:effectRef>
+          <a:fontRef idx="minor">
+            <a:schemeClr val="lt1"/>
+          </a:fontRef>
+        </p:style>
+        <p:txBody>
+          <a:bodyPr rtlCol="0" anchor="ctr"/>
+          <a:lstStyle/>
+          <a:p>
+            <a:pPr algn="ctr"/>
+          </a:p>
+        </p:txBody>
+      </p:sp>
+      <p:sp>
+        <p:nvSpPr>
+          <p:cNvPr id="16" name="TextBox 15"/>
+          <p:cNvSpPr txBox="1"/>
+          <p:nvPr/>
+        </p:nvSpPr>
+        <p:spPr>
+          <a:xfrm>
+            <a:off x="8549640" y="2286000"/>
+            <a:ext cx="1310335" cy="3108960"/>
+          </a:xfrm>
+          <a:prstGeom prst="rect">
+            <a:avLst/>
+          </a:prstGeom>
+          <a:noFill/>
+        </p:spPr>
+        <p:txBody>
+          <a:bodyPr wrap="square">
+            <a:spAutoFit/>
+          </a:bodyPr>
+          <a:lstStyle/>
+          <a:p>
+            <a:pPr>
+              <a:spcAft>
+                <a:spcPts val="1400"/>
+              </a:spcAft>
+              <a:defRPr sz="1600" b="1">
+                <a:solidFill>
+                  <a:srgbClr val="FFFFFF"/>
+                </a:solidFill>
+                <a:latin typeface="Arial"/>
+              </a:defRPr>
+            </a:pPr>
+            <a:r>
+              <a:t>Fase 6</a:t>
+            </a:r>
+          </a:p>
+          <a:p>
+            <a:pPr>
+              <a:spcAft>
+                <a:spcPts val="1800"/>
+              </a:spcAft>
+              <a:defRPr sz="1200" b="1">
+                <a:solidFill>
+                  <a:srgbClr val="FF7900"/>
+                </a:solidFill>
+                <a:latin typeface="Arial"/>
+              </a:defRPr>
+            </a:pPr>
+            <a:r>
+              <a:t>Marketplace</a:t>
+            </a:r>
+          </a:p>
+          <a:p>
+            <a:pPr>
+              <a:defRPr sz="1100">
+                <a:solidFill>
+                  <a:srgbClr val="A1A1AA"/>
+                </a:solidFill>
+                <a:latin typeface="Arial"/>
+              </a:defRPr>
+            </a:pPr>
+            <a:r>
+              <a:t>Futuro</a:t>
+            </a:r>
+          </a:p>
+        </p:txBody>
+      </p:sp>
+      <p:sp>
+        <p:nvSpPr>
+          <p:cNvPr id="17" name="Rectangle 16"/>
+          <p:cNvSpPr/>
+          <p:nvPr/>
+        </p:nvSpPr>
+        <p:spPr>
+          <a:xfrm>
+            <a:off x="10058400" y="2103120"/>
+            <a:ext cx="1401775" cy="3474720"/>
+          </a:xfrm>
+          <a:prstGeom prst="rect">
+            <a:avLst/>
+          </a:prstGeom>
+          <a:solidFill>
+            <a:srgbClr val="121316"/>
+          </a:solidFill>
+          <a:ln w="12700">
+            <a:solidFill>
+              <a:srgbClr val="2D2D32"/>
+            </a:solidFill>
+          </a:ln>
+        </p:spPr>
+        <p:style>
+          <a:lnRef idx="1">
+            <a:schemeClr val="accent1"/>
+          </a:lnRef>
+          <a:fillRef idx="3">
+            <a:schemeClr val="accent1"/>
+          </a:fillRef>
+          <a:effectRef idx="2">
+            <a:schemeClr val="accent1"/>
+          </a:effectRef>
+          <a:fontRef idx="minor">
+            <a:schemeClr val="lt1"/>
+          </a:fontRef>
+        </p:style>
+        <p:txBody>
+          <a:bodyPr rtlCol="0" anchor="ctr"/>
+          <a:lstStyle/>
+          <a:p>
+            <a:pPr algn="ctr"/>
+          </a:p>
+        </p:txBody>
+      </p:sp>
+      <p:sp>
+        <p:nvSpPr>
+          <p:cNvPr id="18" name="TextBox 17"/>
+          <p:cNvSpPr txBox="1"/>
+          <p:nvPr/>
+        </p:nvSpPr>
+        <p:spPr>
+          <a:xfrm>
+            <a:off x="10104120" y="2286000"/>
+            <a:ext cx="1310335" cy="3108960"/>
+          </a:xfrm>
+          <a:prstGeom prst="rect">
+            <a:avLst/>
+          </a:prstGeom>
+          <a:noFill/>
+        </p:spPr>
+        <p:txBody>
+          <a:bodyPr wrap="square">
+            <a:spAutoFit/>
+          </a:bodyPr>
+          <a:lstStyle/>
+          <a:p>
+            <a:pPr>
+              <a:spcAft>
+                <a:spcPts val="1400"/>
+              </a:spcAft>
+              <a:defRPr sz="1600" b="1">
+                <a:solidFill>
+                  <a:srgbClr val="FFFFFF"/>
+                </a:solidFill>
+                <a:latin typeface="Arial"/>
+              </a:defRPr>
+            </a:pPr>
+            <a:r>
+              <a:t>Fase 7</a:t>
+            </a:r>
+          </a:p>
+          <a:p>
+            <a:pPr>
+              <a:spcAft>
+                <a:spcPts val="1800"/>
+              </a:spcAft>
+              <a:defRPr sz="1200" b="1">
+                <a:solidFill>
+                  <a:srgbClr val="FF7900"/>
+                </a:solidFill>
+                <a:latin typeface="Arial"/>
+              </a:defRPr>
+            </a:pPr>
+            <a:r>
+              <a:t>BI &amp; Analytics</a:t>
+            </a:r>
+          </a:p>
+          <a:p>
+            <a:pPr>
+              <a:defRPr sz="1100">
+                <a:solidFill>
+                  <a:srgbClr val="A1A1AA"/>
+                </a:solidFill>
+                <a:latin typeface="Arial"/>
+              </a:defRPr>
+            </a:pPr>
+            <a:r>
+              <a:t>Futuro</a:t>
+            </a:r>
+          </a:p>
+        </p:txBody>
+      </p:sp>
+      <p:sp>
+        <p:nvSpPr>
+          <p:cNvPr id="19" name="TextBox 18"/>
           <p:cNvSpPr txBox="1"/>
           <p:nvPr/>
         </p:nvSpPr>
@@ -5651,13 +5880,13 @@
             <a:pPr>
               <a:defRPr sz="850">
                 <a:solidFill>
-                  <a:srgbClr val="94A3B8"/>
-                </a:solidFill>
-                <a:latin typeface="Arial"/>
-              </a:defRPr>
-            </a:pPr>
-            <a:r>
-              <a:t>SUZANO IT   |   Tecnologia para Oficinas e Frotas                                                                                   Slide 13 de 14</a:t>
+                  <a:srgbClr val="A1A1AA"/>
+                </a:solidFill>
+                <a:latin typeface="Arial"/>
+              </a:defRPr>
+            </a:pPr>
+            <a:r>
+              <a:t>SUZANO IT   |   Tecnologia que move frotas.                                                                                          Slide 13 de 15</a:t>
             </a:r>
           </a:p>
         </p:txBody>
@@ -5673,14 +5902,6 @@
 <file path=ppt/slides/slide14.xml><?xml version="1.0" encoding="utf-8"?>
 <p:sld xmlns:a="http://schemas.openxmlformats.org/drawingml/2006/main" xmlns:p="http://schemas.openxmlformats.org/presentationml/2006/main" xmlns:r="http://schemas.openxmlformats.org/officeDocument/2006/relationships">
   <p:cSld>
-    <p:bg>
-      <p:bgPr>
-        <a:solidFill>
-          <a:srgbClr val="080B11"/>
-        </a:solidFill>
-        <a:effectLst/>
-      </p:bgPr>
-    </p:bg>
     <p:spTree>
       <p:nvGrpSpPr>
         <p:cNvPr id="1" name=""/>
@@ -5688,26 +5909,122 @@
         <p:nvPr/>
       </p:nvGrpSpPr>
       <p:grpSpPr/>
-      <p:sp>
-        <p:nvSpPr>
-          <p:cNvPr id="2" name="Rectangle 1"/>
+      <p:pic>
+        <p:nvPicPr>
+          <p:cNvPr id="2" name="Picture 1" descr="background.png"/>
+          <p:cNvPicPr>
+            <a:picLocks noChangeAspect="1"/>
+          </p:cNvPicPr>
+          <p:nvPr/>
+        </p:nvPicPr>
+        <p:blipFill>
+          <a:blip r:embed="rId2"/>
+          <a:stretch>
+            <a:fillRect/>
+          </a:stretch>
+        </p:blipFill>
+        <p:spPr>
+          <a:xfrm>
+            <a:off x="0" y="0"/>
+            <a:ext cx="12191695" cy="6858000"/>
+          </a:xfrm>
+          <a:prstGeom prst="rect">
+            <a:avLst/>
+          </a:prstGeom>
+        </p:spPr>
+      </p:pic>
+      <p:sp>
+        <p:nvSpPr>
+          <p:cNvPr id="3" name="TextBox 2"/>
+          <p:cNvSpPr txBox="1"/>
+          <p:nvPr/>
+        </p:nvSpPr>
+        <p:spPr>
+          <a:xfrm>
+            <a:off x="731520" y="365760"/>
+            <a:ext cx="7315200" cy="365760"/>
+          </a:xfrm>
+          <a:prstGeom prst="rect">
+            <a:avLst/>
+          </a:prstGeom>
+          <a:noFill/>
+        </p:spPr>
+        <p:txBody>
+          <a:bodyPr wrap="square">
+            <a:spAutoFit/>
+          </a:bodyPr>
+          <a:lstStyle/>
+          <a:p>
+            <a:pPr>
+              <a:defRPr sz="1000" b="1">
+                <a:solidFill>
+                  <a:srgbClr val="FF7900"/>
+                </a:solidFill>
+                <a:latin typeface="Arial"/>
+              </a:defRPr>
+            </a:pPr>
+            <a:r>
+              <a:t>RESULTADOS FINAIS</a:t>
+            </a:r>
+          </a:p>
+        </p:txBody>
+      </p:sp>
+      <p:sp>
+        <p:nvSpPr>
+          <p:cNvPr id="4" name="TextBox 3"/>
+          <p:cNvSpPr txBox="1"/>
+          <p:nvPr/>
+        </p:nvSpPr>
+        <p:spPr>
+          <a:xfrm>
+            <a:off x="731520" y="640080"/>
+            <a:ext cx="10515600" cy="731520"/>
+          </a:xfrm>
+          <a:prstGeom prst="rect">
+            <a:avLst/>
+          </a:prstGeom>
+          <a:noFill/>
+        </p:spPr>
+        <p:txBody>
+          <a:bodyPr wrap="square" lIns="0">
+            <a:spAutoFit/>
+          </a:bodyPr>
+          <a:lstStyle/>
+          <a:p>
+            <a:pPr>
+              <a:defRPr sz="2800" b="1">
+                <a:solidFill>
+                  <a:srgbClr val="FFFFFF"/>
+                </a:solidFill>
+                <a:latin typeface="Arial"/>
+              </a:defRPr>
+            </a:pPr>
+            <a:r>
+              <a:t>Benefícios para o Cliente</a:t>
+            </a:r>
+          </a:p>
+        </p:txBody>
+      </p:sp>
+      <p:sp>
+        <p:nvSpPr>
+          <p:cNvPr id="5" name="Rectangle 4"/>
           <p:cNvSpPr/>
           <p:nvPr/>
         </p:nvSpPr>
         <p:spPr>
           <a:xfrm>
-            <a:off x="1828800" y="1645920"/>
-            <a:ext cx="8534095" cy="3840480"/>
+            <a:off x="731520" y="2011680"/>
+            <a:ext cx="2499055" cy="3566160"/>
           </a:xfrm>
           <a:prstGeom prst="rect">
             <a:avLst/>
           </a:prstGeom>
           <a:solidFill>
-            <a:srgbClr val="101725"/>
+            <a:srgbClr val="121316"/>
           </a:solidFill>
           <a:ln w="12700">
             <a:solidFill>
-              <a:srgbClr val="1E293B"/>
+              <a:srgbClr val="2D2D32"/>
             </a:solidFill>
           </a:ln>
         </p:spPr>
@@ -5735,14 +6052,14 @@
       </p:sp>
       <p:sp>
         <p:nvSpPr>
-          <p:cNvPr id="3" name="TextBox 2"/>
+          <p:cNvPr id="6" name="TextBox 5"/>
           <p:cNvSpPr txBox="1"/>
           <p:nvPr/>
         </p:nvSpPr>
         <p:spPr>
           <a:xfrm>
-            <a:off x="2103120" y="1828800"/>
-            <a:ext cx="7985455" cy="3474720"/>
+            <a:off x="822960" y="2194560"/>
+            <a:ext cx="2316175" cy="3200400"/>
           </a:xfrm>
           <a:prstGeom prst="rect">
             <a:avLst/>
@@ -5755,75 +6072,330 @@
           </a:bodyPr>
           <a:lstStyle/>
           <a:p>
-            <a:pPr algn="ctr">
+            <a:pPr>
               <a:spcAft>
-                <a:spcPts val="800"/>
+                <a:spcPts val="1200"/>
               </a:spcAft>
-              <a:defRPr sz="4000" b="1">
-                <a:solidFill>
-                  <a:srgbClr val="F8FAFC"/>
-                </a:solidFill>
-                <a:latin typeface="Arial"/>
-              </a:defRPr>
-            </a:pPr>
-            <a:r>
-              <a:t>SUZANO IT</a:t>
-            </a:r>
-          </a:p>
-          <a:p>
-            <a:pPr algn="ctr">
+              <a:defRPr sz="1800" b="1">
+                <a:solidFill>
+                  <a:srgbClr val="FF7900"/>
+                </a:solidFill>
+                <a:latin typeface="Arial"/>
+              </a:defRPr>
+            </a:pPr>
+            <a:r>
+              <a:t>Redução de Custos</a:t>
+            </a:r>
+          </a:p>
+          <a:p>
+            <a:pPr>
+              <a:defRPr sz="1300">
+                <a:solidFill>
+                  <a:srgbClr val="A1A1AA"/>
+                </a:solidFill>
+                <a:latin typeface="Arial"/>
+              </a:defRPr>
+            </a:pPr>
+            <a:r>
+              <a:t>Evita quebras inesperadas através de cronogramas rígidos de manutenção preventiva na frota.</a:t>
+            </a:r>
+          </a:p>
+        </p:txBody>
+      </p:sp>
+      <p:sp>
+        <p:nvSpPr>
+          <p:cNvPr id="7" name="Rectangle 6"/>
+          <p:cNvSpPr/>
+          <p:nvPr/>
+        </p:nvSpPr>
+        <p:spPr>
+          <a:xfrm>
+            <a:off x="3474720" y="2011680"/>
+            <a:ext cx="2499055" cy="3566160"/>
+          </a:xfrm>
+          <a:prstGeom prst="rect">
+            <a:avLst/>
+          </a:prstGeom>
+          <a:solidFill>
+            <a:srgbClr val="121316"/>
+          </a:solidFill>
+          <a:ln w="12700">
+            <a:solidFill>
+              <a:srgbClr val="2D2D32"/>
+            </a:solidFill>
+          </a:ln>
+        </p:spPr>
+        <p:style>
+          <a:lnRef idx="1">
+            <a:schemeClr val="accent1"/>
+          </a:lnRef>
+          <a:fillRef idx="3">
+            <a:schemeClr val="accent1"/>
+          </a:fillRef>
+          <a:effectRef idx="2">
+            <a:schemeClr val="accent1"/>
+          </a:effectRef>
+          <a:fontRef idx="minor">
+            <a:schemeClr val="lt1"/>
+          </a:fontRef>
+        </p:style>
+        <p:txBody>
+          <a:bodyPr rtlCol="0" anchor="ctr"/>
+          <a:lstStyle/>
+          <a:p>
+            <a:pPr algn="ctr"/>
+          </a:p>
+        </p:txBody>
+      </p:sp>
+      <p:sp>
+        <p:nvSpPr>
+          <p:cNvPr id="8" name="TextBox 7"/>
+          <p:cNvSpPr txBox="1"/>
+          <p:nvPr/>
+        </p:nvSpPr>
+        <p:spPr>
+          <a:xfrm>
+            <a:off x="3566160" y="2194560"/>
+            <a:ext cx="2316175" cy="3200400"/>
+          </a:xfrm>
+          <a:prstGeom prst="rect">
+            <a:avLst/>
+          </a:prstGeom>
+          <a:noFill/>
+        </p:spPr>
+        <p:txBody>
+          <a:bodyPr wrap="square">
+            <a:spAutoFit/>
+          </a:bodyPr>
+          <a:lstStyle/>
+          <a:p>
+            <a:pPr>
               <a:spcAft>
-                <a:spcPts val="2800"/>
+                <a:spcPts val="1200"/>
               </a:spcAft>
-              <a:defRPr sz="1600">
-                <a:solidFill>
-                  <a:srgbClr val="38BDF8"/>
-                </a:solidFill>
-                <a:latin typeface="Arial"/>
-              </a:defRPr>
-            </a:pPr>
-            <a:r>
-              <a:t>Tecnologia Inteligente para Gestão de Oficinas e Frotas</a:t>
-            </a:r>
-          </a:p>
-          <a:p>
-            <a:pPr algn="ctr">
+              <a:defRPr sz="1800" b="1">
+                <a:solidFill>
+                  <a:srgbClr val="FF7900"/>
+                </a:solidFill>
+                <a:latin typeface="Arial"/>
+              </a:defRPr>
+            </a:pPr>
+            <a:r>
+              <a:t>Organização Geral</a:t>
+            </a:r>
+          </a:p>
+          <a:p>
+            <a:pPr>
+              <a:defRPr sz="1300">
+                <a:solidFill>
+                  <a:srgbClr val="A1A1AA"/>
+                </a:solidFill>
+                <a:latin typeface="Arial"/>
+              </a:defRPr>
+            </a:pPr>
+            <a:r>
+              <a:t>Fluxo operacional padronizado desde a abertura da OS até o faturamento e envio de laudos.</a:t>
+            </a:r>
+          </a:p>
+        </p:txBody>
+      </p:sp>
+      <p:sp>
+        <p:nvSpPr>
+          <p:cNvPr id="9" name="Rectangle 8"/>
+          <p:cNvSpPr/>
+          <p:nvPr/>
+        </p:nvSpPr>
+        <p:spPr>
+          <a:xfrm>
+            <a:off x="6217920" y="2011680"/>
+            <a:ext cx="2499055" cy="3566160"/>
+          </a:xfrm>
+          <a:prstGeom prst="rect">
+            <a:avLst/>
+          </a:prstGeom>
+          <a:solidFill>
+            <a:srgbClr val="121316"/>
+          </a:solidFill>
+          <a:ln w="12700">
+            <a:solidFill>
+              <a:srgbClr val="2D2D32"/>
+            </a:solidFill>
+          </a:ln>
+        </p:spPr>
+        <p:style>
+          <a:lnRef idx="1">
+            <a:schemeClr val="accent1"/>
+          </a:lnRef>
+          <a:fillRef idx="3">
+            <a:schemeClr val="accent1"/>
+          </a:fillRef>
+          <a:effectRef idx="2">
+            <a:schemeClr val="accent1"/>
+          </a:effectRef>
+          <a:fontRef idx="minor">
+            <a:schemeClr val="lt1"/>
+          </a:fontRef>
+        </p:style>
+        <p:txBody>
+          <a:bodyPr rtlCol="0" anchor="ctr"/>
+          <a:lstStyle/>
+          <a:p>
+            <a:pPr algn="ctr"/>
+          </a:p>
+        </p:txBody>
+      </p:sp>
+      <p:sp>
+        <p:nvSpPr>
+          <p:cNvPr id="10" name="TextBox 9"/>
+          <p:cNvSpPr txBox="1"/>
+          <p:nvPr/>
+        </p:nvSpPr>
+        <p:spPr>
+          <a:xfrm>
+            <a:off x="6309359" y="2194560"/>
+            <a:ext cx="2316175" cy="3200400"/>
+          </a:xfrm>
+          <a:prstGeom prst="rect">
+            <a:avLst/>
+          </a:prstGeom>
+          <a:noFill/>
+        </p:spPr>
+        <p:txBody>
+          <a:bodyPr wrap="square">
+            <a:spAutoFit/>
+          </a:bodyPr>
+          <a:lstStyle/>
+          <a:p>
+            <a:pPr>
               <a:spcAft>
-                <a:spcPts val="2800"/>
+                <a:spcPts val="1200"/>
               </a:spcAft>
-              <a:defRPr sz="1400">
-                <a:solidFill>
-                  <a:srgbClr val="94A3B8"/>
-                </a:solidFill>
-                <a:latin typeface="Arial"/>
-              </a:defRPr>
-            </a:pPr>
-            <a:r>
-              <a:t>Website: www.suzanoit.com.br</a:t>
-            </a:r>
-            <a:br/>
-            <a:r>
-              <a:t>E-mail: contato@suzanoit.com.br</a:t>
-            </a:r>
-          </a:p>
-          <a:p>
-            <a:pPr algn="ctr">
-              <a:defRPr sz="1600" b="1">
-                <a:solidFill>
-                  <a:srgbClr val="38BDF8"/>
-                </a:solidFill>
-                <a:latin typeface="Arial"/>
-              </a:defRPr>
-            </a:pPr>
-            <a:r>
-              <a:t>"Mais controle. Mais produtividade. Mais resultado."</a:t>
-            </a:r>
-          </a:p>
-        </p:txBody>
-      </p:sp>
-      <p:sp>
-        <p:nvSpPr>
-          <p:cNvPr id="4" name="TextBox 3"/>
+              <a:defRPr sz="1800" b="1">
+                <a:solidFill>
+                  <a:srgbClr val="FF7900"/>
+                </a:solidFill>
+                <a:latin typeface="Arial"/>
+              </a:defRPr>
+            </a:pPr>
+            <a:r>
+              <a:t>Decisões com Dados</a:t>
+            </a:r>
+          </a:p>
+          <a:p>
+            <a:pPr>
+              <a:defRPr sz="1300">
+                <a:solidFill>
+                  <a:srgbClr val="A1A1AA"/>
+                </a:solidFill>
+                <a:latin typeface="Arial"/>
+              </a:defRPr>
+            </a:pPr>
+            <a:r>
+              <a:t>Indicadores e relatórios consolidados em dashboards executivos em tempo real.</a:t>
+            </a:r>
+          </a:p>
+        </p:txBody>
+      </p:sp>
+      <p:sp>
+        <p:nvSpPr>
+          <p:cNvPr id="11" name="Rectangle 10"/>
+          <p:cNvSpPr/>
+          <p:nvPr/>
+        </p:nvSpPr>
+        <p:spPr>
+          <a:xfrm>
+            <a:off x="8961120" y="2011680"/>
+            <a:ext cx="2499055" cy="3566160"/>
+          </a:xfrm>
+          <a:prstGeom prst="rect">
+            <a:avLst/>
+          </a:prstGeom>
+          <a:solidFill>
+            <a:srgbClr val="121316"/>
+          </a:solidFill>
+          <a:ln w="12700">
+            <a:solidFill>
+              <a:srgbClr val="2D2D32"/>
+            </a:solidFill>
+          </a:ln>
+        </p:spPr>
+        <p:style>
+          <a:lnRef idx="1">
+            <a:schemeClr val="accent1"/>
+          </a:lnRef>
+          <a:fillRef idx="3">
+            <a:schemeClr val="accent1"/>
+          </a:fillRef>
+          <a:effectRef idx="2">
+            <a:schemeClr val="accent1"/>
+          </a:effectRef>
+          <a:fontRef idx="minor">
+            <a:schemeClr val="lt1"/>
+          </a:fontRef>
+        </p:style>
+        <p:txBody>
+          <a:bodyPr rtlCol="0" anchor="ctr"/>
+          <a:lstStyle/>
+          <a:p>
+            <a:pPr algn="ctr"/>
+          </a:p>
+        </p:txBody>
+      </p:sp>
+      <p:sp>
+        <p:nvSpPr>
+          <p:cNvPr id="12" name="TextBox 11"/>
+          <p:cNvSpPr txBox="1"/>
+          <p:nvPr/>
+        </p:nvSpPr>
+        <p:spPr>
+          <a:xfrm>
+            <a:off x="9052560" y="2194560"/>
+            <a:ext cx="2316175" cy="3200400"/>
+          </a:xfrm>
+          <a:prstGeom prst="rect">
+            <a:avLst/>
+          </a:prstGeom>
+          <a:noFill/>
+        </p:spPr>
+        <p:txBody>
+          <a:bodyPr wrap="square">
+            <a:spAutoFit/>
+          </a:bodyPr>
+          <a:lstStyle/>
+          <a:p>
+            <a:pPr>
+              <a:spcAft>
+                <a:spcPts val="1200"/>
+              </a:spcAft>
+              <a:defRPr sz="1800" b="1">
+                <a:solidFill>
+                  <a:srgbClr val="FF7900"/>
+                </a:solidFill>
+                <a:latin typeface="Arial"/>
+              </a:defRPr>
+            </a:pPr>
+            <a:r>
+              <a:t>Produtividade Elevada</a:t>
+            </a:r>
+          </a:p>
+          <a:p>
+            <a:pPr>
+              <a:defRPr sz="1300">
+                <a:solidFill>
+                  <a:srgbClr val="A1A1AA"/>
+                </a:solidFill>
+                <a:latin typeface="Arial"/>
+              </a:defRPr>
+            </a:pPr>
+            <a:r>
+              <a:t>Eliminação de controles em papéis e digitação manual por meio de automação e Inteligência Artificial.</a:t>
+            </a:r>
+          </a:p>
+        </p:txBody>
+      </p:sp>
+      <p:sp>
+        <p:nvSpPr>
+          <p:cNvPr id="13" name="TextBox 12"/>
           <p:cNvSpPr txBox="1"/>
           <p:nvPr/>
         </p:nvSpPr>
@@ -5846,13 +6418,296 @@
             <a:pPr>
               <a:defRPr sz="850">
                 <a:solidFill>
-                  <a:srgbClr val="94A3B8"/>
-                </a:solidFill>
-                <a:latin typeface="Arial"/>
-              </a:defRPr>
-            </a:pPr>
-            <a:r>
-              <a:t>SUZANO IT   |   Tecnologia para Oficinas e Frotas                                                                                   Slide 14 de 14</a:t>
+                  <a:srgbClr val="A1A1AA"/>
+                </a:solidFill>
+                <a:latin typeface="Arial"/>
+              </a:defRPr>
+            </a:pPr>
+            <a:r>
+              <a:t>SUZANO IT   |   Tecnologia que move frotas.                                                                                          Slide 14 de 15</a:t>
+            </a:r>
+          </a:p>
+        </p:txBody>
+      </p:sp>
+    </p:spTree>
+  </p:cSld>
+  <p:clrMapOvr>
+    <a:masterClrMapping/>
+  </p:clrMapOvr>
+</p:sld>
+</file>
+
+<file path=ppt/slides/slide15.xml><?xml version="1.0" encoding="utf-8"?>
+<p:sld xmlns:a="http://schemas.openxmlformats.org/drawingml/2006/main" xmlns:p="http://schemas.openxmlformats.org/presentationml/2006/main" xmlns:r="http://schemas.openxmlformats.org/officeDocument/2006/relationships">
+  <p:cSld>
+    <p:spTree>
+      <p:nvGrpSpPr>
+        <p:cNvPr id="1" name=""/>
+        <p:cNvGrpSpPr/>
+        <p:nvPr/>
+      </p:nvGrpSpPr>
+      <p:grpSpPr/>
+      <p:pic>
+        <p:nvPicPr>
+          <p:cNvPr id="2" name="Picture 1" descr="background.png"/>
+          <p:cNvPicPr>
+            <a:picLocks noChangeAspect="1"/>
+          </p:cNvPicPr>
+          <p:nvPr/>
+        </p:nvPicPr>
+        <p:blipFill>
+          <a:blip r:embed="rId2"/>
+          <a:stretch>
+            <a:fillRect/>
+          </a:stretch>
+        </p:blipFill>
+        <p:spPr>
+          <a:xfrm>
+            <a:off x="0" y="0"/>
+            <a:ext cx="12191695" cy="6858000"/>
+          </a:xfrm>
+          <a:prstGeom prst="rect">
+            <a:avLst/>
+          </a:prstGeom>
+        </p:spPr>
+      </p:pic>
+      <p:sp>
+        <p:nvSpPr>
+          <p:cNvPr id="3" name="Rectangle 2"/>
+          <p:cNvSpPr/>
+          <p:nvPr/>
+        </p:nvSpPr>
+        <p:spPr>
+          <a:xfrm>
+            <a:off x="1828800" y="1371600"/>
+            <a:ext cx="8534095" cy="4389120"/>
+          </a:xfrm>
+          <a:prstGeom prst="rect">
+            <a:avLst/>
+          </a:prstGeom>
+          <a:solidFill>
+            <a:srgbClr val="121316"/>
+          </a:solidFill>
+          <a:ln w="12700">
+            <a:solidFill>
+              <a:srgbClr val="2D2D32"/>
+            </a:solidFill>
+          </a:ln>
+        </p:spPr>
+        <p:style>
+          <a:lnRef idx="1">
+            <a:schemeClr val="accent1"/>
+          </a:lnRef>
+          <a:fillRef idx="3">
+            <a:schemeClr val="accent1"/>
+          </a:fillRef>
+          <a:effectRef idx="2">
+            <a:schemeClr val="accent1"/>
+          </a:effectRef>
+          <a:fontRef idx="minor">
+            <a:schemeClr val="lt1"/>
+          </a:fontRef>
+        </p:style>
+        <p:txBody>
+          <a:bodyPr rtlCol="0" anchor="ctr"/>
+          <a:lstStyle/>
+          <a:p>
+            <a:pPr algn="ctr"/>
+          </a:p>
+        </p:txBody>
+      </p:sp>
+      <p:pic>
+        <p:nvPicPr>
+          <p:cNvPr id="4" name="Picture 3" descr="logo.png"/>
+          <p:cNvPicPr>
+            <a:picLocks noChangeAspect="1"/>
+          </p:cNvPicPr>
+          <p:nvPr/>
+        </p:nvPicPr>
+        <p:blipFill>
+          <a:blip r:embed="rId3"/>
+          <a:stretch>
+            <a:fillRect/>
+          </a:stretch>
+        </p:blipFill>
+        <p:spPr>
+          <a:xfrm>
+            <a:off x="3931920" y="1828800"/>
+            <a:ext cx="1097280" cy="1097280"/>
+          </a:xfrm>
+          <a:prstGeom prst="rect">
+            <a:avLst/>
+          </a:prstGeom>
+        </p:spPr>
+      </p:pic>
+      <p:sp>
+        <p:nvSpPr>
+          <p:cNvPr id="5" name="TextBox 4"/>
+          <p:cNvSpPr txBox="1"/>
+          <p:nvPr/>
+        </p:nvSpPr>
+        <p:spPr>
+          <a:xfrm>
+            <a:off x="5212080" y="1783080"/>
+            <a:ext cx="3657600" cy="1188720"/>
+          </a:xfrm>
+          <a:prstGeom prst="rect">
+            <a:avLst/>
+          </a:prstGeom>
+          <a:noFill/>
+        </p:spPr>
+        <p:txBody>
+          <a:bodyPr wrap="square" lIns="0" tIns="0">
+            <a:spAutoFit/>
+          </a:bodyPr>
+          <a:lstStyle/>
+          <a:p>
+            <a:pPr>
+              <a:spcAft>
+                <a:spcPts val="0"/>
+              </a:spcAft>
+            </a:pPr>
+            <a:r>
+              <a:rPr sz="4800" b="1">
+                <a:solidFill>
+                  <a:srgbClr val="FFFFFF"/>
+                </a:solidFill>
+                <a:latin typeface="Arial"/>
+              </a:rPr>
+              <a:t>Suzano</a:t>
+            </a:r>
+            <a:r>
+              <a:rPr sz="4800" b="1">
+                <a:solidFill>
+                  <a:srgbClr val="FF7900"/>
+                </a:solidFill>
+                <a:latin typeface="Arial"/>
+              </a:rPr>
+              <a:t> IT</a:t>
+            </a:r>
+          </a:p>
+        </p:txBody>
+      </p:sp>
+      <p:sp>
+        <p:nvSpPr>
+          <p:cNvPr id="6" name="TextBox 5"/>
+          <p:cNvSpPr txBox="1"/>
+          <p:nvPr/>
+        </p:nvSpPr>
+        <p:spPr>
+          <a:xfrm>
+            <a:off x="2286000" y="3108960"/>
+            <a:ext cx="7619695" cy="548640"/>
+          </a:xfrm>
+          <a:prstGeom prst="rect">
+            <a:avLst/>
+          </a:prstGeom>
+          <a:noFill/>
+        </p:spPr>
+        <p:txBody>
+          <a:bodyPr wrap="square">
+            <a:spAutoFit/>
+          </a:bodyPr>
+          <a:lstStyle/>
+          <a:p>
+            <a:pPr algn="ctr">
+              <a:defRPr sz="1800" b="0">
+                <a:solidFill>
+                  <a:srgbClr val="FFFFFF"/>
+                </a:solidFill>
+                <a:latin typeface="Arial"/>
+              </a:defRPr>
+            </a:pPr>
+            <a:r>
+              <a:t>Tecnologia que move frotas.</a:t>
+            </a:r>
+          </a:p>
+        </p:txBody>
+      </p:sp>
+      <p:sp>
+        <p:nvSpPr>
+          <p:cNvPr id="7" name="TextBox 6"/>
+          <p:cNvSpPr txBox="1"/>
+          <p:nvPr/>
+        </p:nvSpPr>
+        <p:spPr>
+          <a:xfrm>
+            <a:off x="2286000" y="3749039"/>
+            <a:ext cx="7619695" cy="1097280"/>
+          </a:xfrm>
+          <a:prstGeom prst="rect">
+            <a:avLst/>
+          </a:prstGeom>
+          <a:noFill/>
+        </p:spPr>
+        <p:txBody>
+          <a:bodyPr wrap="square">
+            <a:spAutoFit/>
+          </a:bodyPr>
+          <a:lstStyle/>
+          <a:p>
+            <a:pPr algn="ctr">
+              <a:spcAft>
+                <a:spcPts val="1400"/>
+              </a:spcAft>
+              <a:defRPr sz="1300">
+                <a:solidFill>
+                  <a:srgbClr val="A1A1AA"/>
+                </a:solidFill>
+                <a:latin typeface="Arial"/>
+              </a:defRPr>
+            </a:pPr>
+            <a:r>
+              <a:t>Website: www.suzanoit.com.br   |   E-mail: contato@suzanoit.com.br</a:t>
+            </a:r>
+          </a:p>
+          <a:p>
+            <a:pPr algn="ctr">
+              <a:defRPr sz="1400" b="1">
+                <a:solidFill>
+                  <a:srgbClr val="FF7900"/>
+                </a:solidFill>
+                <a:latin typeface="Arial"/>
+              </a:defRPr>
+            </a:pPr>
+            <a:r>
+              <a:t>"Mais controle. Mais produtividade. Mais resultado."</a:t>
+            </a:r>
+          </a:p>
+        </p:txBody>
+      </p:sp>
+      <p:sp>
+        <p:nvSpPr>
+          <p:cNvPr id="8" name="TextBox 7"/>
+          <p:cNvSpPr txBox="1"/>
+          <p:nvPr/>
+        </p:nvSpPr>
+        <p:spPr>
+          <a:xfrm>
+            <a:off x="731520" y="6400800"/>
+            <a:ext cx="10698480" cy="365760"/>
+          </a:xfrm>
+          <a:prstGeom prst="rect">
+            <a:avLst/>
+          </a:prstGeom>
+          <a:noFill/>
+        </p:spPr>
+        <p:txBody>
+          <a:bodyPr wrap="none">
+            <a:spAutoFit/>
+          </a:bodyPr>
+          <a:lstStyle/>
+          <a:p>
+            <a:pPr>
+              <a:defRPr sz="850">
+                <a:solidFill>
+                  <a:srgbClr val="A1A1AA"/>
+                </a:solidFill>
+                <a:latin typeface="Arial"/>
+              </a:defRPr>
+            </a:pPr>
+            <a:r>
+              <a:t>SUZANO IT   |   Tecnologia que move frotas.                                                                                          Slide 15 de 15</a:t>
             </a:r>
           </a:p>
         </p:txBody>
@@ -5868,14 +6723,6 @@
 <file path=ppt/slides/slide2.xml><?xml version="1.0" encoding="utf-8"?>
 <p:sld xmlns:a="http://schemas.openxmlformats.org/drawingml/2006/main" xmlns:p="http://schemas.openxmlformats.org/presentationml/2006/main" xmlns:r="http://schemas.openxmlformats.org/officeDocument/2006/relationships">
   <p:cSld>
-    <p:bg>
-      <p:bgPr>
-        <a:solidFill>
-          <a:srgbClr val="080B11"/>
-        </a:solidFill>
-        <a:effectLst/>
-      </p:bgPr>
-    </p:bg>
     <p:spTree>
       <p:nvGrpSpPr>
         <p:cNvPr id="1" name=""/>
@@ -5883,9 +6730,33 @@
         <p:nvPr/>
       </p:nvGrpSpPr>
       <p:grpSpPr/>
-      <p:sp>
-        <p:nvSpPr>
-          <p:cNvPr id="2" name="TextBox 1"/>
+      <p:pic>
+        <p:nvPicPr>
+          <p:cNvPr id="2" name="Picture 1" descr="background.png"/>
+          <p:cNvPicPr>
+            <a:picLocks noChangeAspect="1"/>
+          </p:cNvPicPr>
+          <p:nvPr/>
+        </p:nvPicPr>
+        <p:blipFill>
+          <a:blip r:embed="rId2"/>
+          <a:stretch>
+            <a:fillRect/>
+          </a:stretch>
+        </p:blipFill>
+        <p:spPr>
+          <a:xfrm>
+            <a:off x="0" y="0"/>
+            <a:ext cx="12191695" cy="6858000"/>
+          </a:xfrm>
+          <a:prstGeom prst="rect">
+            <a:avLst/>
+          </a:prstGeom>
+        </p:spPr>
+      </p:pic>
+      <p:sp>
+        <p:nvSpPr>
+          <p:cNvPr id="3" name="TextBox 2"/>
           <p:cNvSpPr txBox="1"/>
           <p:nvPr/>
         </p:nvSpPr>
@@ -5908,20 +6779,20 @@
             <a:pPr>
               <a:defRPr sz="1000" b="1">
                 <a:solidFill>
-                  <a:srgbClr val="38BDF8"/>
-                </a:solidFill>
-                <a:latin typeface="Arial"/>
-              </a:defRPr>
-            </a:pPr>
-            <a:r>
-              <a:t>APRESENTAÇÃO INSTITUCIONAL</a:t>
-            </a:r>
-          </a:p>
-        </p:txBody>
-      </p:sp>
-      <p:sp>
-        <p:nvSpPr>
-          <p:cNvPr id="3" name="TextBox 2"/>
+                  <a:srgbClr val="FF7900"/>
+                </a:solidFill>
+                <a:latin typeface="Arial"/>
+              </a:defRPr>
+            </a:pPr>
+            <a:r>
+              <a:t>CONCEITO E INTEGRAÇÃO</a:t>
+            </a:r>
+          </a:p>
+        </p:txBody>
+      </p:sp>
+      <p:sp>
+        <p:nvSpPr>
+          <p:cNvPr id="4" name="TextBox 3"/>
           <p:cNvSpPr txBox="1"/>
           <p:nvPr/>
         </p:nvSpPr>
@@ -5944,27 +6815,27 @@
             <a:pPr>
               <a:defRPr sz="2800" b="1">
                 <a:solidFill>
-                  <a:srgbClr val="F8FAFC"/>
-                </a:solidFill>
-                <a:latin typeface="Arial"/>
-              </a:defRPr>
-            </a:pPr>
-            <a:r>
-              <a:t>Quem Somos</a:t>
-            </a:r>
-          </a:p>
-        </p:txBody>
-      </p:sp>
-      <p:sp>
-        <p:nvSpPr>
-          <p:cNvPr id="4" name="TextBox 3"/>
+                  <a:srgbClr val="FFFFFF"/>
+                </a:solidFill>
+                <a:latin typeface="Arial"/>
+              </a:defRPr>
+            </a:pPr>
+            <a:r>
+              <a:t>Visão Geral da Plataforma</a:t>
+            </a:r>
+          </a:p>
+        </p:txBody>
+      </p:sp>
+      <p:sp>
+        <p:nvSpPr>
+          <p:cNvPr id="5" name="TextBox 4"/>
           <p:cNvSpPr txBox="1"/>
           <p:nvPr/>
         </p:nvSpPr>
         <p:spPr>
           <a:xfrm>
-            <a:off x="731520" y="1828800"/>
-            <a:ext cx="5029200" cy="4114800"/>
+            <a:off x="731520" y="1554480"/>
+            <a:ext cx="10698480" cy="731520"/>
           </a:xfrm>
           <a:prstGeom prst="rect">
             <a:avLst/>
@@ -5972,53 +6843,45 @@
           <a:noFill/>
         </p:spPr>
         <p:txBody>
-          <a:bodyPr wrap="square">
+          <a:bodyPr wrap="none">
             <a:spAutoFit/>
           </a:bodyPr>
           <a:lstStyle/>
           <a:p>
             <a:pPr>
-              <a:spcAft>
-                <a:spcPts val="1400"/>
-              </a:spcAft>
               <a:defRPr sz="1800">
                 <a:solidFill>
-                  <a:srgbClr val="94A3B8"/>
-                </a:solidFill>
-                <a:latin typeface="Arial"/>
-              </a:defRPr>
-            </a:pPr>
-            <a:r>
-              <a:t>A Suzano IT é uma empresa de tecnologia especializada no desenvolvimento de ecossistemas digitais para o setor automotivo.</a:t>
-            </a:r>
-            <a:br/>
-            <a:br/>
-            <a:r>
-              <a:t>Nosso propósito é reinventar a forma como oficinas mecânicas, auto centers e gestores de frota operam no dia a dia, eliminando controles manuais e proporcionando inteligência e redução de custos reais através de automação na nuvem.</a:t>
-            </a:r>
-          </a:p>
-        </p:txBody>
-      </p:sp>
-      <p:sp>
-        <p:nvSpPr>
-          <p:cNvPr id="5" name="Rectangle 4"/>
+                  <a:srgbClr val="A1A1AA"/>
+                </a:solidFill>
+                <a:latin typeface="Arial"/>
+              </a:defRPr>
+            </a:pPr>
+            <a:r>
+              <a:t>Uma solução robusta desenvolvida para unificar e modernizar todas as etapas operacionais do setor.</a:t>
+            </a:r>
+          </a:p>
+        </p:txBody>
+      </p:sp>
+      <p:sp>
+        <p:nvSpPr>
+          <p:cNvPr id="6" name="Rectangle 5"/>
           <p:cNvSpPr/>
           <p:nvPr/>
         </p:nvSpPr>
         <p:spPr>
           <a:xfrm>
-            <a:off x="6217920" y="1828800"/>
-            <a:ext cx="5212080" cy="1188720"/>
+            <a:off x="731520" y="2377440"/>
+            <a:ext cx="3413455" cy="3474720"/>
           </a:xfrm>
           <a:prstGeom prst="rect">
             <a:avLst/>
           </a:prstGeom>
           <a:solidFill>
-            <a:srgbClr val="101725"/>
+            <a:srgbClr val="121316"/>
           </a:solidFill>
           <a:ln w="12700">
             <a:solidFill>
-              <a:srgbClr val="1E293B"/>
+              <a:srgbClr val="2D2D32"/>
             </a:solidFill>
           </a:ln>
         </p:spPr>
@@ -6046,14 +6909,14 @@
       </p:sp>
       <p:sp>
         <p:nvSpPr>
-          <p:cNvPr id="6" name="TextBox 5"/>
+          <p:cNvPr id="7" name="TextBox 6"/>
           <p:cNvSpPr txBox="1"/>
           <p:nvPr/>
         </p:nvSpPr>
         <p:spPr>
           <a:xfrm>
-            <a:off x="6400800" y="1920240"/>
-            <a:ext cx="4846320" cy="1005840"/>
+            <a:off x="822960" y="2560320"/>
+            <a:ext cx="3230575" cy="3108960"/>
           </a:xfrm>
           <a:prstGeom prst="rect">
             <a:avLst/>
@@ -6068,54 +6931,54 @@
           <a:p>
             <a:pPr>
               <a:spcAft>
-                <a:spcPts val="400"/>
+                <a:spcPts val="1200"/>
               </a:spcAft>
-              <a:defRPr sz="1500" b="1">
-                <a:solidFill>
-                  <a:srgbClr val="38BDF8"/>
-                </a:solidFill>
-                <a:latin typeface="Arial"/>
-              </a:defRPr>
-            </a:pPr>
-            <a:r>
-              <a:t>Arquitetura 100% em Nuvem</a:t>
-            </a:r>
-          </a:p>
-          <a:p>
-            <a:pPr>
-              <a:defRPr sz="1200">
-                <a:solidFill>
-                  <a:srgbClr val="94A3B8"/>
-                </a:solidFill>
-                <a:latin typeface="Arial"/>
-              </a:defRPr>
-            </a:pPr>
-            <a:r>
-              <a:t>Acessível de qualquer lugar, dispensando servidores locais.</a:t>
-            </a:r>
-          </a:p>
-        </p:txBody>
-      </p:sp>
-      <p:sp>
-        <p:nvSpPr>
-          <p:cNvPr id="7" name="Rectangle 6"/>
+              <a:defRPr sz="1800" b="1">
+                <a:solidFill>
+                  <a:srgbClr val="FF7900"/>
+                </a:solidFill>
+                <a:latin typeface="Arial"/>
+              </a:defRPr>
+            </a:pPr>
+            <a:r>
+              <a:t>Multi-Tenant</a:t>
+            </a:r>
+          </a:p>
+          <a:p>
+            <a:pPr>
+              <a:defRPr sz="1300">
+                <a:solidFill>
+                  <a:srgbClr val="A1A1AA"/>
+                </a:solidFill>
+                <a:latin typeface="Arial"/>
+              </a:defRPr>
+            </a:pPr>
+            <a:r>
+              <a:t>Plataforma SaaS multiempresa ideal para redes de oficinas, concessionárias e controle unificado de múltiplas filiais.</a:t>
+            </a:r>
+          </a:p>
+        </p:txBody>
+      </p:sp>
+      <p:sp>
+        <p:nvSpPr>
+          <p:cNvPr id="8" name="Rectangle 7"/>
           <p:cNvSpPr/>
           <p:nvPr/>
         </p:nvSpPr>
         <p:spPr>
           <a:xfrm>
-            <a:off x="6217920" y="3291840"/>
-            <a:ext cx="5212080" cy="1188720"/>
+            <a:off x="4389120" y="2377440"/>
+            <a:ext cx="3413455" cy="3474720"/>
           </a:xfrm>
           <a:prstGeom prst="rect">
             <a:avLst/>
           </a:prstGeom>
           <a:solidFill>
-            <a:srgbClr val="101725"/>
+            <a:srgbClr val="121316"/>
           </a:solidFill>
           <a:ln w="12700">
             <a:solidFill>
-              <a:srgbClr val="1E293B"/>
+              <a:srgbClr val="2D2D32"/>
             </a:solidFill>
           </a:ln>
         </p:spPr>
@@ -6143,14 +7006,14 @@
       </p:sp>
       <p:sp>
         <p:nvSpPr>
-          <p:cNvPr id="8" name="TextBox 7"/>
+          <p:cNvPr id="9" name="TextBox 8"/>
           <p:cNvSpPr txBox="1"/>
           <p:nvPr/>
         </p:nvSpPr>
         <p:spPr>
           <a:xfrm>
-            <a:off x="6400800" y="3383280"/>
-            <a:ext cx="4846320" cy="1005840"/>
+            <a:off x="4480559" y="2560320"/>
+            <a:ext cx="3230575" cy="3108960"/>
           </a:xfrm>
           <a:prstGeom prst="rect">
             <a:avLst/>
@@ -6165,54 +7028,54 @@
           <a:p>
             <a:pPr>
               <a:spcAft>
-                <a:spcPts val="400"/>
+                <a:spcPts val="1200"/>
               </a:spcAft>
-              <a:defRPr sz="1500" b="1">
-                <a:solidFill>
-                  <a:srgbClr val="38BDF8"/>
-                </a:solidFill>
-                <a:latin typeface="Arial"/>
-              </a:defRPr>
-            </a:pPr>
-            <a:r>
-              <a:t>Multiempresa (Multi-Tenant)</a:t>
-            </a:r>
-          </a:p>
-          <a:p>
-            <a:pPr>
-              <a:defRPr sz="1200">
-                <a:solidFill>
-                  <a:srgbClr val="94A3B8"/>
-                </a:solidFill>
-                <a:latin typeface="Arial"/>
-              </a:defRPr>
-            </a:pPr>
-            <a:r>
-              <a:t>Ideal para redes de oficinas e controle de múltiplas filiais.</a:t>
-            </a:r>
-          </a:p>
-        </p:txBody>
-      </p:sp>
-      <p:sp>
-        <p:nvSpPr>
-          <p:cNvPr id="9" name="Rectangle 8"/>
+              <a:defRPr sz="1800" b="1">
+                <a:solidFill>
+                  <a:srgbClr val="FF7900"/>
+                </a:solidFill>
+                <a:latin typeface="Arial"/>
+              </a:defRPr>
+            </a:pPr>
+            <a:r>
+              <a:t>Inteligência Artificial</a:t>
+            </a:r>
+          </a:p>
+          <a:p>
+            <a:pPr>
+              <a:defRPr sz="1300">
+                <a:solidFill>
+                  <a:srgbClr val="A1A1AA"/>
+                </a:solidFill>
+                <a:latin typeface="Arial"/>
+              </a:defRPr>
+            </a:pPr>
+            <a:r>
+              <a:t>CMH-AI aplicada para faturamento rápido de serviços, laudos inteligentes e pós-venda automotivo de alta precisão.</a:t>
+            </a:r>
+          </a:p>
+        </p:txBody>
+      </p:sp>
+      <p:sp>
+        <p:nvSpPr>
+          <p:cNvPr id="10" name="Rectangle 9"/>
           <p:cNvSpPr/>
           <p:nvPr/>
         </p:nvSpPr>
         <p:spPr>
           <a:xfrm>
-            <a:off x="6217920" y="4754880"/>
-            <a:ext cx="5212080" cy="1188720"/>
+            <a:off x="8046720" y="2377440"/>
+            <a:ext cx="3413455" cy="3474720"/>
           </a:xfrm>
           <a:prstGeom prst="rect">
             <a:avLst/>
           </a:prstGeom>
           <a:solidFill>
-            <a:srgbClr val="101725"/>
+            <a:srgbClr val="121316"/>
           </a:solidFill>
           <a:ln w="12700">
             <a:solidFill>
-              <a:srgbClr val="1E293B"/>
+              <a:srgbClr val="2D2D32"/>
             </a:solidFill>
           </a:ln>
         </p:spPr>
@@ -6240,14 +7103,14 @@
       </p:sp>
       <p:sp>
         <p:nvSpPr>
-          <p:cNvPr id="10" name="TextBox 9"/>
+          <p:cNvPr id="11" name="TextBox 10"/>
           <p:cNvSpPr txBox="1"/>
           <p:nvPr/>
         </p:nvSpPr>
         <p:spPr>
           <a:xfrm>
-            <a:off x="6400800" y="4846320"/>
-            <a:ext cx="4846320" cy="1005840"/>
+            <a:off x="8138160" y="2560320"/>
+            <a:ext cx="3230575" cy="3108960"/>
           </a:xfrm>
           <a:prstGeom prst="rect">
             <a:avLst/>
@@ -6262,37 +7125,37 @@
           <a:p>
             <a:pPr>
               <a:spcAft>
-                <a:spcPts val="400"/>
+                <a:spcPts val="1200"/>
               </a:spcAft>
-              <a:defRPr sz="1500" b="1">
-                <a:solidFill>
-                  <a:srgbClr val="38BDF8"/>
-                </a:solidFill>
-                <a:latin typeface="Arial"/>
-              </a:defRPr>
-            </a:pPr>
-            <a:r>
-              <a:t>Inteligência Artificial</a:t>
-            </a:r>
-          </a:p>
-          <a:p>
-            <a:pPr>
-              <a:defRPr sz="1200">
-                <a:solidFill>
-                  <a:srgbClr val="94A3B8"/>
-                </a:solidFill>
-                <a:latin typeface="Arial"/>
-              </a:defRPr>
-            </a:pPr>
-            <a:r>
-              <a:t>Suzuki-AI aplicada à otimização e produtividade operacional.</a:t>
-            </a:r>
-          </a:p>
-        </p:txBody>
-      </p:sp>
-      <p:sp>
-        <p:nvSpPr>
-          <p:cNvPr id="11" name="TextBox 10"/>
+              <a:defRPr sz="1800" b="1">
+                <a:solidFill>
+                  <a:srgbClr val="FF7900"/>
+                </a:solidFill>
+                <a:latin typeface="Arial"/>
+              </a:defRPr>
+            </a:pPr>
+            <a:r>
+              <a:t>Gestão Unificada</a:t>
+            </a:r>
+          </a:p>
+          <a:p>
+            <a:pPr>
+              <a:defRPr sz="1300">
+                <a:solidFill>
+                  <a:srgbClr val="A1A1AA"/>
+                </a:solidFill>
+                <a:latin typeface="Arial"/>
+              </a:defRPr>
+            </a:pPr>
+            <a:r>
+              <a:t>Controle centralizado de ordens de serviço, estoque de peças, módulos financeiros e gestão preventiva de frotas.</a:t>
+            </a:r>
+          </a:p>
+        </p:txBody>
+      </p:sp>
+      <p:sp>
+        <p:nvSpPr>
+          <p:cNvPr id="12" name="TextBox 11"/>
           <p:cNvSpPr txBox="1"/>
           <p:nvPr/>
         </p:nvSpPr>
@@ -6315,13 +7178,13 @@
             <a:pPr>
               <a:defRPr sz="850">
                 <a:solidFill>
-                  <a:srgbClr val="94A3B8"/>
-                </a:solidFill>
-                <a:latin typeface="Arial"/>
-              </a:defRPr>
-            </a:pPr>
-            <a:r>
-              <a:t>SUZANO IT   |   Tecnologia para Oficinas e Frotas                                                                                   Slide 2 de 14</a:t>
+                  <a:srgbClr val="A1A1AA"/>
+                </a:solidFill>
+                <a:latin typeface="Arial"/>
+              </a:defRPr>
+            </a:pPr>
+            <a:r>
+              <a:t>SUZANO IT   |   Tecnologia que move frotas.                                                                                          Slide 2 de 15</a:t>
             </a:r>
           </a:p>
         </p:txBody>
@@ -6337,14 +7200,6 @@
 <file path=ppt/slides/slide3.xml><?xml version="1.0" encoding="utf-8"?>
 <p:sld xmlns:a="http://schemas.openxmlformats.org/drawingml/2006/main" xmlns:p="http://schemas.openxmlformats.org/presentationml/2006/main" xmlns:r="http://schemas.openxmlformats.org/officeDocument/2006/relationships">
   <p:cSld>
-    <p:bg>
-      <p:bgPr>
-        <a:solidFill>
-          <a:srgbClr val="080B11"/>
-        </a:solidFill>
-        <a:effectLst/>
-      </p:bgPr>
-    </p:bg>
     <p:spTree>
       <p:nvGrpSpPr>
         <p:cNvPr id="1" name=""/>
@@ -6352,9 +7207,33 @@
         <p:nvPr/>
       </p:nvGrpSpPr>
       <p:grpSpPr/>
-      <p:sp>
-        <p:nvSpPr>
-          <p:cNvPr id="2" name="TextBox 1"/>
+      <p:pic>
+        <p:nvPicPr>
+          <p:cNvPr id="2" name="Picture 1" descr="background.png"/>
+          <p:cNvPicPr>
+            <a:picLocks noChangeAspect="1"/>
+          </p:cNvPicPr>
+          <p:nvPr/>
+        </p:nvPicPr>
+        <p:blipFill>
+          <a:blip r:embed="rId2"/>
+          <a:stretch>
+            <a:fillRect/>
+          </a:stretch>
+        </p:blipFill>
+        <p:spPr>
+          <a:xfrm>
+            <a:off x="0" y="0"/>
+            <a:ext cx="12191695" cy="6858000"/>
+          </a:xfrm>
+          <a:prstGeom prst="rect">
+            <a:avLst/>
+          </a:prstGeom>
+        </p:spPr>
+      </p:pic>
+      <p:sp>
+        <p:nvSpPr>
+          <p:cNvPr id="3" name="TextBox 2"/>
           <p:cNvSpPr txBox="1"/>
           <p:nvPr/>
         </p:nvSpPr>
@@ -6377,20 +7256,20 @@
             <a:pPr>
               <a:defRPr sz="1000" b="1">
                 <a:solidFill>
-                  <a:srgbClr val="38BDF8"/>
-                </a:solidFill>
-                <a:latin typeface="Arial"/>
-              </a:defRPr>
-            </a:pPr>
-            <a:r>
-              <a:t>GARGALOS DO SETOR</a:t>
-            </a:r>
-          </a:p>
-        </p:txBody>
-      </p:sp>
-      <p:sp>
-        <p:nvSpPr>
-          <p:cNvPr id="3" name="TextBox 2"/>
+                  <a:srgbClr val="FF7900"/>
+                </a:solidFill>
+                <a:latin typeface="Arial"/>
+              </a:defRPr>
+            </a:pPr>
+            <a:r>
+              <a:t>APRESENTAÇÃO INSTITUCIONAL</a:t>
+            </a:r>
+          </a:p>
+        </p:txBody>
+      </p:sp>
+      <p:sp>
+        <p:nvSpPr>
+          <p:cNvPr id="4" name="TextBox 3"/>
           <p:cNvSpPr txBox="1"/>
           <p:nvPr/>
         </p:nvSpPr>
@@ -6413,27 +7292,27 @@
             <a:pPr>
               <a:defRPr sz="2800" b="1">
                 <a:solidFill>
-                  <a:srgbClr val="F8FAFC"/>
-                </a:solidFill>
-                <a:latin typeface="Arial"/>
-              </a:defRPr>
-            </a:pPr>
-            <a:r>
-              <a:t>Problemas do Mercado</a:t>
-            </a:r>
-          </a:p>
-        </p:txBody>
-      </p:sp>
-      <p:sp>
-        <p:nvSpPr>
-          <p:cNvPr id="4" name="TextBox 3"/>
+                  <a:srgbClr val="FFFFFF"/>
+                </a:solidFill>
+                <a:latin typeface="Arial"/>
+              </a:defRPr>
+            </a:pPr>
+            <a:r>
+              <a:t>Quem Somos</a:t>
+            </a:r>
+          </a:p>
+        </p:txBody>
+      </p:sp>
+      <p:sp>
+        <p:nvSpPr>
+          <p:cNvPr id="5" name="TextBox 4"/>
           <p:cNvSpPr txBox="1"/>
           <p:nvPr/>
         </p:nvSpPr>
         <p:spPr>
           <a:xfrm>
-            <a:off x="731520" y="1645920"/>
-            <a:ext cx="5303520" cy="4389120"/>
+            <a:off x="731520" y="1828800"/>
+            <a:ext cx="5029200" cy="4114800"/>
           </a:xfrm>
           <a:prstGeom prst="rect">
             <a:avLst/>
@@ -6450,135 +7329,44 @@
               <a:spcAft>
                 <a:spcPts val="1400"/>
               </a:spcAft>
-              <a:defRPr sz="1800" b="1">
-                <a:solidFill>
-                  <a:srgbClr val="F8FAFC"/>
-                </a:solidFill>
-                <a:latin typeface="Arial"/>
-              </a:defRPr>
-            </a:pPr>
-            <a:r>
-              <a:t>Desafios em oficinas e gestão de frotas:</a:t>
-            </a:r>
-          </a:p>
-          <a:p>
-            <a:pPr>
-              <a:spcAft>
-                <a:spcPts val="1000"/>
-              </a:spcAft>
-              <a:defRPr sz="1300">
-                <a:solidFill>
-                  <a:srgbClr val="94A3B8"/>
-                </a:solidFill>
-                <a:latin typeface="Arial"/>
-              </a:defRPr>
-            </a:pPr>
-            <a:r>
-              <a:t>❌  Controle manual de ordens de serviço e histórico lento.</a:t>
-            </a:r>
-          </a:p>
-          <a:p>
-            <a:pPr>
-              <a:spcAft>
-                <a:spcPts val="1000"/>
-              </a:spcAft>
-              <a:defRPr sz="1300">
-                <a:solidFill>
-                  <a:srgbClr val="94A3B8"/>
-                </a:solidFill>
-                <a:latin typeface="Arial"/>
-              </a:defRPr>
-            </a:pPr>
-            <a:r>
-              <a:t>❌  Falta de rastreabilidade na substituição e cotação de peças.</a:t>
-            </a:r>
-          </a:p>
-          <a:p>
-            <a:pPr>
-              <a:spcAft>
-                <a:spcPts val="1000"/>
-              </a:spcAft>
-              <a:defRPr sz="1300">
-                <a:solidFill>
-                  <a:srgbClr val="94A3B8"/>
-                </a:solidFill>
-                <a:latin typeface="Arial"/>
-              </a:defRPr>
-            </a:pPr>
-            <a:r>
-              <a:t>❌  Processos financeiros sem conciliação e com alta inadimplência.</a:t>
-            </a:r>
-          </a:p>
-          <a:p>
-            <a:pPr>
-              <a:spcAft>
-                <a:spcPts val="1000"/>
-              </a:spcAft>
-              <a:defRPr sz="1300">
-                <a:solidFill>
-                  <a:srgbClr val="94A3B8"/>
-                </a:solidFill>
-                <a:latin typeface="Arial"/>
-              </a:defRPr>
-            </a:pPr>
-            <a:r>
-              <a:t>❌  Falta de indicadores executivos de desempenho da operação.</a:t>
-            </a:r>
-          </a:p>
-          <a:p>
-            <a:pPr>
-              <a:spcAft>
-                <a:spcPts val="1000"/>
-              </a:spcAft>
-              <a:defRPr sz="1300">
-                <a:solidFill>
-                  <a:srgbClr val="94A3B8"/>
-                </a:solidFill>
-                <a:latin typeface="Arial"/>
-              </a:defRPr>
-            </a:pPr>
-            <a:r>
-              <a:t>❌  Desperdício de ativos em frotas por falta de preventiva.</a:t>
-            </a:r>
-          </a:p>
-          <a:p>
-            <a:pPr>
-              <a:spcAft>
-                <a:spcPts val="1000"/>
-              </a:spcAft>
-              <a:defRPr sz="1300">
-                <a:solidFill>
-                  <a:srgbClr val="94A3B8"/>
-                </a:solidFill>
-                <a:latin typeface="Arial"/>
-              </a:defRPr>
-            </a:pPr>
-            <a:r>
-              <a:t>❌  Sistemas antigos desconectados ou planilhas difíceis.</a:t>
-            </a:r>
-          </a:p>
-        </p:txBody>
-      </p:sp>
-      <p:sp>
-        <p:nvSpPr>
-          <p:cNvPr id="5" name="Rectangle 4"/>
+              <a:defRPr sz="1800">
+                <a:solidFill>
+                  <a:srgbClr val="A1A1AA"/>
+                </a:solidFill>
+                <a:latin typeface="Arial"/>
+              </a:defRPr>
+            </a:pPr>
+            <a:r>
+              <a:t>A Suzano IT é uma empresa de tecnologia especializada no desenvolvimento de ecossistemas digitais para o setor automotivo.</a:t>
+            </a:r>
+            <a:br/>
+            <a:br/>
+            <a:r>
+              <a:t>Nosso propósito é reinventar a forma como oficinas mecânicas, auto centers e gestores de frota operam no dia a dia, eliminando controles manuais e proporcionando inteligência e redução de custos reais através de automação na nuvem.</a:t>
+            </a:r>
+          </a:p>
+        </p:txBody>
+      </p:sp>
+      <p:sp>
+        <p:nvSpPr>
+          <p:cNvPr id="6" name="Rectangle 5"/>
           <p:cNvSpPr/>
           <p:nvPr/>
         </p:nvSpPr>
         <p:spPr>
           <a:xfrm>
-            <a:off x="6400800" y="1645920"/>
-            <a:ext cx="5029200" cy="4114800"/>
+            <a:off x="6217920" y="1828800"/>
+            <a:ext cx="5212080" cy="1188720"/>
           </a:xfrm>
           <a:prstGeom prst="rect">
             <a:avLst/>
           </a:prstGeom>
           <a:solidFill>
-            <a:srgbClr val="1C1216"/>
+            <a:srgbClr val="121316"/>
           </a:solidFill>
           <a:ln w="12700">
             <a:solidFill>
-              <a:srgbClr val="1E293B"/>
+              <a:srgbClr val="2D2D32"/>
             </a:solidFill>
           </a:ln>
         </p:spPr>
@@ -6606,14 +7394,14 @@
       </p:sp>
       <p:sp>
         <p:nvSpPr>
-          <p:cNvPr id="6" name="TextBox 5"/>
+          <p:cNvPr id="7" name="TextBox 6"/>
           <p:cNvSpPr txBox="1"/>
           <p:nvPr/>
         </p:nvSpPr>
         <p:spPr>
           <a:xfrm>
-            <a:off x="6675120" y="1920240"/>
-            <a:ext cx="4480560" cy="3566160"/>
+            <a:off x="6400800" y="1920240"/>
+            <a:ext cx="4846320" cy="1005840"/>
           </a:xfrm>
           <a:prstGeom prst="rect">
             <a:avLst/>
@@ -6628,53 +7416,231 @@
           <a:p>
             <a:pPr>
               <a:spcAft>
-                <a:spcPts val="1400"/>
+                <a:spcPts val="400"/>
               </a:spcAft>
-              <a:defRPr sz="1400" b="1">
-                <a:solidFill>
-                  <a:srgbClr val="F87171"/>
-                </a:solidFill>
-                <a:latin typeface="Arial"/>
-              </a:defRPr>
-            </a:pPr>
-            <a:r>
-              <a:t>IMPACTOS FINANCEIROS DIRETOS</a:t>
-            </a:r>
-          </a:p>
+              <a:defRPr sz="1500" b="1">
+                <a:solidFill>
+                  <a:srgbClr val="FF7900"/>
+                </a:solidFill>
+                <a:latin typeface="Arial"/>
+              </a:defRPr>
+            </a:pPr>
+            <a:r>
+              <a:t>Arquitetura 100% em Nuvem</a:t>
+            </a:r>
+          </a:p>
+          <a:p>
+            <a:pPr>
+              <a:defRPr sz="1200">
+                <a:solidFill>
+                  <a:srgbClr val="A1A1AA"/>
+                </a:solidFill>
+                <a:latin typeface="Arial"/>
+              </a:defRPr>
+            </a:pPr>
+            <a:r>
+              <a:t>Acessível de qualquer lugar, dispensando servidores locais.</a:t>
+            </a:r>
+          </a:p>
+        </p:txBody>
+      </p:sp>
+      <p:sp>
+        <p:nvSpPr>
+          <p:cNvPr id="8" name="Rectangle 7"/>
+          <p:cNvSpPr/>
+          <p:nvPr/>
+        </p:nvSpPr>
+        <p:spPr>
+          <a:xfrm>
+            <a:off x="6217920" y="3291840"/>
+            <a:ext cx="5212080" cy="1188720"/>
+          </a:xfrm>
+          <a:prstGeom prst="rect">
+            <a:avLst/>
+          </a:prstGeom>
+          <a:solidFill>
+            <a:srgbClr val="121316"/>
+          </a:solidFill>
+          <a:ln w="12700">
+            <a:solidFill>
+              <a:srgbClr val="2D2D32"/>
+            </a:solidFill>
+          </a:ln>
+        </p:spPr>
+        <p:style>
+          <a:lnRef idx="1">
+            <a:schemeClr val="accent1"/>
+          </a:lnRef>
+          <a:fillRef idx="3">
+            <a:schemeClr val="accent1"/>
+          </a:fillRef>
+          <a:effectRef idx="2">
+            <a:schemeClr val="accent1"/>
+          </a:effectRef>
+          <a:fontRef idx="minor">
+            <a:schemeClr val="lt1"/>
+          </a:fontRef>
+        </p:style>
+        <p:txBody>
+          <a:bodyPr rtlCol="0" anchor="ctr"/>
+          <a:lstStyle/>
+          <a:p>
+            <a:pPr algn="ctr"/>
+          </a:p>
+        </p:txBody>
+      </p:sp>
+      <p:sp>
+        <p:nvSpPr>
+          <p:cNvPr id="9" name="TextBox 8"/>
+          <p:cNvSpPr txBox="1"/>
+          <p:nvPr/>
+        </p:nvSpPr>
+        <p:spPr>
+          <a:xfrm>
+            <a:off x="6400800" y="3383280"/>
+            <a:ext cx="4846320" cy="1005840"/>
+          </a:xfrm>
+          <a:prstGeom prst="rect">
+            <a:avLst/>
+          </a:prstGeom>
+          <a:noFill/>
+        </p:spPr>
+        <p:txBody>
+          <a:bodyPr wrap="square">
+            <a:spAutoFit/>
+          </a:bodyPr>
+          <a:lstStyle/>
           <a:p>
             <a:pPr>
               <a:spcAft>
-                <a:spcPts val="1400"/>
+                <a:spcPts val="400"/>
               </a:spcAft>
-              <a:defRPr sz="1500">
-                <a:solidFill>
-                  <a:srgbClr val="94A3B8"/>
-                </a:solidFill>
-                <a:latin typeface="Arial"/>
-              </a:defRPr>
-            </a:pPr>
-            <a:r>
-              <a:t>A ineficiência operacional do controle manual gera desperdícios graves:</a:t>
-            </a:r>
-            <a:br/>
-            <a:br/>
-            <a:r>
-              <a:t>•  Perda financeira de até 15% por vazamento de caixa e faturamento incorreto.</a:t>
-            </a:r>
-            <a:br/>
-            <a:r>
-              <a:t>•  Redução drástica de produtividade dos mecânicos e frotas paradas por quebra corretiva.</a:t>
-            </a:r>
-            <a:br/>
-            <a:r>
-              <a:t>•  Dificuldade gerencial por falta de dados para tomadas de decisão rápidas.</a:t>
-            </a:r>
-          </a:p>
-        </p:txBody>
-      </p:sp>
-      <p:sp>
-        <p:nvSpPr>
-          <p:cNvPr id="7" name="TextBox 6"/>
+              <a:defRPr sz="1500" b="1">
+                <a:solidFill>
+                  <a:srgbClr val="FF7900"/>
+                </a:solidFill>
+                <a:latin typeface="Arial"/>
+              </a:defRPr>
+            </a:pPr>
+            <a:r>
+              <a:t>Multiempresa (Multi-Tenant)</a:t>
+            </a:r>
+          </a:p>
+          <a:p>
+            <a:pPr>
+              <a:defRPr sz="1200">
+                <a:solidFill>
+                  <a:srgbClr val="A1A1AA"/>
+                </a:solidFill>
+                <a:latin typeface="Arial"/>
+              </a:defRPr>
+            </a:pPr>
+            <a:r>
+              <a:t>Ideal para redes de oficinas e controle de múltiplas filiais.</a:t>
+            </a:r>
+          </a:p>
+        </p:txBody>
+      </p:sp>
+      <p:sp>
+        <p:nvSpPr>
+          <p:cNvPr id="10" name="Rectangle 9"/>
+          <p:cNvSpPr/>
+          <p:nvPr/>
+        </p:nvSpPr>
+        <p:spPr>
+          <a:xfrm>
+            <a:off x="6217920" y="4754880"/>
+            <a:ext cx="5212080" cy="1188720"/>
+          </a:xfrm>
+          <a:prstGeom prst="rect">
+            <a:avLst/>
+          </a:prstGeom>
+          <a:solidFill>
+            <a:srgbClr val="121316"/>
+          </a:solidFill>
+          <a:ln w="12700">
+            <a:solidFill>
+              <a:srgbClr val="2D2D32"/>
+            </a:solidFill>
+          </a:ln>
+        </p:spPr>
+        <p:style>
+          <a:lnRef idx="1">
+            <a:schemeClr val="accent1"/>
+          </a:lnRef>
+          <a:fillRef idx="3">
+            <a:schemeClr val="accent1"/>
+          </a:fillRef>
+          <a:effectRef idx="2">
+            <a:schemeClr val="accent1"/>
+          </a:effectRef>
+          <a:fontRef idx="minor">
+            <a:schemeClr val="lt1"/>
+          </a:fontRef>
+        </p:style>
+        <p:txBody>
+          <a:bodyPr rtlCol="0" anchor="ctr"/>
+          <a:lstStyle/>
+          <a:p>
+            <a:pPr algn="ctr"/>
+          </a:p>
+        </p:txBody>
+      </p:sp>
+      <p:sp>
+        <p:nvSpPr>
+          <p:cNvPr id="11" name="TextBox 10"/>
+          <p:cNvSpPr txBox="1"/>
+          <p:nvPr/>
+        </p:nvSpPr>
+        <p:spPr>
+          <a:xfrm>
+            <a:off x="6400800" y="4846320"/>
+            <a:ext cx="4846320" cy="1005840"/>
+          </a:xfrm>
+          <a:prstGeom prst="rect">
+            <a:avLst/>
+          </a:prstGeom>
+          <a:noFill/>
+        </p:spPr>
+        <p:txBody>
+          <a:bodyPr wrap="square">
+            <a:spAutoFit/>
+          </a:bodyPr>
+          <a:lstStyle/>
+          <a:p>
+            <a:pPr>
+              <a:spcAft>
+                <a:spcPts val="400"/>
+              </a:spcAft>
+              <a:defRPr sz="1500" b="1">
+                <a:solidFill>
+                  <a:srgbClr val="FF7900"/>
+                </a:solidFill>
+                <a:latin typeface="Arial"/>
+              </a:defRPr>
+            </a:pPr>
+            <a:r>
+              <a:t>Inteligência Artificial</a:t>
+            </a:r>
+          </a:p>
+          <a:p>
+            <a:pPr>
+              <a:defRPr sz="1200">
+                <a:solidFill>
+                  <a:srgbClr val="A1A1AA"/>
+                </a:solidFill>
+                <a:latin typeface="Arial"/>
+              </a:defRPr>
+            </a:pPr>
+            <a:r>
+              <a:t>CMH-AI aplicada à otimização e produtividade operacional.</a:t>
+            </a:r>
+          </a:p>
+        </p:txBody>
+      </p:sp>
+      <p:sp>
+        <p:nvSpPr>
+          <p:cNvPr id="12" name="TextBox 11"/>
           <p:cNvSpPr txBox="1"/>
           <p:nvPr/>
         </p:nvSpPr>
@@ -6697,13 +7663,13 @@
             <a:pPr>
               <a:defRPr sz="850">
                 <a:solidFill>
-                  <a:srgbClr val="94A3B8"/>
-                </a:solidFill>
-                <a:latin typeface="Arial"/>
-              </a:defRPr>
-            </a:pPr>
-            <a:r>
-              <a:t>SUZANO IT   |   Tecnologia para Oficinas e Frotas                                                                                   Slide 3 de 14</a:t>
+                  <a:srgbClr val="A1A1AA"/>
+                </a:solidFill>
+                <a:latin typeface="Arial"/>
+              </a:defRPr>
+            </a:pPr>
+            <a:r>
+              <a:t>SUZANO IT   |   Tecnologia que move frotas.                                                                                          Slide 3 de 15</a:t>
             </a:r>
           </a:p>
         </p:txBody>
@@ -6719,14 +7685,6 @@
 <file path=ppt/slides/slide4.xml><?xml version="1.0" encoding="utf-8"?>
 <p:sld xmlns:a="http://schemas.openxmlformats.org/drawingml/2006/main" xmlns:p="http://schemas.openxmlformats.org/presentationml/2006/main" xmlns:r="http://schemas.openxmlformats.org/officeDocument/2006/relationships">
   <p:cSld>
-    <p:bg>
-      <p:bgPr>
-        <a:solidFill>
-          <a:srgbClr val="080B11"/>
-        </a:solidFill>
-        <a:effectLst/>
-      </p:bgPr>
-    </p:bg>
     <p:spTree>
       <p:nvGrpSpPr>
         <p:cNvPr id="1" name=""/>
@@ -6734,9 +7692,33 @@
         <p:nvPr/>
       </p:nvGrpSpPr>
       <p:grpSpPr/>
-      <p:sp>
-        <p:nvSpPr>
-          <p:cNvPr id="2" name="TextBox 1"/>
+      <p:pic>
+        <p:nvPicPr>
+          <p:cNvPr id="2" name="Picture 1" descr="background.png"/>
+          <p:cNvPicPr>
+            <a:picLocks noChangeAspect="1"/>
+          </p:cNvPicPr>
+          <p:nvPr/>
+        </p:nvPicPr>
+        <p:blipFill>
+          <a:blip r:embed="rId2"/>
+          <a:stretch>
+            <a:fillRect/>
+          </a:stretch>
+        </p:blipFill>
+        <p:spPr>
+          <a:xfrm>
+            <a:off x="0" y="0"/>
+            <a:ext cx="12191695" cy="6858000"/>
+          </a:xfrm>
+          <a:prstGeom prst="rect">
+            <a:avLst/>
+          </a:prstGeom>
+        </p:spPr>
+      </p:pic>
+      <p:sp>
+        <p:nvSpPr>
+          <p:cNvPr id="3" name="TextBox 2"/>
           <p:cNvSpPr txBox="1"/>
           <p:nvPr/>
         </p:nvSpPr>
@@ -6759,20 +7741,20 @@
             <a:pPr>
               <a:defRPr sz="1000" b="1">
                 <a:solidFill>
-                  <a:srgbClr val="38BDF8"/>
-                </a:solidFill>
-                <a:latin typeface="Arial"/>
-              </a:defRPr>
-            </a:pPr>
-            <a:r>
-              <a:t>ECOSSISTEMA SUZANO IT</a:t>
-            </a:r>
-          </a:p>
-        </p:txBody>
-      </p:sp>
-      <p:sp>
-        <p:nvSpPr>
-          <p:cNvPr id="3" name="TextBox 2"/>
+                  <a:srgbClr val="FF7900"/>
+                </a:solidFill>
+                <a:latin typeface="Arial"/>
+              </a:defRPr>
+            </a:pPr>
+            <a:r>
+              <a:t>GARGALOS DO SETOR</a:t>
+            </a:r>
+          </a:p>
+        </p:txBody>
+      </p:sp>
+      <p:sp>
+        <p:nvSpPr>
+          <p:cNvPr id="4" name="TextBox 3"/>
           <p:cNvSpPr txBox="1"/>
           <p:nvPr/>
         </p:nvSpPr>
@@ -6795,27 +7777,27 @@
             <a:pPr>
               <a:defRPr sz="2800" b="1">
                 <a:solidFill>
-                  <a:srgbClr val="F8FAFC"/>
-                </a:solidFill>
-                <a:latin typeface="Arial"/>
-              </a:defRPr>
-            </a:pPr>
-            <a:r>
-              <a:t>Nossa Solução</a:t>
-            </a:r>
-          </a:p>
-        </p:txBody>
-      </p:sp>
-      <p:sp>
-        <p:nvSpPr>
-          <p:cNvPr id="4" name="TextBox 3"/>
+                  <a:srgbClr val="FFFFFF"/>
+                </a:solidFill>
+                <a:latin typeface="Arial"/>
+              </a:defRPr>
+            </a:pPr>
+            <a:r>
+              <a:t>Problemas do Mercado</a:t>
+            </a:r>
+          </a:p>
+        </p:txBody>
+      </p:sp>
+      <p:sp>
+        <p:nvSpPr>
+          <p:cNvPr id="5" name="TextBox 4"/>
           <p:cNvSpPr txBox="1"/>
           <p:nvPr/>
         </p:nvSpPr>
         <p:spPr>
           <a:xfrm>
-            <a:off x="731520" y="1554480"/>
-            <a:ext cx="10698480" cy="731520"/>
+            <a:off x="731520" y="1645920"/>
+            <a:ext cx="5303520" cy="4389120"/>
           </a:xfrm>
           <a:prstGeom prst="rect">
             <a:avLst/>
@@ -6823,45 +7805,144 @@
           <a:noFill/>
         </p:spPr>
         <p:txBody>
-          <a:bodyPr wrap="none">
+          <a:bodyPr wrap="square">
             <a:spAutoFit/>
           </a:bodyPr>
           <a:lstStyle/>
           <a:p>
             <a:pPr>
-              <a:defRPr sz="1800">
-                <a:solidFill>
-                  <a:srgbClr val="94A3B8"/>
-                </a:solidFill>
-                <a:latin typeface="Arial"/>
-              </a:defRPr>
-            </a:pPr>
-            <a:r>
-              <a:t>Centralizamos toda a gestão operacional, de frotas e financeira em um único ecossistema em nuvem.</a:t>
-            </a:r>
-          </a:p>
-        </p:txBody>
-      </p:sp>
-      <p:sp>
-        <p:nvSpPr>
-          <p:cNvPr id="5" name="Rectangle 4"/>
+              <a:spcAft>
+                <a:spcPts val="1400"/>
+              </a:spcAft>
+              <a:defRPr sz="1800" b="1">
+                <a:solidFill>
+                  <a:srgbClr val="FFFFFF"/>
+                </a:solidFill>
+                <a:latin typeface="Arial"/>
+              </a:defRPr>
+            </a:pPr>
+            <a:r>
+              <a:t>Desafios em oficinas e gestão de frotas:</a:t>
+            </a:r>
+          </a:p>
+          <a:p>
+            <a:pPr>
+              <a:spcAft>
+                <a:spcPts val="1000"/>
+              </a:spcAft>
+              <a:defRPr sz="1300">
+                <a:solidFill>
+                  <a:srgbClr val="A1A1AA"/>
+                </a:solidFill>
+                <a:latin typeface="Arial"/>
+              </a:defRPr>
+            </a:pPr>
+            <a:r>
+              <a:t>❌  Controle manual de ordens de serviço e histórico lento.</a:t>
+            </a:r>
+          </a:p>
+          <a:p>
+            <a:pPr>
+              <a:spcAft>
+                <a:spcPts val="1000"/>
+              </a:spcAft>
+              <a:defRPr sz="1300">
+                <a:solidFill>
+                  <a:srgbClr val="A1A1AA"/>
+                </a:solidFill>
+                <a:latin typeface="Arial"/>
+              </a:defRPr>
+            </a:pPr>
+            <a:r>
+              <a:t>❌  Falta de rastreabilidade na substituição e cotação de peças.</a:t>
+            </a:r>
+          </a:p>
+          <a:p>
+            <a:pPr>
+              <a:spcAft>
+                <a:spcPts val="1000"/>
+              </a:spcAft>
+              <a:defRPr sz="1300">
+                <a:solidFill>
+                  <a:srgbClr val="A1A1AA"/>
+                </a:solidFill>
+                <a:latin typeface="Arial"/>
+              </a:defRPr>
+            </a:pPr>
+            <a:r>
+              <a:t>❌  Processos financeiros sem conciliação e com alta inadimplência.</a:t>
+            </a:r>
+          </a:p>
+          <a:p>
+            <a:pPr>
+              <a:spcAft>
+                <a:spcPts val="1000"/>
+              </a:spcAft>
+              <a:defRPr sz="1300">
+                <a:solidFill>
+                  <a:srgbClr val="A1A1AA"/>
+                </a:solidFill>
+                <a:latin typeface="Arial"/>
+              </a:defRPr>
+            </a:pPr>
+            <a:r>
+              <a:t>❌  Falta de indicadores executivos de desempenho da operação.</a:t>
+            </a:r>
+          </a:p>
+          <a:p>
+            <a:pPr>
+              <a:spcAft>
+                <a:spcPts val="1000"/>
+              </a:spcAft>
+              <a:defRPr sz="1300">
+                <a:solidFill>
+                  <a:srgbClr val="A1A1AA"/>
+                </a:solidFill>
+                <a:latin typeface="Arial"/>
+              </a:defRPr>
+            </a:pPr>
+            <a:r>
+              <a:t>❌  Desperdício de ativos em frotas por falta de preventiva.</a:t>
+            </a:r>
+          </a:p>
+          <a:p>
+            <a:pPr>
+              <a:spcAft>
+                <a:spcPts val="1000"/>
+              </a:spcAft>
+              <a:defRPr sz="1300">
+                <a:solidFill>
+                  <a:srgbClr val="A1A1AA"/>
+                </a:solidFill>
+                <a:latin typeface="Arial"/>
+              </a:defRPr>
+            </a:pPr>
+            <a:r>
+              <a:t>❌  Sistemas antigos desconectados ou planilhas difíceis.</a:t>
+            </a:r>
+          </a:p>
+        </p:txBody>
+      </p:sp>
+      <p:sp>
+        <p:nvSpPr>
+          <p:cNvPr id="6" name="Rectangle 5"/>
           <p:cNvSpPr/>
           <p:nvPr/>
         </p:nvSpPr>
         <p:spPr>
           <a:xfrm>
-            <a:off x="731520" y="2377440"/>
-            <a:ext cx="2499055" cy="3474720"/>
+            <a:off x="6400800" y="1645920"/>
+            <a:ext cx="5029200" cy="4114800"/>
           </a:xfrm>
           <a:prstGeom prst="rect">
             <a:avLst/>
           </a:prstGeom>
           <a:solidFill>
-            <a:srgbClr val="101725"/>
+            <a:srgbClr val="1C1216"/>
           </a:solidFill>
           <a:ln w="12700">
             <a:solidFill>
-              <a:srgbClr val="1E293B"/>
+              <a:srgbClr val="2D2D32"/>
             </a:solidFill>
           </a:ln>
         </p:spPr>
@@ -6889,14 +7970,14 @@
       </p:sp>
       <p:sp>
         <p:nvSpPr>
-          <p:cNvPr id="6" name="TextBox 5"/>
+          <p:cNvPr id="7" name="TextBox 6"/>
           <p:cNvSpPr txBox="1"/>
           <p:nvPr/>
         </p:nvSpPr>
         <p:spPr>
           <a:xfrm>
-            <a:off x="822960" y="2560320"/>
-            <a:ext cx="2316175" cy="3108960"/>
+            <a:off x="6675120" y="1920240"/>
+            <a:ext cx="4480560" cy="3566160"/>
           </a:xfrm>
           <a:prstGeom prst="rect">
             <a:avLst/>
@@ -6911,328 +7992,53 @@
           <a:p>
             <a:pPr>
               <a:spcAft>
-                <a:spcPts val="1200"/>
+                <a:spcPts val="1400"/>
               </a:spcAft>
-              <a:defRPr sz="1800" b="1">
-                <a:solidFill>
-                  <a:srgbClr val="38BDF8"/>
-                </a:solidFill>
-                <a:latin typeface="Arial"/>
-              </a:defRPr>
-            </a:pPr>
-            <a:r>
-              <a:t>Gestão de Oficina</a:t>
-            </a:r>
-          </a:p>
-          <a:p>
-            <a:pPr>
-              <a:defRPr sz="1300">
-                <a:solidFill>
-                  <a:srgbClr val="94A3B8"/>
-                </a:solidFill>
-                <a:latin typeface="Arial"/>
-              </a:defRPr>
-            </a:pPr>
-            <a:r>
-              <a:t>Ordens de serviço digitais, controle completo de peças, cadastros de clientes e histórico por placa.</a:t>
-            </a:r>
-          </a:p>
-        </p:txBody>
-      </p:sp>
-      <p:sp>
-        <p:nvSpPr>
-          <p:cNvPr id="7" name="Rectangle 6"/>
-          <p:cNvSpPr/>
-          <p:nvPr/>
-        </p:nvSpPr>
-        <p:spPr>
-          <a:xfrm>
-            <a:off x="3474720" y="2377440"/>
-            <a:ext cx="2499055" cy="3474720"/>
-          </a:xfrm>
-          <a:prstGeom prst="rect">
-            <a:avLst/>
-          </a:prstGeom>
-          <a:solidFill>
-            <a:srgbClr val="101725"/>
-          </a:solidFill>
-          <a:ln w="12700">
-            <a:solidFill>
-              <a:srgbClr val="1E293B"/>
-            </a:solidFill>
-          </a:ln>
-        </p:spPr>
-        <p:style>
-          <a:lnRef idx="1">
-            <a:schemeClr val="accent1"/>
-          </a:lnRef>
-          <a:fillRef idx="3">
-            <a:schemeClr val="accent1"/>
-          </a:fillRef>
-          <a:effectRef idx="2">
-            <a:schemeClr val="accent1"/>
-          </a:effectRef>
-          <a:fontRef idx="minor">
-            <a:schemeClr val="lt1"/>
-          </a:fontRef>
-        </p:style>
-        <p:txBody>
-          <a:bodyPr rtlCol="0" anchor="ctr"/>
-          <a:lstStyle/>
-          <a:p>
-            <a:pPr algn="ctr"/>
+              <a:defRPr sz="1400" b="1">
+                <a:solidFill>
+                  <a:srgbClr val="EF4444"/>
+                </a:solidFill>
+                <a:latin typeface="Arial"/>
+              </a:defRPr>
+            </a:pPr>
+            <a:r>
+              <a:t>IMPACTOS FINANCEIROS DIRETOS</a:t>
+            </a:r>
+          </a:p>
+          <a:p>
+            <a:pPr>
+              <a:spcAft>
+                <a:spcPts val="1400"/>
+              </a:spcAft>
+              <a:defRPr sz="1500">
+                <a:solidFill>
+                  <a:srgbClr val="A1A1AA"/>
+                </a:solidFill>
+                <a:latin typeface="Arial"/>
+              </a:defRPr>
+            </a:pPr>
+            <a:r>
+              <a:t>A ineficiência operacional do controle manual gera desperdícios graves:</a:t>
+            </a:r>
+            <a:br/>
+            <a:br/>
+            <a:r>
+              <a:t>•  Perda financeira de até 15% por vazamento de caixa e faturamento incorreto.</a:t>
+            </a:r>
+            <a:br/>
+            <a:r>
+              <a:t>•  Redução drástica de produtividade dos mecânicos e frotas paradas por quebra corretiva.</a:t>
+            </a:r>
+            <a:br/>
+            <a:r>
+              <a:t>•  Dificuldade gerencial por falta de dados para tomadas de decisão rápidas.</a:t>
+            </a:r>
           </a:p>
         </p:txBody>
       </p:sp>
       <p:sp>
         <p:nvSpPr>
           <p:cNvPr id="8" name="TextBox 7"/>
-          <p:cNvSpPr txBox="1"/>
-          <p:nvPr/>
-        </p:nvSpPr>
-        <p:spPr>
-          <a:xfrm>
-            <a:off x="3566160" y="2560320"/>
-            <a:ext cx="2316175" cy="3108960"/>
-          </a:xfrm>
-          <a:prstGeom prst="rect">
-            <a:avLst/>
-          </a:prstGeom>
-          <a:noFill/>
-        </p:spPr>
-        <p:txBody>
-          <a:bodyPr wrap="square">
-            <a:spAutoFit/>
-          </a:bodyPr>
-          <a:lstStyle/>
-          <a:p>
-            <a:pPr>
-              <a:spcAft>
-                <a:spcPts val="1200"/>
-              </a:spcAft>
-              <a:defRPr sz="1800" b="1">
-                <a:solidFill>
-                  <a:srgbClr val="38BDF8"/>
-                </a:solidFill>
-                <a:latin typeface="Arial"/>
-              </a:defRPr>
-            </a:pPr>
-            <a:r>
-              <a:t>Gestão de Frotas</a:t>
-            </a:r>
-          </a:p>
-          <a:p>
-            <a:pPr>
-              <a:defRPr sz="1300">
-                <a:solidFill>
-                  <a:srgbClr val="94A3B8"/>
-                </a:solidFill>
-                <a:latin typeface="Arial"/>
-              </a:defRPr>
-            </a:pPr>
-            <a:r>
-              <a:t>Controle inteligente de pneus, consumo de combustível, motoristas e planos de manutenção preventiva.</a:t>
-            </a:r>
-          </a:p>
-        </p:txBody>
-      </p:sp>
-      <p:sp>
-        <p:nvSpPr>
-          <p:cNvPr id="9" name="Rectangle 8"/>
-          <p:cNvSpPr/>
-          <p:nvPr/>
-        </p:nvSpPr>
-        <p:spPr>
-          <a:xfrm>
-            <a:off x="6217920" y="2377440"/>
-            <a:ext cx="2499055" cy="3474720"/>
-          </a:xfrm>
-          <a:prstGeom prst="rect">
-            <a:avLst/>
-          </a:prstGeom>
-          <a:solidFill>
-            <a:srgbClr val="101725"/>
-          </a:solidFill>
-          <a:ln w="12700">
-            <a:solidFill>
-              <a:srgbClr val="1E293B"/>
-            </a:solidFill>
-          </a:ln>
-        </p:spPr>
-        <p:style>
-          <a:lnRef idx="1">
-            <a:schemeClr val="accent1"/>
-          </a:lnRef>
-          <a:fillRef idx="3">
-            <a:schemeClr val="accent1"/>
-          </a:fillRef>
-          <a:effectRef idx="2">
-            <a:schemeClr val="accent1"/>
-          </a:effectRef>
-          <a:fontRef idx="minor">
-            <a:schemeClr val="lt1"/>
-          </a:fontRef>
-        </p:style>
-        <p:txBody>
-          <a:bodyPr rtlCol="0" anchor="ctr"/>
-          <a:lstStyle/>
-          <a:p>
-            <a:pPr algn="ctr"/>
-          </a:p>
-        </p:txBody>
-      </p:sp>
-      <p:sp>
-        <p:nvSpPr>
-          <p:cNvPr id="10" name="TextBox 9"/>
-          <p:cNvSpPr txBox="1"/>
-          <p:nvPr/>
-        </p:nvSpPr>
-        <p:spPr>
-          <a:xfrm>
-            <a:off x="6309359" y="2560320"/>
-            <a:ext cx="2316175" cy="3108960"/>
-          </a:xfrm>
-          <a:prstGeom prst="rect">
-            <a:avLst/>
-          </a:prstGeom>
-          <a:noFill/>
-        </p:spPr>
-        <p:txBody>
-          <a:bodyPr wrap="square">
-            <a:spAutoFit/>
-          </a:bodyPr>
-          <a:lstStyle/>
-          <a:p>
-            <a:pPr>
-              <a:spcAft>
-                <a:spcPts val="1200"/>
-              </a:spcAft>
-              <a:defRPr sz="1800" b="1">
-                <a:solidFill>
-                  <a:srgbClr val="38BDF8"/>
-                </a:solidFill>
-                <a:latin typeface="Arial"/>
-              </a:defRPr>
-            </a:pPr>
-            <a:r>
-              <a:t>Controle Financeiro</a:t>
-            </a:r>
-          </a:p>
-          <a:p>
-            <a:pPr>
-              <a:defRPr sz="1300">
-                <a:solidFill>
-                  <a:srgbClr val="94A3B8"/>
-                </a:solidFill>
-                <a:latin typeface="Arial"/>
-              </a:defRPr>
-            </a:pPr>
-            <a:r>
-              <a:t>Contas a pagar/receber integradas à operação, DRE estruturado e acompanhamento de fluxo de caixa.</a:t>
-            </a:r>
-          </a:p>
-        </p:txBody>
-      </p:sp>
-      <p:sp>
-        <p:nvSpPr>
-          <p:cNvPr id="11" name="Rectangle 10"/>
-          <p:cNvSpPr/>
-          <p:nvPr/>
-        </p:nvSpPr>
-        <p:spPr>
-          <a:xfrm>
-            <a:off x="8961120" y="2377440"/>
-            <a:ext cx="2499055" cy="3474720"/>
-          </a:xfrm>
-          <a:prstGeom prst="rect">
-            <a:avLst/>
-          </a:prstGeom>
-          <a:solidFill>
-            <a:srgbClr val="101725"/>
-          </a:solidFill>
-          <a:ln w="12700">
-            <a:solidFill>
-              <a:srgbClr val="1E293B"/>
-            </a:solidFill>
-          </a:ln>
-        </p:spPr>
-        <p:style>
-          <a:lnRef idx="1">
-            <a:schemeClr val="accent1"/>
-          </a:lnRef>
-          <a:fillRef idx="3">
-            <a:schemeClr val="accent1"/>
-          </a:fillRef>
-          <a:effectRef idx="2">
-            <a:schemeClr val="accent1"/>
-          </a:effectRef>
-          <a:fontRef idx="minor">
-            <a:schemeClr val="lt1"/>
-          </a:fontRef>
-        </p:style>
-        <p:txBody>
-          <a:bodyPr rtlCol="0" anchor="ctr"/>
-          <a:lstStyle/>
-          <a:p>
-            <a:pPr algn="ctr"/>
-          </a:p>
-        </p:txBody>
-      </p:sp>
-      <p:sp>
-        <p:nvSpPr>
-          <p:cNvPr id="12" name="TextBox 11"/>
-          <p:cNvSpPr txBox="1"/>
-          <p:nvPr/>
-        </p:nvSpPr>
-        <p:spPr>
-          <a:xfrm>
-            <a:off x="9052560" y="2560320"/>
-            <a:ext cx="2316175" cy="3108960"/>
-          </a:xfrm>
-          <a:prstGeom prst="rect">
-            <a:avLst/>
-          </a:prstGeom>
-          <a:noFill/>
-        </p:spPr>
-        <p:txBody>
-          <a:bodyPr wrap="square">
-            <a:spAutoFit/>
-          </a:bodyPr>
-          <a:lstStyle/>
-          <a:p>
-            <a:pPr>
-              <a:spcAft>
-                <a:spcPts val="1200"/>
-              </a:spcAft>
-              <a:defRPr sz="1800" b="1">
-                <a:solidFill>
-                  <a:srgbClr val="38BDF8"/>
-                </a:solidFill>
-                <a:latin typeface="Arial"/>
-              </a:defRPr>
-            </a:pPr>
-            <a:r>
-              <a:t>Inteligência Artificial</a:t>
-            </a:r>
-          </a:p>
-          <a:p>
-            <a:pPr>
-              <a:defRPr sz="1300">
-                <a:solidFill>
-                  <a:srgbClr val="94A3B8"/>
-                </a:solidFill>
-                <a:latin typeface="Arial"/>
-              </a:defRPr>
-            </a:pPr>
-            <a:r>
-              <a:t>Modelagem preditiva Suzuki-AI para geração automática de NF-e e diagnósticos de desgaste.</a:t>
-            </a:r>
-          </a:p>
-        </p:txBody>
-      </p:sp>
-      <p:sp>
-        <p:nvSpPr>
-          <p:cNvPr id="13" name="TextBox 12"/>
           <p:cNvSpPr txBox="1"/>
           <p:nvPr/>
         </p:nvSpPr>
@@ -7255,13 +8061,13 @@
             <a:pPr>
               <a:defRPr sz="850">
                 <a:solidFill>
-                  <a:srgbClr val="94A3B8"/>
-                </a:solidFill>
-                <a:latin typeface="Arial"/>
-              </a:defRPr>
-            </a:pPr>
-            <a:r>
-              <a:t>SUZANO IT   |   Tecnologia para Oficinas e Frotas                                                                                   Slide 4 de 14</a:t>
+                  <a:srgbClr val="A1A1AA"/>
+                </a:solidFill>
+                <a:latin typeface="Arial"/>
+              </a:defRPr>
+            </a:pPr>
+            <a:r>
+              <a:t>SUZANO IT   |   Tecnologia que move frotas.                                                                                          Slide 4 de 15</a:t>
             </a:r>
           </a:p>
         </p:txBody>
@@ -7277,14 +8083,6 @@
 <file path=ppt/slides/slide5.xml><?xml version="1.0" encoding="utf-8"?>
 <p:sld xmlns:a="http://schemas.openxmlformats.org/drawingml/2006/main" xmlns:p="http://schemas.openxmlformats.org/presentationml/2006/main" xmlns:r="http://schemas.openxmlformats.org/officeDocument/2006/relationships">
   <p:cSld>
-    <p:bg>
-      <p:bgPr>
-        <a:solidFill>
-          <a:srgbClr val="080B11"/>
-        </a:solidFill>
-        <a:effectLst/>
-      </p:bgPr>
-    </p:bg>
     <p:spTree>
       <p:nvGrpSpPr>
         <p:cNvPr id="1" name=""/>
@@ -7292,9 +8090,33 @@
         <p:nvPr/>
       </p:nvGrpSpPr>
       <p:grpSpPr/>
-      <p:sp>
-        <p:nvSpPr>
-          <p:cNvPr id="2" name="TextBox 1"/>
+      <p:pic>
+        <p:nvPicPr>
+          <p:cNvPr id="2" name="Picture 1" descr="background.png"/>
+          <p:cNvPicPr>
+            <a:picLocks noChangeAspect="1"/>
+          </p:cNvPicPr>
+          <p:nvPr/>
+        </p:nvPicPr>
+        <p:blipFill>
+          <a:blip r:embed="rId2"/>
+          <a:stretch>
+            <a:fillRect/>
+          </a:stretch>
+        </p:blipFill>
+        <p:spPr>
+          <a:xfrm>
+            <a:off x="0" y="0"/>
+            <a:ext cx="12191695" cy="6858000"/>
+          </a:xfrm>
+          <a:prstGeom prst="rect">
+            <a:avLst/>
+          </a:prstGeom>
+        </p:spPr>
+      </p:pic>
+      <p:sp>
+        <p:nvSpPr>
+          <p:cNvPr id="3" name="TextBox 2"/>
           <p:cNvSpPr txBox="1"/>
           <p:nvPr/>
         </p:nvSpPr>
@@ -7317,20 +8139,20 @@
             <a:pPr>
               <a:defRPr sz="1000" b="1">
                 <a:solidFill>
-                  <a:srgbClr val="38BDF8"/>
-                </a:solidFill>
-                <a:latin typeface="Arial"/>
-              </a:defRPr>
-            </a:pPr>
-            <a:r>
-              <a:t>OPERAÇÃO INTEGRADA</a:t>
-            </a:r>
-          </a:p>
-        </p:txBody>
-      </p:sp>
-      <p:sp>
-        <p:nvSpPr>
-          <p:cNvPr id="3" name="TextBox 2"/>
+                  <a:srgbClr val="FF7900"/>
+                </a:solidFill>
+                <a:latin typeface="Arial"/>
+              </a:defRPr>
+            </a:pPr>
+            <a:r>
+              <a:t>ECOSSISTEMA SUZANO IT</a:t>
+            </a:r>
+          </a:p>
+        </p:txBody>
+      </p:sp>
+      <p:sp>
+        <p:nvSpPr>
+          <p:cNvPr id="4" name="TextBox 3"/>
           <p:cNvSpPr txBox="1"/>
           <p:nvPr/>
         </p:nvSpPr>
@@ -7353,27 +8175,27 @@
             <a:pPr>
               <a:defRPr sz="2800" b="1">
                 <a:solidFill>
-                  <a:srgbClr val="F8FAFC"/>
-                </a:solidFill>
-                <a:latin typeface="Arial"/>
-              </a:defRPr>
-            </a:pPr>
-            <a:r>
-              <a:t>Módulo: Gestão de Oficina</a:t>
-            </a:r>
-          </a:p>
-        </p:txBody>
-      </p:sp>
-      <p:sp>
-        <p:nvSpPr>
-          <p:cNvPr id="4" name="TextBox 3"/>
+                  <a:srgbClr val="FFFFFF"/>
+                </a:solidFill>
+                <a:latin typeface="Arial"/>
+              </a:defRPr>
+            </a:pPr>
+            <a:r>
+              <a:t>Nossa Solução</a:t>
+            </a:r>
+          </a:p>
+        </p:txBody>
+      </p:sp>
+      <p:sp>
+        <p:nvSpPr>
+          <p:cNvPr id="5" name="TextBox 4"/>
           <p:cNvSpPr txBox="1"/>
           <p:nvPr/>
         </p:nvSpPr>
         <p:spPr>
           <a:xfrm>
-            <a:off x="731520" y="1645920"/>
-            <a:ext cx="5303520" cy="4389120"/>
+            <a:off x="731520" y="1554480"/>
+            <a:ext cx="10698480" cy="731520"/>
           </a:xfrm>
           <a:prstGeom prst="rect">
             <a:avLst/>
@@ -7381,144 +8203,45 @@
           <a:noFill/>
         </p:spPr>
         <p:txBody>
-          <a:bodyPr wrap="square">
+          <a:bodyPr wrap="none">
             <a:spAutoFit/>
           </a:bodyPr>
           <a:lstStyle/>
           <a:p>
             <a:pPr>
-              <a:spcAft>
-                <a:spcPts val="1400"/>
-              </a:spcAft>
-              <a:defRPr sz="1800" b="1">
-                <a:solidFill>
-                  <a:srgbClr val="F8FAFC"/>
-                </a:solidFill>
-                <a:latin typeface="Arial"/>
-              </a:defRPr>
-            </a:pPr>
-            <a:r>
-              <a:t>Controle absoluto da oficina mecânica:</a:t>
-            </a:r>
-          </a:p>
-          <a:p>
-            <a:pPr>
-              <a:spcAft>
-                <a:spcPts val="1000"/>
-              </a:spcAft>
-              <a:defRPr sz="1400">
-                <a:solidFill>
-                  <a:srgbClr val="94A3B8"/>
-                </a:solidFill>
-                <a:latin typeface="Arial"/>
-              </a:defRPr>
-            </a:pPr>
-            <a:r>
-              <a:t>✓  Cadastro rápido de clientes e veículos integrados.</a:t>
-            </a:r>
-          </a:p>
-          <a:p>
-            <a:pPr>
-              <a:spcAft>
-                <a:spcPts val="1000"/>
-              </a:spcAft>
-              <a:defRPr sz="1400">
-                <a:solidFill>
-                  <a:srgbClr val="94A3B8"/>
-                </a:solidFill>
-                <a:latin typeface="Arial"/>
-              </a:defRPr>
-            </a:pPr>
-            <a:r>
-              <a:t>✓  Orçamentos comerciais digitais com envio em 1 clique.</a:t>
-            </a:r>
-          </a:p>
-          <a:p>
-            <a:pPr>
-              <a:spcAft>
-                <a:spcPts val="1000"/>
-              </a:spcAft>
-              <a:defRPr sz="1400">
-                <a:solidFill>
-                  <a:srgbClr val="94A3B8"/>
-                </a:solidFill>
-                <a:latin typeface="Arial"/>
-              </a:defRPr>
-            </a:pPr>
-            <a:r>
-              <a:t>✓  Ordens de serviço com controle de horas trabalhadas.</a:t>
-            </a:r>
-          </a:p>
-          <a:p>
-            <a:pPr>
-              <a:spcAft>
-                <a:spcPts val="1000"/>
-              </a:spcAft>
-              <a:defRPr sz="1400">
-                <a:solidFill>
-                  <a:srgbClr val="94A3B8"/>
-                </a:solidFill>
-                <a:latin typeface="Arial"/>
-              </a:defRPr>
-            </a:pPr>
-            <a:r>
-              <a:t>✓  Gestão de estoque de peças com reposição sugerida.</a:t>
-            </a:r>
-          </a:p>
-          <a:p>
-            <a:pPr>
-              <a:spcAft>
-                <a:spcPts val="1000"/>
-              </a:spcAft>
-              <a:defRPr sz="1400">
-                <a:solidFill>
-                  <a:srgbClr val="94A3B8"/>
-                </a:solidFill>
-                <a:latin typeface="Arial"/>
-              </a:defRPr>
-            </a:pPr>
-            <a:r>
-              <a:t>✓  Controle de comissões de mecânicos e consultores.</a:t>
-            </a:r>
-          </a:p>
-          <a:p>
-            <a:pPr>
-              <a:spcAft>
-                <a:spcPts val="1000"/>
-              </a:spcAft>
-              <a:defRPr sz="1400">
-                <a:solidFill>
-                  <a:srgbClr val="94A3B8"/>
-                </a:solidFill>
-                <a:latin typeface="Arial"/>
-              </a:defRPr>
-            </a:pPr>
-            <a:r>
-              <a:t>✓  Emissão de Notas Fiscais Eletrônicas de Serviço (NF-e).</a:t>
-            </a:r>
-          </a:p>
-        </p:txBody>
-      </p:sp>
-      <p:sp>
-        <p:nvSpPr>
-          <p:cNvPr id="5" name="Rectangle 4"/>
+              <a:defRPr sz="1800">
+                <a:solidFill>
+                  <a:srgbClr val="A1A1AA"/>
+                </a:solidFill>
+                <a:latin typeface="Arial"/>
+              </a:defRPr>
+            </a:pPr>
+            <a:r>
+              <a:t>Centralizamos toda a gestão operacional, de frotas e financeira em um único ecossistema em nuvem.</a:t>
+            </a:r>
+          </a:p>
+        </p:txBody>
+      </p:sp>
+      <p:sp>
+        <p:nvSpPr>
+          <p:cNvPr id="6" name="Rectangle 5"/>
           <p:cNvSpPr/>
           <p:nvPr/>
         </p:nvSpPr>
         <p:spPr>
           <a:xfrm>
-            <a:off x="6400800" y="1645920"/>
-            <a:ext cx="5029200" cy="4114800"/>
+            <a:off x="731520" y="2377440"/>
+            <a:ext cx="2499055" cy="3474720"/>
           </a:xfrm>
           <a:prstGeom prst="rect">
             <a:avLst/>
           </a:prstGeom>
           <a:solidFill>
-            <a:srgbClr val="101725"/>
+            <a:srgbClr val="121316"/>
           </a:solidFill>
           <a:ln w="12700">
             <a:solidFill>
-              <a:srgbClr val="1E293B"/>
+              <a:srgbClr val="2D2D32"/>
             </a:solidFill>
           </a:ln>
         </p:spPr>
@@ -7546,14 +8269,14 @@
       </p:sp>
       <p:sp>
         <p:nvSpPr>
-          <p:cNvPr id="6" name="TextBox 5"/>
+          <p:cNvPr id="7" name="TextBox 6"/>
           <p:cNvSpPr txBox="1"/>
           <p:nvPr/>
         </p:nvSpPr>
         <p:spPr>
           <a:xfrm>
-            <a:off x="6675120" y="1920240"/>
-            <a:ext cx="4480560" cy="3566160"/>
+            <a:off x="822960" y="2560320"/>
+            <a:ext cx="2316175" cy="3108960"/>
           </a:xfrm>
           <a:prstGeom prst="rect">
             <a:avLst/>
@@ -7568,54 +8291,328 @@
           <a:p>
             <a:pPr>
               <a:spcAft>
-                <a:spcPts val="1800"/>
+                <a:spcPts val="1200"/>
               </a:spcAft>
-              <a:defRPr sz="1400" b="1">
-                <a:solidFill>
-                  <a:srgbClr val="38BDF8"/>
-                </a:solidFill>
-                <a:latin typeface="Arial"/>
-              </a:defRPr>
-            </a:pPr>
-            <a:r>
-              <a:t>RESULTADOS OPERACIONAIS</a:t>
-            </a:r>
-          </a:p>
-          <a:p>
-            <a:pPr>
-              <a:defRPr sz="1500">
-                <a:solidFill>
-                  <a:srgbClr val="94A3B8"/>
-                </a:solidFill>
-                <a:latin typeface="Arial"/>
-              </a:defRPr>
-            </a:pPr>
-            <a:r>
-              <a:t>A digitalização de processos da Suzano IT gera impacto instantâneo:</a:t>
-            </a:r>
-            <a:br/>
-            <a:br/>
-            <a:r>
-              <a:t>•  Organização completa do pátio mecânico.</a:t>
-            </a:r>
-            <a:br/>
-            <a:r>
-              <a:t>•  Melhoria média de 20% no faturamento bruto.</a:t>
-            </a:r>
-            <a:br/>
-            <a:r>
-              <a:t>•  Eliminação de erros de digitação e retrabalho.</a:t>
-            </a:r>
-            <a:br/>
-            <a:r>
-              <a:t>•  Aumento de confiança do cliente final com laudo online.</a:t>
-            </a:r>
-          </a:p>
-        </p:txBody>
-      </p:sp>
-      <p:sp>
-        <p:nvSpPr>
-          <p:cNvPr id="7" name="TextBox 6"/>
+              <a:defRPr sz="1800" b="1">
+                <a:solidFill>
+                  <a:srgbClr val="FF7900"/>
+                </a:solidFill>
+                <a:latin typeface="Arial"/>
+              </a:defRPr>
+            </a:pPr>
+            <a:r>
+              <a:t>Gestão de Oficina</a:t>
+            </a:r>
+          </a:p>
+          <a:p>
+            <a:pPr>
+              <a:defRPr sz="1300">
+                <a:solidFill>
+                  <a:srgbClr val="A1A1AA"/>
+                </a:solidFill>
+                <a:latin typeface="Arial"/>
+              </a:defRPr>
+            </a:pPr>
+            <a:r>
+              <a:t>Ordens de serviço digitais, controle completo de peças, cadastros de clientes e histórico por placa.</a:t>
+            </a:r>
+          </a:p>
+        </p:txBody>
+      </p:sp>
+      <p:sp>
+        <p:nvSpPr>
+          <p:cNvPr id="8" name="Rectangle 7"/>
+          <p:cNvSpPr/>
+          <p:nvPr/>
+        </p:nvSpPr>
+        <p:spPr>
+          <a:xfrm>
+            <a:off x="3474720" y="2377440"/>
+            <a:ext cx="2499055" cy="3474720"/>
+          </a:xfrm>
+          <a:prstGeom prst="rect">
+            <a:avLst/>
+          </a:prstGeom>
+          <a:solidFill>
+            <a:srgbClr val="121316"/>
+          </a:solidFill>
+          <a:ln w="12700">
+            <a:solidFill>
+              <a:srgbClr val="2D2D32"/>
+            </a:solidFill>
+          </a:ln>
+        </p:spPr>
+        <p:style>
+          <a:lnRef idx="1">
+            <a:schemeClr val="accent1"/>
+          </a:lnRef>
+          <a:fillRef idx="3">
+            <a:schemeClr val="accent1"/>
+          </a:fillRef>
+          <a:effectRef idx="2">
+            <a:schemeClr val="accent1"/>
+          </a:effectRef>
+          <a:fontRef idx="minor">
+            <a:schemeClr val="lt1"/>
+          </a:fontRef>
+        </p:style>
+        <p:txBody>
+          <a:bodyPr rtlCol="0" anchor="ctr"/>
+          <a:lstStyle/>
+          <a:p>
+            <a:pPr algn="ctr"/>
+          </a:p>
+        </p:txBody>
+      </p:sp>
+      <p:sp>
+        <p:nvSpPr>
+          <p:cNvPr id="9" name="TextBox 8"/>
+          <p:cNvSpPr txBox="1"/>
+          <p:nvPr/>
+        </p:nvSpPr>
+        <p:spPr>
+          <a:xfrm>
+            <a:off x="3566160" y="2560320"/>
+            <a:ext cx="2316175" cy="3108960"/>
+          </a:xfrm>
+          <a:prstGeom prst="rect">
+            <a:avLst/>
+          </a:prstGeom>
+          <a:noFill/>
+        </p:spPr>
+        <p:txBody>
+          <a:bodyPr wrap="square">
+            <a:spAutoFit/>
+          </a:bodyPr>
+          <a:lstStyle/>
+          <a:p>
+            <a:pPr>
+              <a:spcAft>
+                <a:spcPts val="1200"/>
+              </a:spcAft>
+              <a:defRPr sz="1800" b="1">
+                <a:solidFill>
+                  <a:srgbClr val="FF7900"/>
+                </a:solidFill>
+                <a:latin typeface="Arial"/>
+              </a:defRPr>
+            </a:pPr>
+            <a:r>
+              <a:t>Gestão de Frotas</a:t>
+            </a:r>
+          </a:p>
+          <a:p>
+            <a:pPr>
+              <a:defRPr sz="1300">
+                <a:solidFill>
+                  <a:srgbClr val="A1A1AA"/>
+                </a:solidFill>
+                <a:latin typeface="Arial"/>
+              </a:defRPr>
+            </a:pPr>
+            <a:r>
+              <a:t>Controle inteligente de pneus, consumo de combustível, motoristas e planos de manutenção preventiva.</a:t>
+            </a:r>
+          </a:p>
+        </p:txBody>
+      </p:sp>
+      <p:sp>
+        <p:nvSpPr>
+          <p:cNvPr id="10" name="Rectangle 9"/>
+          <p:cNvSpPr/>
+          <p:nvPr/>
+        </p:nvSpPr>
+        <p:spPr>
+          <a:xfrm>
+            <a:off x="6217920" y="2377440"/>
+            <a:ext cx="2499055" cy="3474720"/>
+          </a:xfrm>
+          <a:prstGeom prst="rect">
+            <a:avLst/>
+          </a:prstGeom>
+          <a:solidFill>
+            <a:srgbClr val="121316"/>
+          </a:solidFill>
+          <a:ln w="12700">
+            <a:solidFill>
+              <a:srgbClr val="2D2D32"/>
+            </a:solidFill>
+          </a:ln>
+        </p:spPr>
+        <p:style>
+          <a:lnRef idx="1">
+            <a:schemeClr val="accent1"/>
+          </a:lnRef>
+          <a:fillRef idx="3">
+            <a:schemeClr val="accent1"/>
+          </a:fillRef>
+          <a:effectRef idx="2">
+            <a:schemeClr val="accent1"/>
+          </a:effectRef>
+          <a:fontRef idx="minor">
+            <a:schemeClr val="lt1"/>
+          </a:fontRef>
+        </p:style>
+        <p:txBody>
+          <a:bodyPr rtlCol="0" anchor="ctr"/>
+          <a:lstStyle/>
+          <a:p>
+            <a:pPr algn="ctr"/>
+          </a:p>
+        </p:txBody>
+      </p:sp>
+      <p:sp>
+        <p:nvSpPr>
+          <p:cNvPr id="11" name="TextBox 10"/>
+          <p:cNvSpPr txBox="1"/>
+          <p:nvPr/>
+        </p:nvSpPr>
+        <p:spPr>
+          <a:xfrm>
+            <a:off x="6309359" y="2560320"/>
+            <a:ext cx="2316175" cy="3108960"/>
+          </a:xfrm>
+          <a:prstGeom prst="rect">
+            <a:avLst/>
+          </a:prstGeom>
+          <a:noFill/>
+        </p:spPr>
+        <p:txBody>
+          <a:bodyPr wrap="square">
+            <a:spAutoFit/>
+          </a:bodyPr>
+          <a:lstStyle/>
+          <a:p>
+            <a:pPr>
+              <a:spcAft>
+                <a:spcPts val="1200"/>
+              </a:spcAft>
+              <a:defRPr sz="1800" b="1">
+                <a:solidFill>
+                  <a:srgbClr val="FF7900"/>
+                </a:solidFill>
+                <a:latin typeface="Arial"/>
+              </a:defRPr>
+            </a:pPr>
+            <a:r>
+              <a:t>Controle Financeiro</a:t>
+            </a:r>
+          </a:p>
+          <a:p>
+            <a:pPr>
+              <a:defRPr sz="1300">
+                <a:solidFill>
+                  <a:srgbClr val="A1A1AA"/>
+                </a:solidFill>
+                <a:latin typeface="Arial"/>
+              </a:defRPr>
+            </a:pPr>
+            <a:r>
+              <a:t>Contas a pagar/receber integradas à operação, DRE estruturado e acompanhamento de fluxo de caixa.</a:t>
+            </a:r>
+          </a:p>
+        </p:txBody>
+      </p:sp>
+      <p:sp>
+        <p:nvSpPr>
+          <p:cNvPr id="12" name="Rectangle 11"/>
+          <p:cNvSpPr/>
+          <p:nvPr/>
+        </p:nvSpPr>
+        <p:spPr>
+          <a:xfrm>
+            <a:off x="8961120" y="2377440"/>
+            <a:ext cx="2499055" cy="3474720"/>
+          </a:xfrm>
+          <a:prstGeom prst="rect">
+            <a:avLst/>
+          </a:prstGeom>
+          <a:solidFill>
+            <a:srgbClr val="121316"/>
+          </a:solidFill>
+          <a:ln w="12700">
+            <a:solidFill>
+              <a:srgbClr val="2D2D32"/>
+            </a:solidFill>
+          </a:ln>
+        </p:spPr>
+        <p:style>
+          <a:lnRef idx="1">
+            <a:schemeClr val="accent1"/>
+          </a:lnRef>
+          <a:fillRef idx="3">
+            <a:schemeClr val="accent1"/>
+          </a:fillRef>
+          <a:effectRef idx="2">
+            <a:schemeClr val="accent1"/>
+          </a:effectRef>
+          <a:fontRef idx="minor">
+            <a:schemeClr val="lt1"/>
+          </a:fontRef>
+        </p:style>
+        <p:txBody>
+          <a:bodyPr rtlCol="0" anchor="ctr"/>
+          <a:lstStyle/>
+          <a:p>
+            <a:pPr algn="ctr"/>
+          </a:p>
+        </p:txBody>
+      </p:sp>
+      <p:sp>
+        <p:nvSpPr>
+          <p:cNvPr id="13" name="TextBox 12"/>
+          <p:cNvSpPr txBox="1"/>
+          <p:nvPr/>
+        </p:nvSpPr>
+        <p:spPr>
+          <a:xfrm>
+            <a:off x="9052560" y="2560320"/>
+            <a:ext cx="2316175" cy="3108960"/>
+          </a:xfrm>
+          <a:prstGeom prst="rect">
+            <a:avLst/>
+          </a:prstGeom>
+          <a:noFill/>
+        </p:spPr>
+        <p:txBody>
+          <a:bodyPr wrap="square">
+            <a:spAutoFit/>
+          </a:bodyPr>
+          <a:lstStyle/>
+          <a:p>
+            <a:pPr>
+              <a:spcAft>
+                <a:spcPts val="1200"/>
+              </a:spcAft>
+              <a:defRPr sz="1800" b="1">
+                <a:solidFill>
+                  <a:srgbClr val="FF7900"/>
+                </a:solidFill>
+                <a:latin typeface="Arial"/>
+              </a:defRPr>
+            </a:pPr>
+            <a:r>
+              <a:t>Inteligência Artificial</a:t>
+            </a:r>
+          </a:p>
+          <a:p>
+            <a:pPr>
+              <a:defRPr sz="1300">
+                <a:solidFill>
+                  <a:srgbClr val="A1A1AA"/>
+                </a:solidFill>
+                <a:latin typeface="Arial"/>
+              </a:defRPr>
+            </a:pPr>
+            <a:r>
+              <a:t>Modelagem preditiva CMH-AI para geração automática de NF-e e diagnósticos de desgaste.</a:t>
+            </a:r>
+          </a:p>
+        </p:txBody>
+      </p:sp>
+      <p:sp>
+        <p:nvSpPr>
+          <p:cNvPr id="14" name="TextBox 13"/>
           <p:cNvSpPr txBox="1"/>
           <p:nvPr/>
         </p:nvSpPr>
@@ -7638,13 +8635,13 @@
             <a:pPr>
               <a:defRPr sz="850">
                 <a:solidFill>
-                  <a:srgbClr val="94A3B8"/>
-                </a:solidFill>
-                <a:latin typeface="Arial"/>
-              </a:defRPr>
-            </a:pPr>
-            <a:r>
-              <a:t>SUZANO IT   |   Tecnologia para Oficinas e Frotas                                                                                   Slide 5 de 14</a:t>
+                  <a:srgbClr val="A1A1AA"/>
+                </a:solidFill>
+                <a:latin typeface="Arial"/>
+              </a:defRPr>
+            </a:pPr>
+            <a:r>
+              <a:t>SUZANO IT   |   Tecnologia que move frotas.                                                                                          Slide 5 de 15</a:t>
             </a:r>
           </a:p>
         </p:txBody>
@@ -7660,14 +8657,6 @@
 <file path=ppt/slides/slide6.xml><?xml version="1.0" encoding="utf-8"?>
 <p:sld xmlns:a="http://schemas.openxmlformats.org/drawingml/2006/main" xmlns:p="http://schemas.openxmlformats.org/presentationml/2006/main" xmlns:r="http://schemas.openxmlformats.org/officeDocument/2006/relationships">
   <p:cSld>
-    <p:bg>
-      <p:bgPr>
-        <a:solidFill>
-          <a:srgbClr val="080B11"/>
-        </a:solidFill>
-        <a:effectLst/>
-      </p:bgPr>
-    </p:bg>
     <p:spTree>
       <p:nvGrpSpPr>
         <p:cNvPr id="1" name=""/>
@@ -7675,9 +8664,33 @@
         <p:nvPr/>
       </p:nvGrpSpPr>
       <p:grpSpPr/>
-      <p:sp>
-        <p:nvSpPr>
-          <p:cNvPr id="2" name="TextBox 1"/>
+      <p:pic>
+        <p:nvPicPr>
+          <p:cNvPr id="2" name="Picture 1" descr="background.png"/>
+          <p:cNvPicPr>
+            <a:picLocks noChangeAspect="1"/>
+          </p:cNvPicPr>
+          <p:nvPr/>
+        </p:nvPicPr>
+        <p:blipFill>
+          <a:blip r:embed="rId2"/>
+          <a:stretch>
+            <a:fillRect/>
+          </a:stretch>
+        </p:blipFill>
+        <p:spPr>
+          <a:xfrm>
+            <a:off x="0" y="0"/>
+            <a:ext cx="12191695" cy="6858000"/>
+          </a:xfrm>
+          <a:prstGeom prst="rect">
+            <a:avLst/>
+          </a:prstGeom>
+        </p:spPr>
+      </p:pic>
+      <p:sp>
+        <p:nvSpPr>
+          <p:cNvPr id="3" name="TextBox 2"/>
           <p:cNvSpPr txBox="1"/>
           <p:nvPr/>
         </p:nvSpPr>
@@ -7700,20 +8713,20 @@
             <a:pPr>
               <a:defRPr sz="1000" b="1">
                 <a:solidFill>
-                  <a:srgbClr val="38BDF8"/>
-                </a:solidFill>
-                <a:latin typeface="Arial"/>
-              </a:defRPr>
-            </a:pPr>
-            <a:r>
-              <a:t>CONTROLE DE ATIVOS</a:t>
-            </a:r>
-          </a:p>
-        </p:txBody>
-      </p:sp>
-      <p:sp>
-        <p:nvSpPr>
-          <p:cNvPr id="3" name="TextBox 2"/>
+                  <a:srgbClr val="FF7900"/>
+                </a:solidFill>
+                <a:latin typeface="Arial"/>
+              </a:defRPr>
+            </a:pPr>
+            <a:r>
+              <a:t>OPERAÇÃO INTEGRADA</a:t>
+            </a:r>
+          </a:p>
+        </p:txBody>
+      </p:sp>
+      <p:sp>
+        <p:nvSpPr>
+          <p:cNvPr id="4" name="TextBox 3"/>
           <p:cNvSpPr txBox="1"/>
           <p:nvPr/>
         </p:nvSpPr>
@@ -7736,20 +8749,20 @@
             <a:pPr>
               <a:defRPr sz="2800" b="1">
                 <a:solidFill>
-                  <a:srgbClr val="F8FAFC"/>
-                </a:solidFill>
-                <a:latin typeface="Arial"/>
-              </a:defRPr>
-            </a:pPr>
-            <a:r>
-              <a:t>Módulo: Gestão de Frotas</a:t>
-            </a:r>
-          </a:p>
-        </p:txBody>
-      </p:sp>
-      <p:sp>
-        <p:nvSpPr>
-          <p:cNvPr id="4" name="TextBox 3"/>
+                  <a:srgbClr val="FFFFFF"/>
+                </a:solidFill>
+                <a:latin typeface="Arial"/>
+              </a:defRPr>
+            </a:pPr>
+            <a:r>
+              <a:t>Módulo: Gestão de Oficina</a:t>
+            </a:r>
+          </a:p>
+        </p:txBody>
+      </p:sp>
+      <p:sp>
+        <p:nvSpPr>
+          <p:cNvPr id="5" name="TextBox 4"/>
           <p:cNvSpPr txBox="1"/>
           <p:nvPr/>
         </p:nvSpPr>
@@ -7775,13 +8788,13 @@
               </a:spcAft>
               <a:defRPr sz="1800" b="1">
                 <a:solidFill>
-                  <a:srgbClr val="F8FAFC"/>
-                </a:solidFill>
-                <a:latin typeface="Arial"/>
-              </a:defRPr>
-            </a:pPr>
-            <a:r>
-              <a:t>Visão geral e preventiva da frota:</a:t>
+                  <a:srgbClr val="FFFFFF"/>
+                </a:solidFill>
+                <a:latin typeface="Arial"/>
+              </a:defRPr>
+            </a:pPr>
+            <a:r>
+              <a:t>Controle absoluto da oficina mecânica:</a:t>
             </a:r>
           </a:p>
           <a:p>
@@ -7791,13 +8804,13 @@
               </a:spcAft>
               <a:defRPr sz="1400">
                 <a:solidFill>
-                  <a:srgbClr val="94A3B8"/>
-                </a:solidFill>
-                <a:latin typeface="Arial"/>
-              </a:defRPr>
-            </a:pPr>
-            <a:r>
-              <a:t>✓  Cadastro de veículos e subfrotas organizacionais.</a:t>
+                  <a:srgbClr val="A1A1AA"/>
+                </a:solidFill>
+                <a:latin typeface="Arial"/>
+              </a:defRPr>
+            </a:pPr>
+            <a:r>
+              <a:t>✓  Cadastro rápido de clientes e veículos integrados.</a:t>
             </a:r>
           </a:p>
           <a:p>
@@ -7807,13 +8820,13 @@
               </a:spcAft>
               <a:defRPr sz="1400">
                 <a:solidFill>
-                  <a:srgbClr val="94A3B8"/>
-                </a:solidFill>
-                <a:latin typeface="Arial"/>
-              </a:defRPr>
-            </a:pPr>
-            <a:r>
-              <a:t>✓  Gestão ativa de condutores e histórico de multas.</a:t>
+                  <a:srgbClr val="A1A1AA"/>
+                </a:solidFill>
+                <a:latin typeface="Arial"/>
+              </a:defRPr>
+            </a:pPr>
+            <a:r>
+              <a:t>✓  Orçamentos comerciais digitais com envio em 1 clique.</a:t>
             </a:r>
           </a:p>
           <a:p>
@@ -7823,13 +8836,13 @@
               </a:spcAft>
               <a:defRPr sz="1400">
                 <a:solidFill>
-                  <a:srgbClr val="94A3B8"/>
-                </a:solidFill>
-                <a:latin typeface="Arial"/>
-              </a:defRPr>
-            </a:pPr>
-            <a:r>
-              <a:t>✓  Controle de abastecimento, média de consumo e CPK.</a:t>
+                  <a:srgbClr val="A1A1AA"/>
+                </a:solidFill>
+                <a:latin typeface="Arial"/>
+              </a:defRPr>
+            </a:pPr>
+            <a:r>
+              <a:t>✓  Ordens de serviço com controle de horas trabalhadas.</a:t>
             </a:r>
           </a:p>
           <a:p>
@@ -7839,13 +8852,13 @@
               </a:spcAft>
               <a:defRPr sz="1400">
                 <a:solidFill>
-                  <a:srgbClr val="94A3B8"/>
-                </a:solidFill>
-                <a:latin typeface="Arial"/>
-              </a:defRPr>
-            </a:pPr>
-            <a:r>
-              <a:t>✓  Manutenção preventiva com alertas baseados em KM/Tempo.</a:t>
+                  <a:srgbClr val="A1A1AA"/>
+                </a:solidFill>
+                <a:latin typeface="Arial"/>
+              </a:defRPr>
+            </a:pPr>
+            <a:r>
+              <a:t>✓  Gestão de estoque de peças com reposição sugerida.</a:t>
             </a:r>
           </a:p>
           <a:p>
@@ -7855,13 +8868,13 @@
               </a:spcAft>
               <a:defRPr sz="1400">
                 <a:solidFill>
-                  <a:srgbClr val="94A3B8"/>
-                </a:solidFill>
-                <a:latin typeface="Arial"/>
-              </a:defRPr>
-            </a:pPr>
-            <a:r>
-              <a:t>✓  Controle de vida útil de pneus com histórico de rodagem.</a:t>
+                  <a:srgbClr val="A1A1AA"/>
+                </a:solidFill>
+                <a:latin typeface="Arial"/>
+              </a:defRPr>
+            </a:pPr>
+            <a:r>
+              <a:t>✓  Controle de comissões de mecânicos e consultores.</a:t>
             </a:r>
           </a:p>
           <a:p>
@@ -7871,20 +8884,20 @@
               </a:spcAft>
               <a:defRPr sz="1400">
                 <a:solidFill>
-                  <a:srgbClr val="94A3B8"/>
-                </a:solidFill>
-                <a:latin typeface="Arial"/>
-              </a:defRPr>
-            </a:pPr>
-            <a:r>
-              <a:t>✓  Rastreabilidade de custos e controle financeiro de ativos.</a:t>
-            </a:r>
-          </a:p>
-        </p:txBody>
-      </p:sp>
-      <p:sp>
-        <p:nvSpPr>
-          <p:cNvPr id="5" name="Rectangle 4"/>
+                  <a:srgbClr val="A1A1AA"/>
+                </a:solidFill>
+                <a:latin typeface="Arial"/>
+              </a:defRPr>
+            </a:pPr>
+            <a:r>
+              <a:t>✓  Emissão de Notas Fiscais Eletrônicas de Serviço (NF-e).</a:t>
+            </a:r>
+          </a:p>
+        </p:txBody>
+      </p:sp>
+      <p:sp>
+        <p:nvSpPr>
+          <p:cNvPr id="6" name="Rectangle 5"/>
           <p:cNvSpPr/>
           <p:nvPr/>
         </p:nvSpPr>
@@ -7897,11 +8910,11 @@
             <a:avLst/>
           </a:prstGeom>
           <a:solidFill>
-            <a:srgbClr val="101725"/>
+            <a:srgbClr val="121316"/>
           </a:solidFill>
           <a:ln w="12700">
             <a:solidFill>
-              <a:srgbClr val="1E293B"/>
+              <a:srgbClr val="2D2D32"/>
             </a:solidFill>
           </a:ln>
         </p:spPr>
@@ -7929,7 +8942,7 @@
       </p:sp>
       <p:sp>
         <p:nvSpPr>
-          <p:cNvPr id="6" name="TextBox 5"/>
+          <p:cNvPr id="7" name="TextBox 6"/>
           <p:cNvSpPr txBox="1"/>
           <p:nvPr/>
         </p:nvSpPr>
@@ -7955,50 +8968,50 @@
               </a:spcAft>
               <a:defRPr sz="1400" b="1">
                 <a:solidFill>
-                  <a:srgbClr val="38BDF8"/>
-                </a:solidFill>
-                <a:latin typeface="Arial"/>
-              </a:defRPr>
-            </a:pPr>
-            <a:r>
-              <a:t>BENEFÍCIOS NA GESTÃO DE FROTA</a:t>
+                  <a:srgbClr val="FF7900"/>
+                </a:solidFill>
+                <a:latin typeface="Arial"/>
+              </a:defRPr>
+            </a:pPr>
+            <a:r>
+              <a:t>RESULTADOS OPERACIONAIS</a:t>
             </a:r>
           </a:p>
           <a:p>
             <a:pPr>
               <a:defRPr sz="1500">
                 <a:solidFill>
-                  <a:srgbClr val="94A3B8"/>
-                </a:solidFill>
-                <a:latin typeface="Arial"/>
-              </a:defRPr>
-            </a:pPr>
-            <a:r>
-              <a:t>Economia em escala para empresas frotistas:</a:t>
+                  <a:srgbClr val="A1A1AA"/>
+                </a:solidFill>
+                <a:latin typeface="Arial"/>
+              </a:defRPr>
+            </a:pPr>
+            <a:r>
+              <a:t>A digitalização de processos da Suzano IT gera impacto instantâneo:</a:t>
             </a:r>
             <a:br/>
             <a:br/>
             <a:r>
-              <a:t>•  Redução de custos operacionais diretos por manutenção planejada.</a:t>
+              <a:t>•  Organização completa do pátio mecânico.</a:t>
             </a:r>
             <a:br/>
             <a:r>
-              <a:t>•  Maior disponibilidade física dos veículos nas ruas.</a:t>
+              <a:t>•  Melhoria média de 20% no faturamento bruto.</a:t>
             </a:r>
             <a:br/>
             <a:r>
-              <a:t>•  Prevenção de quebras graves e paradas indesejadas.</a:t>
+              <a:t>•  Eliminação de erros de digitação e retrabalho.</a:t>
             </a:r>
             <a:br/>
             <a:r>
-              <a:t>•  Auditoria de consumo de combustível simplificada.</a:t>
-            </a:r>
-          </a:p>
-        </p:txBody>
-      </p:sp>
-      <p:sp>
-        <p:nvSpPr>
-          <p:cNvPr id="7" name="TextBox 6"/>
+              <a:t>•  Aumento de confiança do cliente final com laudo online.</a:t>
+            </a:r>
+          </a:p>
+        </p:txBody>
+      </p:sp>
+      <p:sp>
+        <p:nvSpPr>
+          <p:cNvPr id="8" name="TextBox 7"/>
           <p:cNvSpPr txBox="1"/>
           <p:nvPr/>
         </p:nvSpPr>
@@ -8021,13 +9034,13 @@
             <a:pPr>
               <a:defRPr sz="850">
                 <a:solidFill>
-                  <a:srgbClr val="94A3B8"/>
-                </a:solidFill>
-                <a:latin typeface="Arial"/>
-              </a:defRPr>
-            </a:pPr>
-            <a:r>
-              <a:t>SUZANO IT   |   Tecnologia para Oficinas e Frotas                                                                                   Slide 6 de 14</a:t>
+                  <a:srgbClr val="A1A1AA"/>
+                </a:solidFill>
+                <a:latin typeface="Arial"/>
+              </a:defRPr>
+            </a:pPr>
+            <a:r>
+              <a:t>SUZANO IT   |   Tecnologia que move frotas.                                                                                          Slide 6 de 15</a:t>
             </a:r>
           </a:p>
         </p:txBody>
@@ -8043,14 +9056,6 @@
 <file path=ppt/slides/slide7.xml><?xml version="1.0" encoding="utf-8"?>
 <p:sld xmlns:a="http://schemas.openxmlformats.org/drawingml/2006/main" xmlns:p="http://schemas.openxmlformats.org/presentationml/2006/main" xmlns:r="http://schemas.openxmlformats.org/officeDocument/2006/relationships">
   <p:cSld>
-    <p:bg>
-      <p:bgPr>
-        <a:solidFill>
-          <a:srgbClr val="080B11"/>
-        </a:solidFill>
-        <a:effectLst/>
-      </p:bgPr>
-    </p:bg>
     <p:spTree>
       <p:nvGrpSpPr>
         <p:cNvPr id="1" name=""/>
@@ -8058,9 +9063,33 @@
         <p:nvPr/>
       </p:nvGrpSpPr>
       <p:grpSpPr/>
-      <p:sp>
-        <p:nvSpPr>
-          <p:cNvPr id="2" name="TextBox 1"/>
+      <p:pic>
+        <p:nvPicPr>
+          <p:cNvPr id="2" name="Picture 1" descr="background.png"/>
+          <p:cNvPicPr>
+            <a:picLocks noChangeAspect="1"/>
+          </p:cNvPicPr>
+          <p:nvPr/>
+        </p:nvPicPr>
+        <p:blipFill>
+          <a:blip r:embed="rId2"/>
+          <a:stretch>
+            <a:fillRect/>
+          </a:stretch>
+        </p:blipFill>
+        <p:spPr>
+          <a:xfrm>
+            <a:off x="0" y="0"/>
+            <a:ext cx="12191695" cy="6858000"/>
+          </a:xfrm>
+          <a:prstGeom prst="rect">
+            <a:avLst/>
+          </a:prstGeom>
+        </p:spPr>
+      </p:pic>
+      <p:sp>
+        <p:nvSpPr>
+          <p:cNvPr id="3" name="TextBox 2"/>
           <p:cNvSpPr txBox="1"/>
           <p:nvPr/>
         </p:nvSpPr>
@@ -8083,20 +9112,20 @@
             <a:pPr>
               <a:defRPr sz="1000" b="1">
                 <a:solidFill>
-                  <a:srgbClr val="38BDF8"/>
-                </a:solidFill>
-                <a:latin typeface="Arial"/>
-              </a:defRPr>
-            </a:pPr>
-            <a:r>
-              <a:t>TECNOLOGIA SUZUKI-AI</a:t>
-            </a:r>
-          </a:p>
-        </p:txBody>
-      </p:sp>
-      <p:sp>
-        <p:nvSpPr>
-          <p:cNvPr id="3" name="TextBox 2"/>
+                  <a:srgbClr val="FF7900"/>
+                </a:solidFill>
+                <a:latin typeface="Arial"/>
+              </a:defRPr>
+            </a:pPr>
+            <a:r>
+              <a:t>CONTROLE DE ATIVOS</a:t>
+            </a:r>
+          </a:p>
+        </p:txBody>
+      </p:sp>
+      <p:sp>
+        <p:nvSpPr>
+          <p:cNvPr id="4" name="TextBox 3"/>
           <p:cNvSpPr txBox="1"/>
           <p:nvPr/>
         </p:nvSpPr>
@@ -8119,20 +9148,20 @@
             <a:pPr>
               <a:defRPr sz="2800" b="1">
                 <a:solidFill>
-                  <a:srgbClr val="F8FAFC"/>
-                </a:solidFill>
-                <a:latin typeface="Arial"/>
-              </a:defRPr>
-            </a:pPr>
-            <a:r>
-              <a:t>Inteligência Artificial Integrada</a:t>
-            </a:r>
-          </a:p>
-        </p:txBody>
-      </p:sp>
-      <p:sp>
-        <p:nvSpPr>
-          <p:cNvPr id="4" name="TextBox 3"/>
+                  <a:srgbClr val="FFFFFF"/>
+                </a:solidFill>
+                <a:latin typeface="Arial"/>
+              </a:defRPr>
+            </a:pPr>
+            <a:r>
+              <a:t>Módulo: Gestão de Frotas</a:t>
+            </a:r>
+          </a:p>
+        </p:txBody>
+      </p:sp>
+      <p:sp>
+        <p:nvSpPr>
+          <p:cNvPr id="5" name="TextBox 4"/>
           <p:cNvSpPr txBox="1"/>
           <p:nvPr/>
         </p:nvSpPr>
@@ -8158,13 +9187,13 @@
               </a:spcAft>
               <a:defRPr sz="1800" b="1">
                 <a:solidFill>
-                  <a:srgbClr val="F8FAFC"/>
-                </a:solidFill>
-                <a:latin typeface="Arial"/>
-              </a:defRPr>
-            </a:pPr>
-            <a:r>
-              <a:t>Inteligência operacional no pós-venda:</a:t>
+                  <a:srgbClr val="FFFFFF"/>
+                </a:solidFill>
+                <a:latin typeface="Arial"/>
+              </a:defRPr>
+            </a:pPr>
+            <a:r>
+              <a:t>Visão geral e preventiva da frota:</a:t>
             </a:r>
           </a:p>
           <a:p>
@@ -8174,13 +9203,13 @@
               </a:spcAft>
               <a:defRPr sz="1400">
                 <a:solidFill>
-                  <a:srgbClr val="94A3B8"/>
-                </a:solidFill>
-                <a:latin typeface="Arial"/>
-              </a:defRPr>
-            </a:pPr>
-            <a:r>
-              <a:t>✨  Geração de descrição de serviços para NF-e a partir de rascunhos informais.</a:t>
+                  <a:srgbClr val="A1A1AA"/>
+                </a:solidFill>
+                <a:latin typeface="Arial"/>
+              </a:defRPr>
+            </a:pPr>
+            <a:r>
+              <a:t>✓  Cadastro de veículos e subfrotas organizacionais.</a:t>
             </a:r>
           </a:p>
           <a:p>
@@ -8190,13 +9219,13 @@
               </a:spcAft>
               <a:defRPr sz="1400">
                 <a:solidFill>
-                  <a:srgbClr val="94A3B8"/>
-                </a:solidFill>
-                <a:latin typeface="Arial"/>
-              </a:defRPr>
-            </a:pPr>
-            <a:r>
-              <a:t>✨  Sugestão preditiva de serviços adicionais baseada no modelo de uso do carro.</a:t>
+                  <a:srgbClr val="A1A1AA"/>
+                </a:solidFill>
+                <a:latin typeface="Arial"/>
+              </a:defRPr>
+            </a:pPr>
+            <a:r>
+              <a:t>✓  Gestão ativa de condutores e histórico de multas.</a:t>
             </a:r>
           </a:p>
           <a:p>
@@ -8206,13 +9235,13 @@
               </a:spcAft>
               <a:defRPr sz="1400">
                 <a:solidFill>
-                  <a:srgbClr val="94A3B8"/>
-                </a:solidFill>
-                <a:latin typeface="Arial"/>
-              </a:defRPr>
-            </a:pPr>
-            <a:r>
-              <a:t>✨  Análise estatística para identificação preditiva de padrões de falhas mecânicas.</a:t>
+                  <a:srgbClr val="A1A1AA"/>
+                </a:solidFill>
+                <a:latin typeface="Arial"/>
+              </a:defRPr>
+            </a:pPr>
+            <a:r>
+              <a:t>✓  Controle de abastecimento, média de consumo e CPK.</a:t>
             </a:r>
           </a:p>
           <a:p>
@@ -8222,13 +9251,13 @@
               </a:spcAft>
               <a:defRPr sz="1400">
                 <a:solidFill>
-                  <a:srgbClr val="94A3B8"/>
-                </a:solidFill>
-                <a:latin typeface="Arial"/>
-              </a:defRPr>
-            </a:pPr>
-            <a:r>
-              <a:t>✨  Relatórios inteligentes para tomadas de decisão sem complexidade.</a:t>
+                  <a:srgbClr val="A1A1AA"/>
+                </a:solidFill>
+                <a:latin typeface="Arial"/>
+              </a:defRPr>
+            </a:pPr>
+            <a:r>
+              <a:t>✓  Manutenção preventiva com alertas baseados em KM/Tempo.</a:t>
             </a:r>
           </a:p>
           <a:p>
@@ -8238,20 +9267,36 @@
               </a:spcAft>
               <a:defRPr sz="1400">
                 <a:solidFill>
-                  <a:srgbClr val="94A3B8"/>
-                </a:solidFill>
-                <a:latin typeface="Arial"/>
-              </a:defRPr>
-            </a:pPr>
-            <a:r>
-              <a:t>✨  Dashboards preditivos com alertas antecipados de manutenção crítica.</a:t>
-            </a:r>
-          </a:p>
-        </p:txBody>
-      </p:sp>
-      <p:sp>
-        <p:nvSpPr>
-          <p:cNvPr id="5" name="Rectangle 4"/>
+                  <a:srgbClr val="A1A1AA"/>
+                </a:solidFill>
+                <a:latin typeface="Arial"/>
+              </a:defRPr>
+            </a:pPr>
+            <a:r>
+              <a:t>✓  Controle de vida útil de pneus com histórico de rodagem.</a:t>
+            </a:r>
+          </a:p>
+          <a:p>
+            <a:pPr>
+              <a:spcAft>
+                <a:spcPts val="1000"/>
+              </a:spcAft>
+              <a:defRPr sz="1400">
+                <a:solidFill>
+                  <a:srgbClr val="A1A1AA"/>
+                </a:solidFill>
+                <a:latin typeface="Arial"/>
+              </a:defRPr>
+            </a:pPr>
+            <a:r>
+              <a:t>✓  Rastreabilidade de custos e controle financeiro de ativos.</a:t>
+            </a:r>
+          </a:p>
+        </p:txBody>
+      </p:sp>
+      <p:sp>
+        <p:nvSpPr>
+          <p:cNvPr id="6" name="Rectangle 5"/>
           <p:cNvSpPr/>
           <p:nvPr/>
         </p:nvSpPr>
@@ -8264,11 +9309,11 @@
             <a:avLst/>
           </a:prstGeom>
           <a:solidFill>
-            <a:srgbClr val="101725"/>
+            <a:srgbClr val="121316"/>
           </a:solidFill>
           <a:ln w="12700">
             <a:solidFill>
-              <a:srgbClr val="1E293B"/>
+              <a:srgbClr val="2D2D32"/>
             </a:solidFill>
           </a:ln>
         </p:spPr>
@@ -8296,7 +9341,7 @@
       </p:sp>
       <p:sp>
         <p:nvSpPr>
-          <p:cNvPr id="6" name="TextBox 5"/>
+          <p:cNvPr id="7" name="TextBox 6"/>
           <p:cNvSpPr txBox="1"/>
           <p:nvPr/>
         </p:nvSpPr>
@@ -8318,55 +9363,54 @@
           <a:p>
             <a:pPr>
               <a:spcAft>
-                <a:spcPts val="1000"/>
+                <a:spcPts val="1800"/>
               </a:spcAft>
               <a:defRPr sz="1400" b="1">
                 <a:solidFill>
-                  <a:srgbClr val="38BDF8"/>
-                </a:solidFill>
-                <a:latin typeface="Arial"/>
-              </a:defRPr>
-            </a:pPr>
-            <a:r>
-              <a:t>EXEMPLO DE USO PRÁTICO (SUZUKI-AI)</a:t>
-            </a:r>
-          </a:p>
-          <a:p>
-            <a:pPr>
-              <a:defRPr sz="1300">
-                <a:solidFill>
-                  <a:srgbClr val="94A3B8"/>
-                </a:solidFill>
-                <a:latin typeface="Arial"/>
-              </a:defRPr>
-            </a:pPr>
-            <a:r>
-              <a:t>Rascunho de Entrada do Mecânico:</a:t>
-            </a:r>
-            <a:br/>
-            <a:r>
-              <a:t>'troca oleo velas filtro ar Corolla'</a:t>
+                  <a:srgbClr val="FF7900"/>
+                </a:solidFill>
+                <a:latin typeface="Arial"/>
+              </a:defRPr>
+            </a:pPr>
+            <a:r>
+              <a:t>BENEFÍCIOS NA GESTÃO DE FROTA</a:t>
+            </a:r>
+          </a:p>
+          <a:p>
+            <a:pPr>
+              <a:defRPr sz="1500">
+                <a:solidFill>
+                  <a:srgbClr val="A1A1AA"/>
+                </a:solidFill>
+                <a:latin typeface="Arial"/>
+              </a:defRPr>
+            </a:pPr>
+            <a:r>
+              <a:t>Economia em escala para empresas frotistas:</a:t>
             </a:r>
             <a:br/>
             <a:br/>
             <a:r>
-              <a:t>Retorno da IA de Faturamento:</a:t>
+              <a:t>•  Redução de custos operacionais diretos por manutenção planejada.</a:t>
             </a:r>
             <a:br/>
             <a:r>
-              <a:t>'Prestação de serviços mecânicos englobando diagnóstico computadorizado de injeção, substituição preventiva do filtro de ar e velas de ignição originais, com revisão detalhada do plano de lubrificação do motor.'</a:t>
+              <a:t>•  Maior disponibilidade física dos veículos nas ruas.</a:t>
             </a:r>
             <a:br/>
+            <a:r>
+              <a:t>•  Prevenção de quebras graves e paradas indesejadas.</a:t>
+            </a:r>
             <a:br/>
             <a:r>
-              <a:t>Benefício: Economia de tempo administrativa de recepção.</a:t>
-            </a:r>
-          </a:p>
-        </p:txBody>
-      </p:sp>
-      <p:sp>
-        <p:nvSpPr>
-          <p:cNvPr id="7" name="TextBox 6"/>
+              <a:t>•  Auditoria de consumo de combustível simplificada.</a:t>
+            </a:r>
+          </a:p>
+        </p:txBody>
+      </p:sp>
+      <p:sp>
+        <p:nvSpPr>
+          <p:cNvPr id="8" name="TextBox 7"/>
           <p:cNvSpPr txBox="1"/>
           <p:nvPr/>
         </p:nvSpPr>
@@ -8389,13 +9433,13 @@
             <a:pPr>
               <a:defRPr sz="850">
                 <a:solidFill>
-                  <a:srgbClr val="94A3B8"/>
-                </a:solidFill>
-                <a:latin typeface="Arial"/>
-              </a:defRPr>
-            </a:pPr>
-            <a:r>
-              <a:t>SUZANO IT   |   Tecnologia para Oficinas e Frotas                                                                                   Slide 7 de 14</a:t>
+                  <a:srgbClr val="A1A1AA"/>
+                </a:solidFill>
+                <a:latin typeface="Arial"/>
+              </a:defRPr>
+            </a:pPr>
+            <a:r>
+              <a:t>SUZANO IT   |   Tecnologia que move frotas.                                                                                          Slide 7 de 15</a:t>
             </a:r>
           </a:p>
         </p:txBody>
@@ -8411,14 +9455,6 @@
 <file path=ppt/slides/slide8.xml><?xml version="1.0" encoding="utf-8"?>
 <p:sld xmlns:a="http://schemas.openxmlformats.org/drawingml/2006/main" xmlns:p="http://schemas.openxmlformats.org/presentationml/2006/main" xmlns:r="http://schemas.openxmlformats.org/officeDocument/2006/relationships">
   <p:cSld>
-    <p:bg>
-      <p:bgPr>
-        <a:solidFill>
-          <a:srgbClr val="080B11"/>
-        </a:solidFill>
-        <a:effectLst/>
-      </p:bgPr>
-    </p:bg>
     <p:spTree>
       <p:nvGrpSpPr>
         <p:cNvPr id="1" name=""/>
@@ -8426,9 +9462,33 @@
         <p:nvPr/>
       </p:nvGrpSpPr>
       <p:grpSpPr/>
-      <p:sp>
-        <p:nvSpPr>
-          <p:cNvPr id="2" name="TextBox 1"/>
+      <p:pic>
+        <p:nvPicPr>
+          <p:cNvPr id="2" name="Picture 1" descr="background.png"/>
+          <p:cNvPicPr>
+            <a:picLocks noChangeAspect="1"/>
+          </p:cNvPicPr>
+          <p:nvPr/>
+        </p:nvPicPr>
+        <p:blipFill>
+          <a:blip r:embed="rId2"/>
+          <a:stretch>
+            <a:fillRect/>
+          </a:stretch>
+        </p:blipFill>
+        <p:spPr>
+          <a:xfrm>
+            <a:off x="0" y="0"/>
+            <a:ext cx="12191695" cy="6858000"/>
+          </a:xfrm>
+          <a:prstGeom prst="rect">
+            <a:avLst/>
+          </a:prstGeom>
+        </p:spPr>
+      </p:pic>
+      <p:sp>
+        <p:nvSpPr>
+          <p:cNvPr id="3" name="TextBox 2"/>
           <p:cNvSpPr txBox="1"/>
           <p:nvPr/>
         </p:nvSpPr>
@@ -8451,20 +9511,20 @@
             <a:pPr>
               <a:defRPr sz="1000" b="1">
                 <a:solidFill>
-                  <a:srgbClr val="38BDF8"/>
-                </a:solidFill>
-                <a:latin typeface="Arial"/>
-              </a:defRPr>
-            </a:pPr>
-            <a:r>
-              <a:t>POR QUE A SUZANO IT?</a:t>
-            </a:r>
-          </a:p>
-        </p:txBody>
-      </p:sp>
-      <p:sp>
-        <p:nvSpPr>
-          <p:cNvPr id="3" name="TextBox 2"/>
+                  <a:srgbClr val="FF7900"/>
+                </a:solidFill>
+                <a:latin typeface="Arial"/>
+              </a:defRPr>
+            </a:pPr>
+            <a:r>
+              <a:t>TECNOLOGIA CMH-AI</a:t>
+            </a:r>
+          </a:p>
+        </p:txBody>
+      </p:sp>
+      <p:sp>
+        <p:nvSpPr>
+          <p:cNvPr id="4" name="TextBox 3"/>
           <p:cNvSpPr txBox="1"/>
           <p:nvPr/>
         </p:nvSpPr>
@@ -8487,37 +9547,156 @@
             <a:pPr>
               <a:defRPr sz="2800" b="1">
                 <a:solidFill>
-                  <a:srgbClr val="F8FAFC"/>
-                </a:solidFill>
-                <a:latin typeface="Arial"/>
-              </a:defRPr>
-            </a:pPr>
-            <a:r>
-              <a:t>Diferenciais Competitivos</a:t>
-            </a:r>
-          </a:p>
-        </p:txBody>
-      </p:sp>
-      <p:sp>
-        <p:nvSpPr>
-          <p:cNvPr id="4" name="Rectangle 3"/>
+                  <a:srgbClr val="FFFFFF"/>
+                </a:solidFill>
+                <a:latin typeface="Arial"/>
+              </a:defRPr>
+            </a:pPr>
+            <a:r>
+              <a:t>Inteligência Artificial Integrada</a:t>
+            </a:r>
+          </a:p>
+        </p:txBody>
+      </p:sp>
+      <p:sp>
+        <p:nvSpPr>
+          <p:cNvPr id="5" name="TextBox 4"/>
+          <p:cNvSpPr txBox="1"/>
+          <p:nvPr/>
+        </p:nvSpPr>
+        <p:spPr>
+          <a:xfrm>
+            <a:off x="731520" y="1645920"/>
+            <a:ext cx="5303520" cy="4389120"/>
+          </a:xfrm>
+          <a:prstGeom prst="rect">
+            <a:avLst/>
+          </a:prstGeom>
+          <a:noFill/>
+        </p:spPr>
+        <p:txBody>
+          <a:bodyPr wrap="square">
+            <a:spAutoFit/>
+          </a:bodyPr>
+          <a:lstStyle/>
+          <a:p>
+            <a:pPr>
+              <a:spcAft>
+                <a:spcPts val="1400"/>
+              </a:spcAft>
+              <a:defRPr sz="1800" b="1">
+                <a:solidFill>
+                  <a:srgbClr val="FFFFFF"/>
+                </a:solidFill>
+                <a:latin typeface="Arial"/>
+              </a:defRPr>
+            </a:pPr>
+            <a:r>
+              <a:t>Inteligência operacional no pós-venda:</a:t>
+            </a:r>
+          </a:p>
+          <a:p>
+            <a:pPr>
+              <a:spcAft>
+                <a:spcPts val="1000"/>
+              </a:spcAft>
+              <a:defRPr sz="1400">
+                <a:solidFill>
+                  <a:srgbClr val="A1A1AA"/>
+                </a:solidFill>
+                <a:latin typeface="Arial"/>
+              </a:defRPr>
+            </a:pPr>
+            <a:r>
+              <a:t>✨  Geração de descrição de serviços para NF-e a partir de rascunhos informais.</a:t>
+            </a:r>
+          </a:p>
+          <a:p>
+            <a:pPr>
+              <a:spcAft>
+                <a:spcPts val="1000"/>
+              </a:spcAft>
+              <a:defRPr sz="1400">
+                <a:solidFill>
+                  <a:srgbClr val="A1A1AA"/>
+                </a:solidFill>
+                <a:latin typeface="Arial"/>
+              </a:defRPr>
+            </a:pPr>
+            <a:r>
+              <a:t>✨  Sugestão preditiva de serviços adicionais baseada no modelo de uso do carro.</a:t>
+            </a:r>
+          </a:p>
+          <a:p>
+            <a:pPr>
+              <a:spcAft>
+                <a:spcPts val="1000"/>
+              </a:spcAft>
+              <a:defRPr sz="1400">
+                <a:solidFill>
+                  <a:srgbClr val="A1A1AA"/>
+                </a:solidFill>
+                <a:latin typeface="Arial"/>
+              </a:defRPr>
+            </a:pPr>
+            <a:r>
+              <a:t>✨  Análise estatística para identificação preditiva de padrões de falhas mecânicas.</a:t>
+            </a:r>
+          </a:p>
+          <a:p>
+            <a:pPr>
+              <a:spcAft>
+                <a:spcPts val="1000"/>
+              </a:spcAft>
+              <a:defRPr sz="1400">
+                <a:solidFill>
+                  <a:srgbClr val="A1A1AA"/>
+                </a:solidFill>
+                <a:latin typeface="Arial"/>
+              </a:defRPr>
+            </a:pPr>
+            <a:r>
+              <a:t>✨  Relatórios inteligentes para tomadas de decisão sem complexidade.</a:t>
+            </a:r>
+          </a:p>
+          <a:p>
+            <a:pPr>
+              <a:spcAft>
+                <a:spcPts val="1000"/>
+              </a:spcAft>
+              <a:defRPr sz="1400">
+                <a:solidFill>
+                  <a:srgbClr val="A1A1AA"/>
+                </a:solidFill>
+                <a:latin typeface="Arial"/>
+              </a:defRPr>
+            </a:pPr>
+            <a:r>
+              <a:t>✨  Dashboards preditivos com alertas antecipados de manutenção crítica.</a:t>
+            </a:r>
+          </a:p>
+        </p:txBody>
+      </p:sp>
+      <p:sp>
+        <p:nvSpPr>
+          <p:cNvPr id="6" name="Rectangle 5"/>
           <p:cNvSpPr/>
           <p:nvPr/>
         </p:nvSpPr>
         <p:spPr>
           <a:xfrm>
-            <a:off x="731520" y="1828800"/>
-            <a:ext cx="3413455" cy="1828800"/>
+            <a:off x="6400800" y="1645920"/>
+            <a:ext cx="5029200" cy="4114800"/>
           </a:xfrm>
           <a:prstGeom prst="rect">
             <a:avLst/>
           </a:prstGeom>
           <a:solidFill>
-            <a:srgbClr val="101725"/>
+            <a:srgbClr val="121316"/>
           </a:solidFill>
           <a:ln w="12700">
             <a:solidFill>
-              <a:srgbClr val="1E293B"/>
+              <a:srgbClr val="2D2D32"/>
             </a:solidFill>
           </a:ln>
         </p:spPr>
@@ -8545,14 +9724,14 @@
       </p:sp>
       <p:sp>
         <p:nvSpPr>
-          <p:cNvPr id="5" name="TextBox 4"/>
+          <p:cNvPr id="7" name="TextBox 6"/>
           <p:cNvSpPr txBox="1"/>
           <p:nvPr/>
         </p:nvSpPr>
         <p:spPr>
           <a:xfrm>
-            <a:off x="822960" y="1920240"/>
-            <a:ext cx="3230575" cy="1645920"/>
+            <a:off x="6675120" y="1920240"/>
+            <a:ext cx="4480560" cy="3566160"/>
           </a:xfrm>
           <a:prstGeom prst="rect">
             <a:avLst/>
@@ -8567,522 +9746,55 @@
           <a:p>
             <a:pPr>
               <a:spcAft>
-                <a:spcPts val="800"/>
+                <a:spcPts val="1000"/>
               </a:spcAft>
-              <a:defRPr sz="1600" b="1">
-                <a:solidFill>
-                  <a:srgbClr val="38BDF8"/>
-                </a:solidFill>
-                <a:latin typeface="Arial"/>
-              </a:defRPr>
-            </a:pPr>
-            <a:r>
-              <a:t>SaaS Multiempresa</a:t>
-            </a:r>
-          </a:p>
-          <a:p>
-            <a:pPr>
-              <a:defRPr sz="1200">
-                <a:solidFill>
-                  <a:srgbClr val="94A3B8"/>
-                </a:solidFill>
-                <a:latin typeface="Arial"/>
-              </a:defRPr>
-            </a:pPr>
-            <a:r>
-              <a:t>Isolamento lógico absoluto e suporte completo para franquias e filiais.</a:t>
-            </a:r>
-          </a:p>
-        </p:txBody>
-      </p:sp>
-      <p:sp>
-        <p:nvSpPr>
-          <p:cNvPr id="6" name="Rectangle 5"/>
-          <p:cNvSpPr/>
-          <p:nvPr/>
-        </p:nvSpPr>
-        <p:spPr>
-          <a:xfrm>
-            <a:off x="4389120" y="1828800"/>
-            <a:ext cx="3413455" cy="1828800"/>
-          </a:xfrm>
-          <a:prstGeom prst="rect">
-            <a:avLst/>
-          </a:prstGeom>
-          <a:solidFill>
-            <a:srgbClr val="101725"/>
-          </a:solidFill>
-          <a:ln w="12700">
-            <a:solidFill>
-              <a:srgbClr val="1E293B"/>
-            </a:solidFill>
-          </a:ln>
-        </p:spPr>
-        <p:style>
-          <a:lnRef idx="1">
-            <a:schemeClr val="accent1"/>
-          </a:lnRef>
-          <a:fillRef idx="3">
-            <a:schemeClr val="accent1"/>
-          </a:fillRef>
-          <a:effectRef idx="2">
-            <a:schemeClr val="accent1"/>
-          </a:effectRef>
-          <a:fontRef idx="minor">
-            <a:schemeClr val="lt1"/>
-          </a:fontRef>
-        </p:style>
-        <p:txBody>
-          <a:bodyPr rtlCol="0" anchor="ctr"/>
-          <a:lstStyle/>
-          <a:p>
-            <a:pPr algn="ctr"/>
-          </a:p>
-        </p:txBody>
-      </p:sp>
-      <p:sp>
-        <p:nvSpPr>
-          <p:cNvPr id="7" name="TextBox 6"/>
-          <p:cNvSpPr txBox="1"/>
-          <p:nvPr/>
-        </p:nvSpPr>
-        <p:spPr>
-          <a:xfrm>
-            <a:off x="4480559" y="1920240"/>
-            <a:ext cx="3230575" cy="1645920"/>
-          </a:xfrm>
-          <a:prstGeom prst="rect">
-            <a:avLst/>
-          </a:prstGeom>
-          <a:noFill/>
-        </p:spPr>
-        <p:txBody>
-          <a:bodyPr wrap="square">
-            <a:spAutoFit/>
-          </a:bodyPr>
-          <a:lstStyle/>
-          <a:p>
-            <a:pPr>
-              <a:spcAft>
-                <a:spcPts val="800"/>
-              </a:spcAft>
-              <a:defRPr sz="1600" b="1">
-                <a:solidFill>
-                  <a:srgbClr val="38BDF8"/>
-                </a:solidFill>
-                <a:latin typeface="Arial"/>
-              </a:defRPr>
-            </a:pPr>
-            <a:r>
-              <a:t>Tabela FIPE Nativa</a:t>
-            </a:r>
-          </a:p>
-          <a:p>
-            <a:pPr>
-              <a:defRPr sz="1200">
-                <a:solidFill>
-                  <a:srgbClr val="94A3B8"/>
-                </a:solidFill>
-                <a:latin typeface="Arial"/>
-              </a:defRPr>
-            </a:pPr>
-            <a:r>
-              <a:t>Valores atualizados de mercado integrados diretamente às fichas do veículo.</a:t>
-            </a:r>
-          </a:p>
-        </p:txBody>
-      </p:sp>
-      <p:sp>
-        <p:nvSpPr>
-          <p:cNvPr id="8" name="Rectangle 7"/>
-          <p:cNvSpPr/>
-          <p:nvPr/>
-        </p:nvSpPr>
-        <p:spPr>
-          <a:xfrm>
-            <a:off x="8046720" y="1828800"/>
-            <a:ext cx="3413455" cy="1828800"/>
-          </a:xfrm>
-          <a:prstGeom prst="rect">
-            <a:avLst/>
-          </a:prstGeom>
-          <a:solidFill>
-            <a:srgbClr val="101725"/>
-          </a:solidFill>
-          <a:ln w="12700">
-            <a:solidFill>
-              <a:srgbClr val="1E293B"/>
-            </a:solidFill>
-          </a:ln>
-        </p:spPr>
-        <p:style>
-          <a:lnRef idx="1">
-            <a:schemeClr val="accent1"/>
-          </a:lnRef>
-          <a:fillRef idx="3">
-            <a:schemeClr val="accent1"/>
-          </a:fillRef>
-          <a:effectRef idx="2">
-            <a:schemeClr val="accent1"/>
-          </a:effectRef>
-          <a:fontRef idx="minor">
-            <a:schemeClr val="lt1"/>
-          </a:fontRef>
-        </p:style>
-        <p:txBody>
-          <a:bodyPr rtlCol="0" anchor="ctr"/>
-          <a:lstStyle/>
-          <a:p>
-            <a:pPr algn="ctr"/>
-          </a:p>
-        </p:txBody>
-      </p:sp>
-      <p:sp>
-        <p:nvSpPr>
-          <p:cNvPr id="9" name="TextBox 8"/>
-          <p:cNvSpPr txBox="1"/>
-          <p:nvPr/>
-        </p:nvSpPr>
-        <p:spPr>
-          <a:xfrm>
-            <a:off x="8138160" y="1920240"/>
-            <a:ext cx="3230575" cy="1645920"/>
-          </a:xfrm>
-          <a:prstGeom prst="rect">
-            <a:avLst/>
-          </a:prstGeom>
-          <a:noFill/>
-        </p:spPr>
-        <p:txBody>
-          <a:bodyPr wrap="square">
-            <a:spAutoFit/>
-          </a:bodyPr>
-          <a:lstStyle/>
-          <a:p>
-            <a:pPr>
-              <a:spcAft>
-                <a:spcPts val="800"/>
-              </a:spcAft>
-              <a:defRPr sz="1600" b="1">
-                <a:solidFill>
-                  <a:srgbClr val="38BDF8"/>
-                </a:solidFill>
-                <a:latin typeface="Arial"/>
-              </a:defRPr>
-            </a:pPr>
-            <a:r>
-              <a:t>ReceitaWS Integrada</a:t>
-            </a:r>
-          </a:p>
-          <a:p>
-            <a:pPr>
-              <a:defRPr sz="1200">
-                <a:solidFill>
-                  <a:srgbClr val="94A3B8"/>
-                </a:solidFill>
-                <a:latin typeface="Arial"/>
-              </a:defRPr>
-            </a:pPr>
-            <a:r>
-              <a:t>Preenchimento imediato de cadastros de pessoas jurídicas usando apenas CNPJ.</a:t>
-            </a:r>
-          </a:p>
-        </p:txBody>
-      </p:sp>
-      <p:sp>
-        <p:nvSpPr>
-          <p:cNvPr id="10" name="Rectangle 9"/>
-          <p:cNvSpPr/>
-          <p:nvPr/>
-        </p:nvSpPr>
-        <p:spPr>
-          <a:xfrm>
-            <a:off x="731520" y="4023360"/>
-            <a:ext cx="3413455" cy="1828800"/>
-          </a:xfrm>
-          <a:prstGeom prst="rect">
-            <a:avLst/>
-          </a:prstGeom>
-          <a:solidFill>
-            <a:srgbClr val="101725"/>
-          </a:solidFill>
-          <a:ln w="12700">
-            <a:solidFill>
-              <a:srgbClr val="1E293B"/>
-            </a:solidFill>
-          </a:ln>
-        </p:spPr>
-        <p:style>
-          <a:lnRef idx="1">
-            <a:schemeClr val="accent1"/>
-          </a:lnRef>
-          <a:fillRef idx="3">
-            <a:schemeClr val="accent1"/>
-          </a:fillRef>
-          <a:effectRef idx="2">
-            <a:schemeClr val="accent1"/>
-          </a:effectRef>
-          <a:fontRef idx="minor">
-            <a:schemeClr val="lt1"/>
-          </a:fontRef>
-        </p:style>
-        <p:txBody>
-          <a:bodyPr rtlCol="0" anchor="ctr"/>
-          <a:lstStyle/>
-          <a:p>
-            <a:pPr algn="ctr"/>
-          </a:p>
-        </p:txBody>
-      </p:sp>
-      <p:sp>
-        <p:nvSpPr>
-          <p:cNvPr id="11" name="TextBox 10"/>
-          <p:cNvSpPr txBox="1"/>
-          <p:nvPr/>
-        </p:nvSpPr>
-        <p:spPr>
-          <a:xfrm>
-            <a:off x="822960" y="4114800"/>
-            <a:ext cx="3230575" cy="1645920"/>
-          </a:xfrm>
-          <a:prstGeom prst="rect">
-            <a:avLst/>
-          </a:prstGeom>
-          <a:noFill/>
-        </p:spPr>
-        <p:txBody>
-          <a:bodyPr wrap="square">
-            <a:spAutoFit/>
-          </a:bodyPr>
-          <a:lstStyle/>
-          <a:p>
-            <a:pPr>
-              <a:spcAft>
-                <a:spcPts val="800"/>
-              </a:spcAft>
-              <a:defRPr sz="1600" b="1">
-                <a:solidFill>
-                  <a:srgbClr val="38BDF8"/>
-                </a:solidFill>
-                <a:latin typeface="Arial"/>
-              </a:defRPr>
-            </a:pPr>
-            <a:r>
-              <a:t>Faturamento NF-e</a:t>
-            </a:r>
-          </a:p>
-          <a:p>
-            <a:pPr>
-              <a:defRPr sz="1200">
-                <a:solidFill>
-                  <a:srgbClr val="94A3B8"/>
-                </a:solidFill>
-                <a:latin typeface="Arial"/>
-              </a:defRPr>
-            </a:pPr>
-            <a:r>
-              <a:t>Emissão tributária ágil em conformidade com as legislações vigentes.</a:t>
-            </a:r>
-          </a:p>
-        </p:txBody>
-      </p:sp>
-      <p:sp>
-        <p:nvSpPr>
-          <p:cNvPr id="12" name="Rectangle 11"/>
-          <p:cNvSpPr/>
-          <p:nvPr/>
-        </p:nvSpPr>
-        <p:spPr>
-          <a:xfrm>
-            <a:off x="4389120" y="4023360"/>
-            <a:ext cx="3413455" cy="1828800"/>
-          </a:xfrm>
-          <a:prstGeom prst="rect">
-            <a:avLst/>
-          </a:prstGeom>
-          <a:solidFill>
-            <a:srgbClr val="101725"/>
-          </a:solidFill>
-          <a:ln w="12700">
-            <a:solidFill>
-              <a:srgbClr val="1E293B"/>
-            </a:solidFill>
-          </a:ln>
-        </p:spPr>
-        <p:style>
-          <a:lnRef idx="1">
-            <a:schemeClr val="accent1"/>
-          </a:lnRef>
-          <a:fillRef idx="3">
-            <a:schemeClr val="accent1"/>
-          </a:fillRef>
-          <a:effectRef idx="2">
-            <a:schemeClr val="accent1"/>
-          </a:effectRef>
-          <a:fontRef idx="minor">
-            <a:schemeClr val="lt1"/>
-          </a:fontRef>
-        </p:style>
-        <p:txBody>
-          <a:bodyPr rtlCol="0" anchor="ctr"/>
-          <a:lstStyle/>
-          <a:p>
-            <a:pPr algn="ctr"/>
-          </a:p>
-        </p:txBody>
-      </p:sp>
-      <p:sp>
-        <p:nvSpPr>
-          <p:cNvPr id="13" name="TextBox 12"/>
-          <p:cNvSpPr txBox="1"/>
-          <p:nvPr/>
-        </p:nvSpPr>
-        <p:spPr>
-          <a:xfrm>
-            <a:off x="4480559" y="4114800"/>
-            <a:ext cx="3230575" cy="1645920"/>
-          </a:xfrm>
-          <a:prstGeom prst="rect">
-            <a:avLst/>
-          </a:prstGeom>
-          <a:noFill/>
-        </p:spPr>
-        <p:txBody>
-          <a:bodyPr wrap="square">
-            <a:spAutoFit/>
-          </a:bodyPr>
-          <a:lstStyle/>
-          <a:p>
-            <a:pPr>
-              <a:spcAft>
-                <a:spcPts val="800"/>
-              </a:spcAft>
-              <a:defRPr sz="1600" b="1">
-                <a:solidFill>
-                  <a:srgbClr val="38BDF8"/>
-                </a:solidFill>
-                <a:latin typeface="Arial"/>
-              </a:defRPr>
-            </a:pPr>
-            <a:r>
-              <a:t>Segurança &amp; LGPD</a:t>
-            </a:r>
-          </a:p>
-          <a:p>
-            <a:pPr>
-              <a:defRPr sz="1200">
-                <a:solidFill>
-                  <a:srgbClr val="94A3B8"/>
-                </a:solidFill>
-                <a:latin typeface="Arial"/>
-              </a:defRPr>
-            </a:pPr>
-            <a:r>
-              <a:t>Dados protegidos com criptografia de alto nível e políticas rígidas de acesso.</a:t>
-            </a:r>
-          </a:p>
-        </p:txBody>
-      </p:sp>
-      <p:sp>
-        <p:nvSpPr>
-          <p:cNvPr id="14" name="Rectangle 13"/>
-          <p:cNvSpPr/>
-          <p:nvPr/>
-        </p:nvSpPr>
-        <p:spPr>
-          <a:xfrm>
-            <a:off x="8046720" y="4023360"/>
-            <a:ext cx="3413455" cy="1828800"/>
-          </a:xfrm>
-          <a:prstGeom prst="rect">
-            <a:avLst/>
-          </a:prstGeom>
-          <a:solidFill>
-            <a:srgbClr val="101725"/>
-          </a:solidFill>
-          <a:ln w="12700">
-            <a:solidFill>
-              <a:srgbClr val="1E293B"/>
-            </a:solidFill>
-          </a:ln>
-        </p:spPr>
-        <p:style>
-          <a:lnRef idx="1">
-            <a:schemeClr val="accent1"/>
-          </a:lnRef>
-          <a:fillRef idx="3">
-            <a:schemeClr val="accent1"/>
-          </a:fillRef>
-          <a:effectRef idx="2">
-            <a:schemeClr val="accent1"/>
-          </a:effectRef>
-          <a:fontRef idx="minor">
-            <a:schemeClr val="lt1"/>
-          </a:fontRef>
-        </p:style>
-        <p:txBody>
-          <a:bodyPr rtlCol="0" anchor="ctr"/>
-          <a:lstStyle/>
-          <a:p>
-            <a:pPr algn="ctr"/>
-          </a:p>
-        </p:txBody>
-      </p:sp>
-      <p:sp>
-        <p:nvSpPr>
-          <p:cNvPr id="15" name="TextBox 14"/>
-          <p:cNvSpPr txBox="1"/>
-          <p:nvPr/>
-        </p:nvSpPr>
-        <p:spPr>
-          <a:xfrm>
-            <a:off x="8138160" y="4114800"/>
-            <a:ext cx="3230575" cy="1645920"/>
-          </a:xfrm>
-          <a:prstGeom prst="rect">
-            <a:avLst/>
-          </a:prstGeom>
-          <a:noFill/>
-        </p:spPr>
-        <p:txBody>
-          <a:bodyPr wrap="square">
-            <a:spAutoFit/>
-          </a:bodyPr>
-          <a:lstStyle/>
-          <a:p>
-            <a:pPr>
-              <a:spcAft>
-                <a:spcPts val="800"/>
-              </a:spcAft>
-              <a:defRPr sz="1600" b="1">
-                <a:solidFill>
-                  <a:srgbClr val="38BDF8"/>
-                </a:solidFill>
-                <a:latin typeface="Arial"/>
-              </a:defRPr>
-            </a:pPr>
-            <a:r>
-              <a:t>Cloud Elasticidade</a:t>
-            </a:r>
-          </a:p>
-          <a:p>
-            <a:pPr>
-              <a:defRPr sz="1200">
-                <a:solidFill>
-                  <a:srgbClr val="94A3B8"/>
-                </a:solidFill>
-                <a:latin typeface="Arial"/>
-              </a:defRPr>
-            </a:pPr>
-            <a:r>
-              <a:t>Hospedagem elástica AWS e atualizações automáticas sem necessidade de intervenção.</a:t>
-            </a:r>
-          </a:p>
-        </p:txBody>
-      </p:sp>
-      <p:sp>
-        <p:nvSpPr>
-          <p:cNvPr id="16" name="TextBox 15"/>
+              <a:defRPr sz="1400" b="1">
+                <a:solidFill>
+                  <a:srgbClr val="FF7900"/>
+                </a:solidFill>
+                <a:latin typeface="Arial"/>
+              </a:defRPr>
+            </a:pPr>
+            <a:r>
+              <a:t>EXEMPLO DE USO PRÁTICO (CMH-AI)</a:t>
+            </a:r>
+          </a:p>
+          <a:p>
+            <a:pPr>
+              <a:defRPr sz="1300">
+                <a:solidFill>
+                  <a:srgbClr val="A1A1AA"/>
+                </a:solidFill>
+                <a:latin typeface="Arial"/>
+              </a:defRPr>
+            </a:pPr>
+            <a:r>
+              <a:t>Rascunho de Entrada do Mecânico:</a:t>
+            </a:r>
+            <a:br/>
+            <a:r>
+              <a:t>'troca oleo velas filtro ar Corolla'</a:t>
+            </a:r>
+            <a:br/>
+            <a:br/>
+            <a:r>
+              <a:t>Retorno da IA de Faturamento:</a:t>
+            </a:r>
+            <a:br/>
+            <a:r>
+              <a:t>'Prestação de serviços mecânicos englobando diagnóstico computadorizado de injeção, substituição preventiva do filtro de ar e velas de ignição originais, com revisão detalhada do plano de lubrificação do motor.'</a:t>
+            </a:r>
+            <a:br/>
+            <a:br/>
+            <a:r>
+              <a:t>Benefício: Economia de tempo administrativa de recepção.</a:t>
+            </a:r>
+          </a:p>
+        </p:txBody>
+      </p:sp>
+      <p:sp>
+        <p:nvSpPr>
+          <p:cNvPr id="8" name="TextBox 7"/>
           <p:cNvSpPr txBox="1"/>
           <p:nvPr/>
         </p:nvSpPr>
@@ -9105,13 +9817,13 @@
             <a:pPr>
               <a:defRPr sz="850">
                 <a:solidFill>
-                  <a:srgbClr val="94A3B8"/>
-                </a:solidFill>
-                <a:latin typeface="Arial"/>
-              </a:defRPr>
-            </a:pPr>
-            <a:r>
-              <a:t>SUZANO IT   |   Tecnologia para Oficinas e Frotas                                                                                   Slide 8 de 14</a:t>
+                  <a:srgbClr val="A1A1AA"/>
+                </a:solidFill>
+                <a:latin typeface="Arial"/>
+              </a:defRPr>
+            </a:pPr>
+            <a:r>
+              <a:t>SUZANO IT   |   Tecnologia que move frotas.                                                                                          Slide 8 de 15</a:t>
             </a:r>
           </a:p>
         </p:txBody>
@@ -9127,14 +9839,6 @@
 <file path=ppt/slides/slide9.xml><?xml version="1.0" encoding="utf-8"?>
 <p:sld xmlns:a="http://schemas.openxmlformats.org/drawingml/2006/main" xmlns:p="http://schemas.openxmlformats.org/presentationml/2006/main" xmlns:r="http://schemas.openxmlformats.org/officeDocument/2006/relationships">
   <p:cSld>
-    <p:bg>
-      <p:bgPr>
-        <a:solidFill>
-          <a:srgbClr val="080B11"/>
-        </a:solidFill>
-        <a:effectLst/>
-      </p:bgPr>
-    </p:bg>
     <p:spTree>
       <p:nvGrpSpPr>
         <p:cNvPr id="1" name=""/>
@@ -9142,9 +9846,33 @@
         <p:nvPr/>
       </p:nvGrpSpPr>
       <p:grpSpPr/>
-      <p:sp>
-        <p:nvSpPr>
-          <p:cNvPr id="2" name="TextBox 1"/>
+      <p:pic>
+        <p:nvPicPr>
+          <p:cNvPr id="2" name="Picture 1" descr="background.png"/>
+          <p:cNvPicPr>
+            <a:picLocks noChangeAspect="1"/>
+          </p:cNvPicPr>
+          <p:nvPr/>
+        </p:nvPicPr>
+        <p:blipFill>
+          <a:blip r:embed="rId2"/>
+          <a:stretch>
+            <a:fillRect/>
+          </a:stretch>
+        </p:blipFill>
+        <p:spPr>
+          <a:xfrm>
+            <a:off x="0" y="0"/>
+            <a:ext cx="12191695" cy="6858000"/>
+          </a:xfrm>
+          <a:prstGeom prst="rect">
+            <a:avLst/>
+          </a:prstGeom>
+        </p:spPr>
+      </p:pic>
+      <p:sp>
+        <p:nvSpPr>
+          <p:cNvPr id="3" name="TextBox 2"/>
           <p:cNvSpPr txBox="1"/>
           <p:nvPr/>
         </p:nvSpPr>
@@ -9167,20 +9895,20 @@
             <a:pPr>
               <a:defRPr sz="1000" b="1">
                 <a:solidFill>
-                  <a:srgbClr val="38BDF8"/>
-                </a:solidFill>
-                <a:latin typeface="Arial"/>
-              </a:defRPr>
-            </a:pPr>
-            <a:r>
-              <a:t>MONETIZAÇÃO SAAS</a:t>
-            </a:r>
-          </a:p>
-        </p:txBody>
-      </p:sp>
-      <p:sp>
-        <p:nvSpPr>
-          <p:cNvPr id="3" name="TextBox 2"/>
+                  <a:srgbClr val="FF7900"/>
+                </a:solidFill>
+                <a:latin typeface="Arial"/>
+              </a:defRPr>
+            </a:pPr>
+            <a:r>
+              <a:t>POR QUE A SUZANO IT?</a:t>
+            </a:r>
+          </a:p>
+        </p:txBody>
+      </p:sp>
+      <p:sp>
+        <p:nvSpPr>
+          <p:cNvPr id="4" name="TextBox 3"/>
           <p:cNvSpPr txBox="1"/>
           <p:nvPr/>
         </p:nvSpPr>
@@ -9203,49 +9931,13 @@
             <a:pPr>
               <a:defRPr sz="2800" b="1">
                 <a:solidFill>
-                  <a:srgbClr val="F8FAFC"/>
-                </a:solidFill>
-                <a:latin typeface="Arial"/>
-              </a:defRPr>
-            </a:pPr>
-            <a:r>
-              <a:t>Modelo de Negócio</a:t>
-            </a:r>
-          </a:p>
-        </p:txBody>
-      </p:sp>
-      <p:sp>
-        <p:nvSpPr>
-          <p:cNvPr id="4" name="TextBox 3"/>
-          <p:cNvSpPr txBox="1"/>
-          <p:nvPr/>
-        </p:nvSpPr>
-        <p:spPr>
-          <a:xfrm>
-            <a:off x="731520" y="1463040"/>
-            <a:ext cx="10698480" cy="548640"/>
-          </a:xfrm>
-          <a:prstGeom prst="rect">
-            <a:avLst/>
-          </a:prstGeom>
-          <a:noFill/>
-        </p:spPr>
-        <p:txBody>
-          <a:bodyPr wrap="none">
-            <a:spAutoFit/>
-          </a:bodyPr>
-          <a:lstStyle/>
-          <a:p>
-            <a:pPr>
-              <a:defRPr sz="1600">
-                <a:solidFill>
-                  <a:srgbClr val="94A3B8"/>
-                </a:solidFill>
-                <a:latin typeface="Arial"/>
-              </a:defRPr>
-            </a:pPr>
-            <a:r>
-              <a:t>Assinaturas mensais recorrentes (MRR) estruturadas para crescer conforme o uso e porte do cliente.</a:t>
+                  <a:srgbClr val="FFFFFF"/>
+                </a:solidFill>
+                <a:latin typeface="Arial"/>
+              </a:defRPr>
+            </a:pPr>
+            <a:r>
+              <a:t>Diferenciais Competitivos</a:t>
             </a:r>
           </a:p>
         </p:txBody>
@@ -9258,18 +9950,18 @@
         </p:nvSpPr>
         <p:spPr>
           <a:xfrm>
-            <a:off x="731520" y="2103120"/>
-            <a:ext cx="3413455" cy="3931920"/>
+            <a:off x="731520" y="1828800"/>
+            <a:ext cx="3413455" cy="1828800"/>
           </a:xfrm>
           <a:prstGeom prst="rect">
             <a:avLst/>
           </a:prstGeom>
           <a:solidFill>
-            <a:srgbClr val="101725"/>
+            <a:srgbClr val="121316"/>
           </a:solidFill>
           <a:ln w="12700">
             <a:solidFill>
-              <a:srgbClr val="1E293B"/>
+              <a:srgbClr val="2D2D32"/>
             </a:solidFill>
           </a:ln>
         </p:spPr>
@@ -9303,8 +9995,8 @@
         </p:nvSpPr>
         <p:spPr>
           <a:xfrm>
-            <a:off x="822960" y="2286000"/>
-            <a:ext cx="3230575" cy="3566160"/>
+            <a:off x="822960" y="1920240"/>
+            <a:ext cx="3230575" cy="1645920"/>
           </a:xfrm>
           <a:prstGeom prst="rect">
             <a:avLst/>
@@ -9319,113 +10011,30 @@
           <a:p>
             <a:pPr>
               <a:spcAft>
-                <a:spcPts val="400"/>
+                <a:spcPts val="800"/>
               </a:spcAft>
-              <a:defRPr sz="1800" b="1">
-                <a:solidFill>
-                  <a:srgbClr val="38BDF8"/>
-                </a:solidFill>
-                <a:latin typeface="Arial"/>
-              </a:defRPr>
-            </a:pPr>
-            <a:r>
-              <a:t>STARTER</a:t>
-            </a:r>
-          </a:p>
-          <a:p>
-            <a:pPr>
-              <a:spcAft>
-                <a:spcPts val="200"/>
-              </a:spcAft>
-              <a:defRPr sz="2200" b="1">
-                <a:solidFill>
-                  <a:srgbClr val="F8FAFC"/>
-                </a:solidFill>
-                <a:latin typeface="Arial"/>
-              </a:defRPr>
-            </a:pPr>
-            <a:r>
-              <a:t>R$ 199 / mês</a:t>
-            </a:r>
-          </a:p>
-          <a:p>
-            <a:pPr>
-              <a:spcAft>
-                <a:spcPts val="1800"/>
-              </a:spcAft>
+              <a:defRPr sz="1600" b="1">
+                <a:solidFill>
+                  <a:srgbClr val="FF7900"/>
+                </a:solidFill>
+                <a:latin typeface="Arial"/>
+              </a:defRPr>
+            </a:pPr>
+            <a:r>
+              <a:t>SaaS Multiempresa</a:t>
+            </a:r>
+          </a:p>
+          <a:p>
+            <a:pPr>
               <a:defRPr sz="1200">
                 <a:solidFill>
-                  <a:srgbClr val="94A3B8"/>
-                </a:solidFill>
-                <a:latin typeface="Arial"/>
-              </a:defRPr>
-            </a:pPr>
-            <a:r>
-              <a:t>Pequenas Oficinas</a:t>
-            </a:r>
-          </a:p>
-          <a:p>
-            <a:pPr>
-              <a:spcAft>
-                <a:spcPts val="600"/>
-              </a:spcAft>
-              <a:defRPr sz="1200">
-                <a:solidFill>
-                  <a:srgbClr val="94A3B8"/>
-                </a:solidFill>
-                <a:latin typeface="Arial"/>
-              </a:defRPr>
-            </a:pPr>
-            <a:r>
-              <a:t>•  Funcionalidades essenciais</a:t>
-            </a:r>
-          </a:p>
-          <a:p>
-            <a:pPr>
-              <a:spcAft>
-                <a:spcPts val="600"/>
-              </a:spcAft>
-              <a:defRPr sz="1200">
-                <a:solidFill>
-                  <a:srgbClr val="94A3B8"/>
-                </a:solidFill>
-                <a:latin typeface="Arial"/>
-              </a:defRPr>
-            </a:pPr>
-            <a:r>
-              <a:t>•  Gestão de OS e Cadastros</a:t>
-            </a:r>
-          </a:p>
-          <a:p>
-            <a:pPr>
-              <a:spcAft>
-                <a:spcPts val="600"/>
-              </a:spcAft>
-              <a:defRPr sz="1200">
-                <a:solidFill>
-                  <a:srgbClr val="94A3B8"/>
-                </a:solidFill>
-                <a:latin typeface="Arial"/>
-              </a:defRPr>
-            </a:pPr>
-            <a:r>
-              <a:t>•  Orçamentos comerciais</a:t>
-            </a:r>
-          </a:p>
-          <a:p>
-            <a:pPr>
-              <a:spcAft>
-                <a:spcPts val="600"/>
-              </a:spcAft>
-              <a:defRPr sz="1200">
-                <a:solidFill>
-                  <a:srgbClr val="94A3B8"/>
-                </a:solidFill>
-                <a:latin typeface="Arial"/>
-              </a:defRPr>
-            </a:pPr>
-            <a:r>
-              <a:t>•  Suporte digital básico</a:t>
+                  <a:srgbClr val="A1A1AA"/>
+                </a:solidFill>
+                <a:latin typeface="Arial"/>
+              </a:defRPr>
+            </a:pPr>
+            <a:r>
+              <a:t>Isolamento lógico absoluto e suporte completo para franquias e filiais.</a:t>
             </a:r>
           </a:p>
         </p:txBody>
@@ -9438,18 +10047,18 @@
         </p:nvSpPr>
         <p:spPr>
           <a:xfrm>
-            <a:off x="4389120" y="2103120"/>
-            <a:ext cx="3413455" cy="3931920"/>
+            <a:off x="4389120" y="1828800"/>
+            <a:ext cx="3413455" cy="1828800"/>
           </a:xfrm>
           <a:prstGeom prst="rect">
             <a:avLst/>
           </a:prstGeom>
           <a:solidFill>
-            <a:srgbClr val="121E31"/>
+            <a:srgbClr val="121316"/>
           </a:solidFill>
           <a:ln w="12700">
             <a:solidFill>
-              <a:srgbClr val="1E293B"/>
+              <a:srgbClr val="2D2D32"/>
             </a:solidFill>
           </a:ln>
         </p:spPr>
@@ -9483,8 +10092,8 @@
         </p:nvSpPr>
         <p:spPr>
           <a:xfrm>
-            <a:off x="4480559" y="2286000"/>
-            <a:ext cx="3230575" cy="3566160"/>
+            <a:off x="4480559" y="1920240"/>
+            <a:ext cx="3230575" cy="1645920"/>
           </a:xfrm>
           <a:prstGeom prst="rect">
             <a:avLst/>
@@ -9499,113 +10108,30 @@
           <a:p>
             <a:pPr>
               <a:spcAft>
-                <a:spcPts val="400"/>
+                <a:spcPts val="800"/>
               </a:spcAft>
-              <a:defRPr sz="1800" b="1">
-                <a:solidFill>
-                  <a:srgbClr val="6366F1"/>
-                </a:solidFill>
-                <a:latin typeface="Arial"/>
-              </a:defRPr>
-            </a:pPr>
-            <a:r>
-              <a:t>PROFESSIONAL</a:t>
-            </a:r>
-          </a:p>
-          <a:p>
-            <a:pPr>
-              <a:spcAft>
-                <a:spcPts val="200"/>
-              </a:spcAft>
-              <a:defRPr sz="2200" b="1">
-                <a:solidFill>
-                  <a:srgbClr val="F8FAFC"/>
-                </a:solidFill>
-                <a:latin typeface="Arial"/>
-              </a:defRPr>
-            </a:pPr>
-            <a:r>
-              <a:t>R$ 499 / mês</a:t>
-            </a:r>
-          </a:p>
-          <a:p>
-            <a:pPr>
-              <a:spcAft>
-                <a:spcPts val="1800"/>
-              </a:spcAft>
+              <a:defRPr sz="1600" b="1">
+                <a:solidFill>
+                  <a:srgbClr val="FF7900"/>
+                </a:solidFill>
+                <a:latin typeface="Arial"/>
+              </a:defRPr>
+            </a:pPr>
+            <a:r>
+              <a:t>Tabela FIPE Nativa</a:t>
+            </a:r>
+          </a:p>
+          <a:p>
+            <a:pPr>
               <a:defRPr sz="1200">
                 <a:solidFill>
-                  <a:srgbClr val="94A3B8"/>
-                </a:solidFill>
-                <a:latin typeface="Arial"/>
-              </a:defRPr>
-            </a:pPr>
-            <a:r>
-              <a:t>Empresas em Crescimento</a:t>
-            </a:r>
-          </a:p>
-          <a:p>
-            <a:pPr>
-              <a:spcAft>
-                <a:spcPts val="600"/>
-              </a:spcAft>
-              <a:defRPr sz="1200">
-                <a:solidFill>
-                  <a:srgbClr val="94A3B8"/>
-                </a:solidFill>
-                <a:latin typeface="Arial"/>
-              </a:defRPr>
-            </a:pPr>
-            <a:r>
-              <a:t>•  Gestão de Oficina completa</a:t>
-            </a:r>
-          </a:p>
-          <a:p>
-            <a:pPr>
-              <a:spcAft>
-                <a:spcPts val="600"/>
-              </a:spcAft>
-              <a:defRPr sz="1200">
-                <a:solidFill>
-                  <a:srgbClr val="94A3B8"/>
-                </a:solidFill>
-                <a:latin typeface="Arial"/>
-              </a:defRPr>
-            </a:pPr>
-            <a:r>
-              <a:t>•  Módulo de Frotas básico</a:t>
-            </a:r>
-          </a:p>
-          <a:p>
-            <a:pPr>
-              <a:spcAft>
-                <a:spcPts val="600"/>
-              </a:spcAft>
-              <a:defRPr sz="1200">
-                <a:solidFill>
-                  <a:srgbClr val="94A3B8"/>
-                </a:solidFill>
-                <a:latin typeface="Arial"/>
-              </a:defRPr>
-            </a:pPr>
-            <a:r>
-              <a:t>•  Controle financeiro avançado</a:t>
-            </a:r>
-          </a:p>
-          <a:p>
-            <a:pPr>
-              <a:spcAft>
-                <a:spcPts val="600"/>
-              </a:spcAft>
-              <a:defRPr sz="1200">
-                <a:solidFill>
-                  <a:srgbClr val="94A3B8"/>
-                </a:solidFill>
-                <a:latin typeface="Arial"/>
-              </a:defRPr>
-            </a:pPr>
-            <a:r>
-              <a:t>•  Emissão integrada de NF-e</a:t>
+                  <a:srgbClr val="A1A1AA"/>
+                </a:solidFill>
+                <a:latin typeface="Arial"/>
+              </a:defRPr>
+            </a:pPr>
+            <a:r>
+              <a:t>Valores atualizados de mercado integrados diretamente às fichas do veículo.</a:t>
             </a:r>
           </a:p>
         </p:txBody>
@@ -9618,18 +10144,18 @@
         </p:nvSpPr>
         <p:spPr>
           <a:xfrm>
-            <a:off x="8046720" y="2103120"/>
-            <a:ext cx="3413455" cy="3931920"/>
+            <a:off x="8046720" y="1828800"/>
+            <a:ext cx="3413455" cy="1828800"/>
           </a:xfrm>
           <a:prstGeom prst="rect">
             <a:avLst/>
           </a:prstGeom>
           <a:solidFill>
-            <a:srgbClr val="101725"/>
+            <a:srgbClr val="121316"/>
           </a:solidFill>
           <a:ln w="12700">
             <a:solidFill>
-              <a:srgbClr val="1E293B"/>
+              <a:srgbClr val="2D2D32"/>
             </a:solidFill>
           </a:ln>
         </p:spPr>
@@ -9663,8 +10189,8 @@
         </p:nvSpPr>
         <p:spPr>
           <a:xfrm>
-            <a:off x="8138160" y="2286000"/>
-            <a:ext cx="3230575" cy="3566160"/>
+            <a:off x="8138160" y="1920240"/>
+            <a:ext cx="3230575" cy="1645920"/>
           </a:xfrm>
           <a:prstGeom prst="rect">
             <a:avLst/>
@@ -9679,120 +10205,328 @@
           <a:p>
             <a:pPr>
               <a:spcAft>
-                <a:spcPts val="400"/>
+                <a:spcPts val="800"/>
               </a:spcAft>
-              <a:defRPr sz="1800" b="1">
-                <a:solidFill>
-                  <a:srgbClr val="38BDF8"/>
-                </a:solidFill>
-                <a:latin typeface="Arial"/>
-              </a:defRPr>
-            </a:pPr>
-            <a:r>
-              <a:t>ENTERPRISE</a:t>
-            </a:r>
-          </a:p>
+              <a:defRPr sz="1600" b="1">
+                <a:solidFill>
+                  <a:srgbClr val="FF7900"/>
+                </a:solidFill>
+                <a:latin typeface="Arial"/>
+              </a:defRPr>
+            </a:pPr>
+            <a:r>
+              <a:t>ReceitaWS Integrada</a:t>
+            </a:r>
+          </a:p>
+          <a:p>
+            <a:pPr>
+              <a:defRPr sz="1200">
+                <a:solidFill>
+                  <a:srgbClr val="A1A1AA"/>
+                </a:solidFill>
+                <a:latin typeface="Arial"/>
+              </a:defRPr>
+            </a:pPr>
+            <a:r>
+              <a:t>Preenchimento imediato de cadastros de pessoas jurídicas usando apenas CNPJ.</a:t>
+            </a:r>
+          </a:p>
+        </p:txBody>
+      </p:sp>
+      <p:sp>
+        <p:nvSpPr>
+          <p:cNvPr id="11" name="Rectangle 10"/>
+          <p:cNvSpPr/>
+          <p:nvPr/>
+        </p:nvSpPr>
+        <p:spPr>
+          <a:xfrm>
+            <a:off x="731520" y="4023360"/>
+            <a:ext cx="3413455" cy="1828800"/>
+          </a:xfrm>
+          <a:prstGeom prst="rect">
+            <a:avLst/>
+          </a:prstGeom>
+          <a:solidFill>
+            <a:srgbClr val="121316"/>
+          </a:solidFill>
+          <a:ln w="12700">
+            <a:solidFill>
+              <a:srgbClr val="2D2D32"/>
+            </a:solidFill>
+          </a:ln>
+        </p:spPr>
+        <p:style>
+          <a:lnRef idx="1">
+            <a:schemeClr val="accent1"/>
+          </a:lnRef>
+          <a:fillRef idx="3">
+            <a:schemeClr val="accent1"/>
+          </a:fillRef>
+          <a:effectRef idx="2">
+            <a:schemeClr val="accent1"/>
+          </a:effectRef>
+          <a:fontRef idx="minor">
+            <a:schemeClr val="lt1"/>
+          </a:fontRef>
+        </p:style>
+        <p:txBody>
+          <a:bodyPr rtlCol="0" anchor="ctr"/>
+          <a:lstStyle/>
+          <a:p>
+            <a:pPr algn="ctr"/>
+          </a:p>
+        </p:txBody>
+      </p:sp>
+      <p:sp>
+        <p:nvSpPr>
+          <p:cNvPr id="12" name="TextBox 11"/>
+          <p:cNvSpPr txBox="1"/>
+          <p:nvPr/>
+        </p:nvSpPr>
+        <p:spPr>
+          <a:xfrm>
+            <a:off x="822960" y="4114800"/>
+            <a:ext cx="3230575" cy="1645920"/>
+          </a:xfrm>
+          <a:prstGeom prst="rect">
+            <a:avLst/>
+          </a:prstGeom>
+          <a:noFill/>
+        </p:spPr>
+        <p:txBody>
+          <a:bodyPr wrap="square">
+            <a:spAutoFit/>
+          </a:bodyPr>
+          <a:lstStyle/>
           <a:p>
             <a:pPr>
               <a:spcAft>
-                <a:spcPts val="200"/>
+                <a:spcPts val="800"/>
               </a:spcAft>
-              <a:defRPr sz="2200" b="1">
-                <a:solidFill>
-                  <a:srgbClr val="F8FAFC"/>
-                </a:solidFill>
-                <a:latin typeface="Arial"/>
-              </a:defRPr>
-            </a:pPr>
-            <a:r>
-              <a:t>Sob Consulta</a:t>
-            </a:r>
-          </a:p>
+              <a:defRPr sz="1600" b="1">
+                <a:solidFill>
+                  <a:srgbClr val="FF7900"/>
+                </a:solidFill>
+                <a:latin typeface="Arial"/>
+              </a:defRPr>
+            </a:pPr>
+            <a:r>
+              <a:t>Faturamento NF-e</a:t>
+            </a:r>
+          </a:p>
+          <a:p>
+            <a:pPr>
+              <a:defRPr sz="1200">
+                <a:solidFill>
+                  <a:srgbClr val="A1A1AA"/>
+                </a:solidFill>
+                <a:latin typeface="Arial"/>
+              </a:defRPr>
+            </a:pPr>
+            <a:r>
+              <a:t>Emissão tributária ágil em conformidade com as legislações vigentes.</a:t>
+            </a:r>
+          </a:p>
+        </p:txBody>
+      </p:sp>
+      <p:sp>
+        <p:nvSpPr>
+          <p:cNvPr id="13" name="Rectangle 12"/>
+          <p:cNvSpPr/>
+          <p:nvPr/>
+        </p:nvSpPr>
+        <p:spPr>
+          <a:xfrm>
+            <a:off x="4389120" y="4023360"/>
+            <a:ext cx="3413455" cy="1828800"/>
+          </a:xfrm>
+          <a:prstGeom prst="rect">
+            <a:avLst/>
+          </a:prstGeom>
+          <a:solidFill>
+            <a:srgbClr val="121316"/>
+          </a:solidFill>
+          <a:ln w="12700">
+            <a:solidFill>
+              <a:srgbClr val="2D2D32"/>
+            </a:solidFill>
+          </a:ln>
+        </p:spPr>
+        <p:style>
+          <a:lnRef idx="1">
+            <a:schemeClr val="accent1"/>
+          </a:lnRef>
+          <a:fillRef idx="3">
+            <a:schemeClr val="accent1"/>
+          </a:fillRef>
+          <a:effectRef idx="2">
+            <a:schemeClr val="accent1"/>
+          </a:effectRef>
+          <a:fontRef idx="minor">
+            <a:schemeClr val="lt1"/>
+          </a:fontRef>
+        </p:style>
+        <p:txBody>
+          <a:bodyPr rtlCol="0" anchor="ctr"/>
+          <a:lstStyle/>
+          <a:p>
+            <a:pPr algn="ctr"/>
+          </a:p>
+        </p:txBody>
+      </p:sp>
+      <p:sp>
+        <p:nvSpPr>
+          <p:cNvPr id="14" name="TextBox 13"/>
+          <p:cNvSpPr txBox="1"/>
+          <p:nvPr/>
+        </p:nvSpPr>
+        <p:spPr>
+          <a:xfrm>
+            <a:off x="4480559" y="4114800"/>
+            <a:ext cx="3230575" cy="1645920"/>
+          </a:xfrm>
+          <a:prstGeom prst="rect">
+            <a:avLst/>
+          </a:prstGeom>
+          <a:noFill/>
+        </p:spPr>
+        <p:txBody>
+          <a:bodyPr wrap="square">
+            <a:spAutoFit/>
+          </a:bodyPr>
+          <a:lstStyle/>
           <a:p>
             <a:pPr>
               <a:spcAft>
-                <a:spcPts val="1800"/>
+                <a:spcPts val="800"/>
               </a:spcAft>
+              <a:defRPr sz="1600" b="1">
+                <a:solidFill>
+                  <a:srgbClr val="FF7900"/>
+                </a:solidFill>
+                <a:latin typeface="Arial"/>
+              </a:defRPr>
+            </a:pPr>
+            <a:r>
+              <a:t>Segurança &amp; LGPD</a:t>
+            </a:r>
+          </a:p>
+          <a:p>
+            <a:pPr>
               <a:defRPr sz="1200">
                 <a:solidFill>
-                  <a:srgbClr val="94A3B8"/>
-                </a:solidFill>
-                <a:latin typeface="Arial"/>
-              </a:defRPr>
-            </a:pPr>
-            <a:r>
-              <a:t>Grandes Operações</a:t>
-            </a:r>
-          </a:p>
+                  <a:srgbClr val="A1A1AA"/>
+                </a:solidFill>
+                <a:latin typeface="Arial"/>
+              </a:defRPr>
+            </a:pPr>
+            <a:r>
+              <a:t>Dados protegidos com criptografia de alto nível e políticas rígidas de acesso.</a:t>
+            </a:r>
+          </a:p>
+        </p:txBody>
+      </p:sp>
+      <p:sp>
+        <p:nvSpPr>
+          <p:cNvPr id="15" name="Rectangle 14"/>
+          <p:cNvSpPr/>
+          <p:nvPr/>
+        </p:nvSpPr>
+        <p:spPr>
+          <a:xfrm>
+            <a:off x="8046720" y="4023360"/>
+            <a:ext cx="3413455" cy="1828800"/>
+          </a:xfrm>
+          <a:prstGeom prst="rect">
+            <a:avLst/>
+          </a:prstGeom>
+          <a:solidFill>
+            <a:srgbClr val="121316"/>
+          </a:solidFill>
+          <a:ln w="12700">
+            <a:solidFill>
+              <a:srgbClr val="2D2D32"/>
+            </a:solidFill>
+          </a:ln>
+        </p:spPr>
+        <p:style>
+          <a:lnRef idx="1">
+            <a:schemeClr val="accent1"/>
+          </a:lnRef>
+          <a:fillRef idx="3">
+            <a:schemeClr val="accent1"/>
+          </a:fillRef>
+          <a:effectRef idx="2">
+            <a:schemeClr val="accent1"/>
+          </a:effectRef>
+          <a:fontRef idx="minor">
+            <a:schemeClr val="lt1"/>
+          </a:fontRef>
+        </p:style>
+        <p:txBody>
+          <a:bodyPr rtlCol="0" anchor="ctr"/>
+          <a:lstStyle/>
+          <a:p>
+            <a:pPr algn="ctr"/>
+          </a:p>
+        </p:txBody>
+      </p:sp>
+      <p:sp>
+        <p:nvSpPr>
+          <p:cNvPr id="16" name="TextBox 15"/>
+          <p:cNvSpPr txBox="1"/>
+          <p:nvPr/>
+        </p:nvSpPr>
+        <p:spPr>
+          <a:xfrm>
+            <a:off x="8138160" y="4114800"/>
+            <a:ext cx="3230575" cy="1645920"/>
+          </a:xfrm>
+          <a:prstGeom prst="rect">
+            <a:avLst/>
+          </a:prstGeom>
+          <a:noFill/>
+        </p:spPr>
+        <p:txBody>
+          <a:bodyPr wrap="square">
+            <a:spAutoFit/>
+          </a:bodyPr>
+          <a:lstStyle/>
           <a:p>
             <a:pPr>
               <a:spcAft>
-                <a:spcPts val="600"/>
+                <a:spcPts val="800"/>
               </a:spcAft>
+              <a:defRPr sz="1600" b="1">
+                <a:solidFill>
+                  <a:srgbClr val="FF7900"/>
+                </a:solidFill>
+                <a:latin typeface="Arial"/>
+              </a:defRPr>
+            </a:pPr>
+            <a:r>
+              <a:t>Cloud Elasticidade</a:t>
+            </a:r>
+          </a:p>
+          <a:p>
+            <a:pPr>
               <a:defRPr sz="1200">
                 <a:solidFill>
-                  <a:srgbClr val="94A3B8"/>
-                </a:solidFill>
-                <a:latin typeface="Arial"/>
-              </a:defRPr>
-            </a:pPr>
-            <a:r>
-              <a:t>•  Frotistas e transportadoras</a:t>
-            </a:r>
-          </a:p>
-          <a:p>
-            <a:pPr>
-              <a:spcAft>
-                <a:spcPts val="600"/>
-              </a:spcAft>
-              <a:defRPr sz="1200">
-                <a:solidFill>
-                  <a:srgbClr val="94A3B8"/>
-                </a:solidFill>
-                <a:latin typeface="Arial"/>
-              </a:defRPr>
-            </a:pPr>
-            <a:r>
-              <a:t>•  Integrações de API personalizadas</a:t>
-            </a:r>
-          </a:p>
-          <a:p>
-            <a:pPr>
-              <a:spcAft>
-                <a:spcPts val="600"/>
-              </a:spcAft>
-              <a:defRPr sz="1200">
-                <a:solidFill>
-                  <a:srgbClr val="94A3B8"/>
-                </a:solidFill>
-                <a:latin typeface="Arial"/>
-              </a:defRPr>
-            </a:pPr>
-            <a:r>
-              <a:t>•  Arquitetura sob demanda</a:t>
-            </a:r>
-          </a:p>
-          <a:p>
-            <a:pPr>
-              <a:spcAft>
-                <a:spcPts val="600"/>
-              </a:spcAft>
-              <a:defRPr sz="1200">
-                <a:solidFill>
-                  <a:srgbClr val="94A3B8"/>
-                </a:solidFill>
-                <a:latin typeface="Arial"/>
-              </a:defRPr>
-            </a:pPr>
-            <a:r>
-              <a:t>•  Suporte e SLA dedicado</a:t>
-            </a:r>
-          </a:p>
-        </p:txBody>
-      </p:sp>
-      <p:sp>
-        <p:nvSpPr>
-          <p:cNvPr id="11" name="TextBox 10"/>
+                  <a:srgbClr val="A1A1AA"/>
+                </a:solidFill>
+                <a:latin typeface="Arial"/>
+              </a:defRPr>
+            </a:pPr>
+            <a:r>
+              <a:t>Hospedagem elástica AWS e atualizações automáticas sem necessidade de intervenção.</a:t>
+            </a:r>
+          </a:p>
+        </p:txBody>
+      </p:sp>
+      <p:sp>
+        <p:nvSpPr>
+          <p:cNvPr id="17" name="TextBox 16"/>
           <p:cNvSpPr txBox="1"/>
           <p:nvPr/>
         </p:nvSpPr>
@@ -9815,13 +10549,13 @@
             <a:pPr>
               <a:defRPr sz="850">
                 <a:solidFill>
-                  <a:srgbClr val="94A3B8"/>
-                </a:solidFill>
-                <a:latin typeface="Arial"/>
-              </a:defRPr>
-            </a:pPr>
-            <a:r>
-              <a:t>SUZANO IT   |   Tecnologia para Oficinas e Frotas                                                                                   Slide 9 de 14</a:t>
+                  <a:srgbClr val="A1A1AA"/>
+                </a:solidFill>
+                <a:latin typeface="Arial"/>
+              </a:defRPr>
+            </a:pPr>
+            <a:r>
+              <a:t>SUZANO IT   |   Tecnologia que move frotas.                                                                                          Slide 9 de 15</a:t>
             </a:r>
           </a:p>
         </p:txBody>

--- a/Apresentacao_Suzano_IT.pptx
+++ b/Apresentacao_Suzano_IT.pptx
@@ -5,23 +5,23 @@
     <p:sldMasterId id="2147483648" r:id="rId1"/>
   </p:sldMasterIdLst>
   <p:sldIdLst>
-    <p:sldId id="256" r:id="rId7"/>
-    <p:sldId id="257" r:id="rId8"/>
-    <p:sldId id="258" r:id="rId9"/>
-    <p:sldId id="259" r:id="rId10"/>
-    <p:sldId id="260" r:id="rId11"/>
-    <p:sldId id="261" r:id="rId12"/>
-    <p:sldId id="262" r:id="rId13"/>
-    <p:sldId id="263" r:id="rId14"/>
-    <p:sldId id="264" r:id="rId15"/>
-    <p:sldId id="265" r:id="rId16"/>
-    <p:sldId id="266" r:id="rId17"/>
-    <p:sldId id="267" r:id="rId18"/>
-    <p:sldId id="268" r:id="rId19"/>
-    <p:sldId id="269" r:id="rId20"/>
-    <p:sldId id="270" r:id="rId21"/>
+    <p:sldId id="256" r:id="rId2"/>
+    <p:sldId id="257" r:id="rId3"/>
+    <p:sldId id="258" r:id="rId4"/>
+    <p:sldId id="259" r:id="rId5"/>
+    <p:sldId id="260" r:id="rId6"/>
+    <p:sldId id="261" r:id="rId7"/>
+    <p:sldId id="262" r:id="rId8"/>
+    <p:sldId id="263" r:id="rId9"/>
+    <p:sldId id="264" r:id="rId10"/>
+    <p:sldId id="265" r:id="rId11"/>
+    <p:sldId id="266" r:id="rId12"/>
+    <p:sldId id="267" r:id="rId13"/>
+    <p:sldId id="268" r:id="rId14"/>
+    <p:sldId id="269" r:id="rId15"/>
+    <p:sldId id="270" r:id="rId16"/>
   </p:sldIdLst>
-  <p:sldSz cx="12191695" cy="6858000" type="screen4x3"/>
+  <p:sldSz cx="12192000" cy="6858000"/>
   <p:notesSz cx="6858000" cy="9144000"/>
   <p:defaultTextStyle>
     <a:defPPr>
@@ -118,6 +118,22 @@
       </a:defRPr>
     </a:lvl9pPr>
   </p:defaultTextStyle>
+  <p:extLst>
+    <p:ext uri="{EFAFB233-063F-42B5-8137-9DF3F51BA10A}">
+      <p15:sldGuideLst xmlns:p15="http://schemas.microsoft.com/office/powerpoint/2012/main">
+        <p15:guide id="1" orient="horz" pos="2160">
+          <p15:clr>
+            <a:srgbClr val="A4A3A4"/>
+          </p15:clr>
+        </p15:guide>
+        <p15:guide id="2" pos="2880">
+          <p15:clr>
+            <a:srgbClr val="A4A3A4"/>
+          </p15:clr>
+        </p15:guide>
+      </p15:sldGuideLst>
+    </p:ext>
+  </p:extLst>
 </p:presentation>
 </file>
 
@@ -159,10 +175,9 @@
           <a:lstStyle/>
           <a:p>
             <a:r>
-              <a:rPr lang="en-US" smtClean="0"/>
+              <a:rPr lang="en-US"/>
               <a:t>Click to edit Master title style</a:t>
             </a:r>
-            <a:endParaRPr lang="en-US"/>
           </a:p>
         </p:txBody>
       </p:sp>
@@ -278,10 +293,9 @@
           </a:lstStyle>
           <a:p>
             <a:r>
-              <a:rPr lang="en-US" smtClean="0"/>
+              <a:rPr lang="en-US"/>
               <a:t>Click to edit Master subtitle style</a:t>
             </a:r>
-            <a:endParaRPr lang="en-US"/>
           </a:p>
         </p:txBody>
       </p:sp>
@@ -302,7 +316,7 @@
           <a:p>
             <a:fld id="{5BCAD085-E8A6-8845-BD4E-CB4CCA059FC4}" type="datetimeFigureOut">
               <a:rPr lang="en-US" smtClean="0"/>
-              <a:t>1/27/13</a:t>
+              <a:t>6/7/26</a:t>
             </a:fld>
             <a:endParaRPr lang="en-US"/>
           </a:p>
@@ -344,7 +358,7 @@
           <a:p>
             <a:fld id="{C1FF6DA9-008F-8B48-92A6-B652298478BF}" type="slidenum">
               <a:rPr lang="en-US" smtClean="0"/>
-              <a:t>‹#›</a:t>
+              <a:t>‹nº›</a:t>
             </a:fld>
             <a:endParaRPr lang="en-US"/>
           </a:p>
@@ -396,10 +410,9 @@
           <a:lstStyle/>
           <a:p>
             <a:r>
-              <a:rPr lang="en-US" smtClean="0"/>
+              <a:rPr lang="en-US"/>
               <a:t>Click to edit Master title style</a:t>
             </a:r>
-            <a:endParaRPr lang="en-US"/>
           </a:p>
         </p:txBody>
       </p:sp>
@@ -420,38 +433,37 @@
           <a:p>
             <a:pPr lvl="0"/>
             <a:r>
-              <a:rPr lang="en-US" smtClean="0"/>
+              <a:rPr lang="en-US"/>
               <a:t>Click to edit Master text styles</a:t>
             </a:r>
           </a:p>
           <a:p>
             <a:pPr lvl="1"/>
             <a:r>
-              <a:rPr lang="en-US" smtClean="0"/>
+              <a:rPr lang="en-US"/>
               <a:t>Second level</a:t>
             </a:r>
           </a:p>
           <a:p>
             <a:pPr lvl="2"/>
             <a:r>
-              <a:rPr lang="en-US" smtClean="0"/>
+              <a:rPr lang="en-US"/>
               <a:t>Third level</a:t>
             </a:r>
           </a:p>
           <a:p>
             <a:pPr lvl="3"/>
             <a:r>
-              <a:rPr lang="en-US" smtClean="0"/>
+              <a:rPr lang="en-US"/>
               <a:t>Fourth level</a:t>
             </a:r>
           </a:p>
           <a:p>
             <a:pPr lvl="4"/>
             <a:r>
-              <a:rPr lang="en-US" smtClean="0"/>
+              <a:rPr lang="en-US"/>
               <a:t>Fifth level</a:t>
             </a:r>
-            <a:endParaRPr lang="en-US"/>
           </a:p>
         </p:txBody>
       </p:sp>
@@ -472,7 +484,7 @@
           <a:p>
             <a:fld id="{5BCAD085-E8A6-8845-BD4E-CB4CCA059FC4}" type="datetimeFigureOut">
               <a:rPr lang="en-US" smtClean="0"/>
-              <a:t>1/27/13</a:t>
+              <a:t>6/7/26</a:t>
             </a:fld>
             <a:endParaRPr lang="en-US"/>
           </a:p>
@@ -514,7 +526,7 @@
           <a:p>
             <a:fld id="{C1FF6DA9-008F-8B48-92A6-B652298478BF}" type="slidenum">
               <a:rPr lang="en-US" smtClean="0"/>
-              <a:t>‹#›</a:t>
+              <a:t>‹nº›</a:t>
             </a:fld>
             <a:endParaRPr lang="en-US"/>
           </a:p>
@@ -571,10 +583,9 @@
           <a:lstStyle/>
           <a:p>
             <a:r>
-              <a:rPr lang="en-US" smtClean="0"/>
+              <a:rPr lang="en-US"/>
               <a:t>Click to edit Master title style</a:t>
             </a:r>
-            <a:endParaRPr lang="en-US"/>
           </a:p>
         </p:txBody>
       </p:sp>
@@ -600,38 +611,37 @@
           <a:p>
             <a:pPr lvl="0"/>
             <a:r>
-              <a:rPr lang="en-US" smtClean="0"/>
+              <a:rPr lang="en-US"/>
               <a:t>Click to edit Master text styles</a:t>
             </a:r>
           </a:p>
           <a:p>
             <a:pPr lvl="1"/>
             <a:r>
-              <a:rPr lang="en-US" smtClean="0"/>
+              <a:rPr lang="en-US"/>
               <a:t>Second level</a:t>
             </a:r>
           </a:p>
           <a:p>
             <a:pPr lvl="2"/>
             <a:r>
-              <a:rPr lang="en-US" smtClean="0"/>
+              <a:rPr lang="en-US"/>
               <a:t>Third level</a:t>
             </a:r>
           </a:p>
           <a:p>
             <a:pPr lvl="3"/>
             <a:r>
-              <a:rPr lang="en-US" smtClean="0"/>
+              <a:rPr lang="en-US"/>
               <a:t>Fourth level</a:t>
             </a:r>
           </a:p>
           <a:p>
             <a:pPr lvl="4"/>
             <a:r>
-              <a:rPr lang="en-US" smtClean="0"/>
+              <a:rPr lang="en-US"/>
               <a:t>Fifth level</a:t>
             </a:r>
-            <a:endParaRPr lang="en-US"/>
           </a:p>
         </p:txBody>
       </p:sp>
@@ -652,7 +662,7 @@
           <a:p>
             <a:fld id="{5BCAD085-E8A6-8845-BD4E-CB4CCA059FC4}" type="datetimeFigureOut">
               <a:rPr lang="en-US" smtClean="0"/>
-              <a:t>1/27/13</a:t>
+              <a:t>6/7/26</a:t>
             </a:fld>
             <a:endParaRPr lang="en-US"/>
           </a:p>
@@ -694,7 +704,7 @@
           <a:p>
             <a:fld id="{C1FF6DA9-008F-8B48-92A6-B652298478BF}" type="slidenum">
               <a:rPr lang="en-US" smtClean="0"/>
-              <a:t>‹#›</a:t>
+              <a:t>‹nº›</a:t>
             </a:fld>
             <a:endParaRPr lang="en-US"/>
           </a:p>
@@ -746,10 +756,9 @@
           <a:lstStyle/>
           <a:p>
             <a:r>
-              <a:rPr lang="en-US" smtClean="0"/>
+              <a:rPr lang="en-US"/>
               <a:t>Click to edit Master title style</a:t>
             </a:r>
-            <a:endParaRPr lang="en-US"/>
           </a:p>
         </p:txBody>
       </p:sp>
@@ -770,38 +779,37 @@
           <a:p>
             <a:pPr lvl="0"/>
             <a:r>
-              <a:rPr lang="en-US" smtClean="0"/>
+              <a:rPr lang="en-US"/>
               <a:t>Click to edit Master text styles</a:t>
             </a:r>
           </a:p>
           <a:p>
             <a:pPr lvl="1"/>
             <a:r>
-              <a:rPr lang="en-US" smtClean="0"/>
+              <a:rPr lang="en-US"/>
               <a:t>Second level</a:t>
             </a:r>
           </a:p>
           <a:p>
             <a:pPr lvl="2"/>
             <a:r>
-              <a:rPr lang="en-US" smtClean="0"/>
+              <a:rPr lang="en-US"/>
               <a:t>Third level</a:t>
             </a:r>
           </a:p>
           <a:p>
             <a:pPr lvl="3"/>
             <a:r>
-              <a:rPr lang="en-US" smtClean="0"/>
+              <a:rPr lang="en-US"/>
               <a:t>Fourth level</a:t>
             </a:r>
           </a:p>
           <a:p>
             <a:pPr lvl="4"/>
             <a:r>
-              <a:rPr lang="en-US" smtClean="0"/>
+              <a:rPr lang="en-US"/>
               <a:t>Fifth level</a:t>
             </a:r>
-            <a:endParaRPr lang="en-US"/>
           </a:p>
         </p:txBody>
       </p:sp>
@@ -822,7 +830,7 @@
           <a:p>
             <a:fld id="{5BCAD085-E8A6-8845-BD4E-CB4CCA059FC4}" type="datetimeFigureOut">
               <a:rPr lang="en-US" smtClean="0"/>
-              <a:t>1/27/13</a:t>
+              <a:t>6/7/26</a:t>
             </a:fld>
             <a:endParaRPr lang="en-US"/>
           </a:p>
@@ -864,7 +872,7 @@
           <a:p>
             <a:fld id="{C1FF6DA9-008F-8B48-92A6-B652298478BF}" type="slidenum">
               <a:rPr lang="en-US" smtClean="0"/>
-              <a:t>‹#›</a:t>
+              <a:t>‹nº›</a:t>
             </a:fld>
             <a:endParaRPr lang="en-US"/>
           </a:p>
@@ -925,10 +933,9 @@
           </a:lstStyle>
           <a:p>
             <a:r>
-              <a:rPr lang="en-US" smtClean="0"/>
+              <a:rPr lang="en-US"/>
               <a:t>Click to edit Master title style</a:t>
             </a:r>
-            <a:endParaRPr lang="en-US"/>
           </a:p>
         </p:txBody>
       </p:sp>
@@ -1045,7 +1052,7 @@
           <a:p>
             <a:pPr lvl="0"/>
             <a:r>
-              <a:rPr lang="en-US" smtClean="0"/>
+              <a:rPr lang="en-US"/>
               <a:t>Click to edit Master text styles</a:t>
             </a:r>
           </a:p>
@@ -1068,7 +1075,7 @@
           <a:p>
             <a:fld id="{5BCAD085-E8A6-8845-BD4E-CB4CCA059FC4}" type="datetimeFigureOut">
               <a:rPr lang="en-US" smtClean="0"/>
-              <a:t>1/27/13</a:t>
+              <a:t>6/7/26</a:t>
             </a:fld>
             <a:endParaRPr lang="en-US"/>
           </a:p>
@@ -1110,7 +1117,7 @@
           <a:p>
             <a:fld id="{C1FF6DA9-008F-8B48-92A6-B652298478BF}" type="slidenum">
               <a:rPr lang="en-US" smtClean="0"/>
-              <a:t>‹#›</a:t>
+              <a:t>‹nº›</a:t>
             </a:fld>
             <a:endParaRPr lang="en-US"/>
           </a:p>
@@ -1162,10 +1169,9 @@
           <a:lstStyle/>
           <a:p>
             <a:r>
-              <a:rPr lang="en-US" smtClean="0"/>
+              <a:rPr lang="en-US"/>
               <a:t>Click to edit Master title style</a:t>
             </a:r>
-            <a:endParaRPr lang="en-US"/>
           </a:p>
         </p:txBody>
       </p:sp>
@@ -1219,38 +1225,37 @@
           <a:p>
             <a:pPr lvl="0"/>
             <a:r>
-              <a:rPr lang="en-US" smtClean="0"/>
+              <a:rPr lang="en-US"/>
               <a:t>Click to edit Master text styles</a:t>
             </a:r>
           </a:p>
           <a:p>
             <a:pPr lvl="1"/>
             <a:r>
-              <a:rPr lang="en-US" smtClean="0"/>
+              <a:rPr lang="en-US"/>
               <a:t>Second level</a:t>
             </a:r>
           </a:p>
           <a:p>
             <a:pPr lvl="2"/>
             <a:r>
-              <a:rPr lang="en-US" smtClean="0"/>
+              <a:rPr lang="en-US"/>
               <a:t>Third level</a:t>
             </a:r>
           </a:p>
           <a:p>
             <a:pPr lvl="3"/>
             <a:r>
-              <a:rPr lang="en-US" smtClean="0"/>
+              <a:rPr lang="en-US"/>
               <a:t>Fourth level</a:t>
             </a:r>
           </a:p>
           <a:p>
             <a:pPr lvl="4"/>
             <a:r>
-              <a:rPr lang="en-US" smtClean="0"/>
+              <a:rPr lang="en-US"/>
               <a:t>Fifth level</a:t>
             </a:r>
-            <a:endParaRPr lang="en-US"/>
           </a:p>
         </p:txBody>
       </p:sp>
@@ -1304,38 +1309,37 @@
           <a:p>
             <a:pPr lvl="0"/>
             <a:r>
-              <a:rPr lang="en-US" smtClean="0"/>
+              <a:rPr lang="en-US"/>
               <a:t>Click to edit Master text styles</a:t>
             </a:r>
           </a:p>
           <a:p>
             <a:pPr lvl="1"/>
             <a:r>
-              <a:rPr lang="en-US" smtClean="0"/>
+              <a:rPr lang="en-US"/>
               <a:t>Second level</a:t>
             </a:r>
           </a:p>
           <a:p>
             <a:pPr lvl="2"/>
             <a:r>
-              <a:rPr lang="en-US" smtClean="0"/>
+              <a:rPr lang="en-US"/>
               <a:t>Third level</a:t>
             </a:r>
           </a:p>
           <a:p>
             <a:pPr lvl="3"/>
             <a:r>
-              <a:rPr lang="en-US" smtClean="0"/>
+              <a:rPr lang="en-US"/>
               <a:t>Fourth level</a:t>
             </a:r>
           </a:p>
           <a:p>
             <a:pPr lvl="4"/>
             <a:r>
-              <a:rPr lang="en-US" smtClean="0"/>
+              <a:rPr lang="en-US"/>
               <a:t>Fifth level</a:t>
             </a:r>
-            <a:endParaRPr lang="en-US"/>
           </a:p>
         </p:txBody>
       </p:sp>
@@ -1356,7 +1360,7 @@
           <a:p>
             <a:fld id="{5BCAD085-E8A6-8845-BD4E-CB4CCA059FC4}" type="datetimeFigureOut">
               <a:rPr lang="en-US" smtClean="0"/>
-              <a:t>1/27/13</a:t>
+              <a:t>6/7/26</a:t>
             </a:fld>
             <a:endParaRPr lang="en-US"/>
           </a:p>
@@ -1398,7 +1402,7 @@
           <a:p>
             <a:fld id="{C1FF6DA9-008F-8B48-92A6-B652298478BF}" type="slidenum">
               <a:rPr lang="en-US" smtClean="0"/>
-              <a:t>‹#›</a:t>
+              <a:t>‹nº›</a:t>
             </a:fld>
             <a:endParaRPr lang="en-US"/>
           </a:p>
@@ -1454,10 +1458,9 @@
           </a:lstStyle>
           <a:p>
             <a:r>
-              <a:rPr lang="en-US" smtClean="0"/>
+              <a:rPr lang="en-US"/>
               <a:t>Click to edit Master title style</a:t>
             </a:r>
-            <a:endParaRPr lang="en-US"/>
           </a:p>
         </p:txBody>
       </p:sp>
@@ -1520,7 +1523,7 @@
           <a:p>
             <a:pPr lvl="0"/>
             <a:r>
-              <a:rPr lang="en-US" smtClean="0"/>
+              <a:rPr lang="en-US"/>
               <a:t>Click to edit Master text styles</a:t>
             </a:r>
           </a:p>
@@ -1576,38 +1579,37 @@
           <a:p>
             <a:pPr lvl="0"/>
             <a:r>
-              <a:rPr lang="en-US" smtClean="0"/>
+              <a:rPr lang="en-US"/>
               <a:t>Click to edit Master text styles</a:t>
             </a:r>
           </a:p>
           <a:p>
             <a:pPr lvl="1"/>
             <a:r>
-              <a:rPr lang="en-US" smtClean="0"/>
+              <a:rPr lang="en-US"/>
               <a:t>Second level</a:t>
             </a:r>
           </a:p>
           <a:p>
             <a:pPr lvl="2"/>
             <a:r>
-              <a:rPr lang="en-US" smtClean="0"/>
+              <a:rPr lang="en-US"/>
               <a:t>Third level</a:t>
             </a:r>
           </a:p>
           <a:p>
             <a:pPr lvl="3"/>
             <a:r>
-              <a:rPr lang="en-US" smtClean="0"/>
+              <a:rPr lang="en-US"/>
               <a:t>Fourth level</a:t>
             </a:r>
           </a:p>
           <a:p>
             <a:pPr lvl="4"/>
             <a:r>
-              <a:rPr lang="en-US" smtClean="0"/>
+              <a:rPr lang="en-US"/>
               <a:t>Fifth level</a:t>
             </a:r>
-            <a:endParaRPr lang="en-US"/>
           </a:p>
         </p:txBody>
       </p:sp>
@@ -1670,7 +1672,7 @@
           <a:p>
             <a:pPr lvl="0"/>
             <a:r>
-              <a:rPr lang="en-US" smtClean="0"/>
+              <a:rPr lang="en-US"/>
               <a:t>Click to edit Master text styles</a:t>
             </a:r>
           </a:p>
@@ -1726,38 +1728,37 @@
           <a:p>
             <a:pPr lvl="0"/>
             <a:r>
-              <a:rPr lang="en-US" smtClean="0"/>
+              <a:rPr lang="en-US"/>
               <a:t>Click to edit Master text styles</a:t>
             </a:r>
           </a:p>
           <a:p>
             <a:pPr lvl="1"/>
             <a:r>
-              <a:rPr lang="en-US" smtClean="0"/>
+              <a:rPr lang="en-US"/>
               <a:t>Second level</a:t>
             </a:r>
           </a:p>
           <a:p>
             <a:pPr lvl="2"/>
             <a:r>
-              <a:rPr lang="en-US" smtClean="0"/>
+              <a:rPr lang="en-US"/>
               <a:t>Third level</a:t>
             </a:r>
           </a:p>
           <a:p>
             <a:pPr lvl="3"/>
             <a:r>
-              <a:rPr lang="en-US" smtClean="0"/>
+              <a:rPr lang="en-US"/>
               <a:t>Fourth level</a:t>
             </a:r>
           </a:p>
           <a:p>
             <a:pPr lvl="4"/>
             <a:r>
-              <a:rPr lang="en-US" smtClean="0"/>
+              <a:rPr lang="en-US"/>
               <a:t>Fifth level</a:t>
             </a:r>
-            <a:endParaRPr lang="en-US"/>
           </a:p>
         </p:txBody>
       </p:sp>
@@ -1778,7 +1779,7 @@
           <a:p>
             <a:fld id="{5BCAD085-E8A6-8845-BD4E-CB4CCA059FC4}" type="datetimeFigureOut">
               <a:rPr lang="en-US" smtClean="0"/>
-              <a:t>1/27/13</a:t>
+              <a:t>6/7/26</a:t>
             </a:fld>
             <a:endParaRPr lang="en-US"/>
           </a:p>
@@ -1820,7 +1821,7 @@
           <a:p>
             <a:fld id="{C1FF6DA9-008F-8B48-92A6-B652298478BF}" type="slidenum">
               <a:rPr lang="en-US" smtClean="0"/>
-              <a:t>‹#›</a:t>
+              <a:t>‹nº›</a:t>
             </a:fld>
             <a:endParaRPr lang="en-US"/>
           </a:p>
@@ -1872,10 +1873,9 @@
           <a:lstStyle/>
           <a:p>
             <a:r>
-              <a:rPr lang="en-US" smtClean="0"/>
+              <a:rPr lang="en-US"/>
               <a:t>Click to edit Master title style</a:t>
             </a:r>
-            <a:endParaRPr lang="en-US"/>
           </a:p>
         </p:txBody>
       </p:sp>
@@ -1896,7 +1896,7 @@
           <a:p>
             <a:fld id="{5BCAD085-E8A6-8845-BD4E-CB4CCA059FC4}" type="datetimeFigureOut">
               <a:rPr lang="en-US" smtClean="0"/>
-              <a:t>1/27/13</a:t>
+              <a:t>6/7/26</a:t>
             </a:fld>
             <a:endParaRPr lang="en-US"/>
           </a:p>
@@ -1938,7 +1938,7 @@
           <a:p>
             <a:fld id="{C1FF6DA9-008F-8B48-92A6-B652298478BF}" type="slidenum">
               <a:rPr lang="en-US" smtClean="0"/>
-              <a:t>‹#›</a:t>
+              <a:t>‹nº›</a:t>
             </a:fld>
             <a:endParaRPr lang="en-US"/>
           </a:p>
@@ -1991,7 +1991,7 @@
           <a:p>
             <a:fld id="{5BCAD085-E8A6-8845-BD4E-CB4CCA059FC4}" type="datetimeFigureOut">
               <a:rPr lang="en-US" smtClean="0"/>
-              <a:t>1/27/13</a:t>
+              <a:t>6/7/26</a:t>
             </a:fld>
             <a:endParaRPr lang="en-US"/>
           </a:p>
@@ -2033,7 +2033,7 @@
           <a:p>
             <a:fld id="{C1FF6DA9-008F-8B48-92A6-B652298478BF}" type="slidenum">
               <a:rPr lang="en-US" smtClean="0"/>
-              <a:t>‹#›</a:t>
+              <a:t>‹nº›</a:t>
             </a:fld>
             <a:endParaRPr lang="en-US"/>
           </a:p>
@@ -2094,10 +2094,9 @@
           </a:lstStyle>
           <a:p>
             <a:r>
-              <a:rPr lang="en-US" smtClean="0"/>
+              <a:rPr lang="en-US"/>
               <a:t>Click to edit Master title style</a:t>
             </a:r>
-            <a:endParaRPr lang="en-US"/>
           </a:p>
         </p:txBody>
       </p:sp>
@@ -2151,38 +2150,37 @@
           <a:p>
             <a:pPr lvl="0"/>
             <a:r>
-              <a:rPr lang="en-US" smtClean="0"/>
+              <a:rPr lang="en-US"/>
               <a:t>Click to edit Master text styles</a:t>
             </a:r>
           </a:p>
           <a:p>
             <a:pPr lvl="1"/>
             <a:r>
-              <a:rPr lang="en-US" smtClean="0"/>
+              <a:rPr lang="en-US"/>
               <a:t>Second level</a:t>
             </a:r>
           </a:p>
           <a:p>
             <a:pPr lvl="2"/>
             <a:r>
-              <a:rPr lang="en-US" smtClean="0"/>
+              <a:rPr lang="en-US"/>
               <a:t>Third level</a:t>
             </a:r>
           </a:p>
           <a:p>
             <a:pPr lvl="3"/>
             <a:r>
-              <a:rPr lang="en-US" smtClean="0"/>
+              <a:rPr lang="en-US"/>
               <a:t>Fourth level</a:t>
             </a:r>
           </a:p>
           <a:p>
             <a:pPr lvl="4"/>
             <a:r>
-              <a:rPr lang="en-US" smtClean="0"/>
+              <a:rPr lang="en-US"/>
               <a:t>Fifth level</a:t>
             </a:r>
-            <a:endParaRPr lang="en-US"/>
           </a:p>
         </p:txBody>
       </p:sp>
@@ -2245,7 +2243,7 @@
           <a:p>
             <a:pPr lvl="0"/>
             <a:r>
-              <a:rPr lang="en-US" smtClean="0"/>
+              <a:rPr lang="en-US"/>
               <a:t>Click to edit Master text styles</a:t>
             </a:r>
           </a:p>
@@ -2268,7 +2266,7 @@
           <a:p>
             <a:fld id="{5BCAD085-E8A6-8845-BD4E-CB4CCA059FC4}" type="datetimeFigureOut">
               <a:rPr lang="en-US" smtClean="0"/>
-              <a:t>1/27/13</a:t>
+              <a:t>6/7/26</a:t>
             </a:fld>
             <a:endParaRPr lang="en-US"/>
           </a:p>
@@ -2310,7 +2308,7 @@
           <a:p>
             <a:fld id="{C1FF6DA9-008F-8B48-92A6-B652298478BF}" type="slidenum">
               <a:rPr lang="en-US" smtClean="0"/>
-              <a:t>‹#›</a:t>
+              <a:t>‹nº›</a:t>
             </a:fld>
             <a:endParaRPr lang="en-US"/>
           </a:p>
@@ -2371,10 +2369,9 @@
           </a:lstStyle>
           <a:p>
             <a:r>
-              <a:rPr lang="en-US" smtClean="0"/>
+              <a:rPr lang="en-US"/>
               <a:t>Click to edit Master title style</a:t>
             </a:r>
-            <a:endParaRPr lang="en-US"/>
           </a:p>
         </p:txBody>
       </p:sp>
@@ -2498,7 +2495,7 @@
           <a:p>
             <a:pPr lvl="0"/>
             <a:r>
-              <a:rPr lang="en-US" smtClean="0"/>
+              <a:rPr lang="en-US"/>
               <a:t>Click to edit Master text styles</a:t>
             </a:r>
           </a:p>
@@ -2521,7 +2518,7 @@
           <a:p>
             <a:fld id="{5BCAD085-E8A6-8845-BD4E-CB4CCA059FC4}" type="datetimeFigureOut">
               <a:rPr lang="en-US" smtClean="0"/>
-              <a:t>1/27/13</a:t>
+              <a:t>6/7/26</a:t>
             </a:fld>
             <a:endParaRPr lang="en-US"/>
           </a:p>
@@ -2563,7 +2560,7 @@
           <a:p>
             <a:fld id="{C1FF6DA9-008F-8B48-92A6-B652298478BF}" type="slidenum">
               <a:rPr lang="en-US" smtClean="0"/>
-              <a:t>‹#›</a:t>
+              <a:t>‹nº›</a:t>
             </a:fld>
             <a:endParaRPr lang="en-US"/>
           </a:p>
@@ -2630,10 +2627,9 @@
           <a:lstStyle/>
           <a:p>
             <a:r>
-              <a:rPr lang="en-US" smtClean="0"/>
+              <a:rPr lang="en-US"/>
               <a:t>Click to edit Master title style</a:t>
             </a:r>
-            <a:endParaRPr lang="en-US"/>
           </a:p>
         </p:txBody>
       </p:sp>
@@ -2664,38 +2660,37 @@
           <a:p>
             <a:pPr lvl="0"/>
             <a:r>
-              <a:rPr lang="en-US" smtClean="0"/>
+              <a:rPr lang="en-US"/>
               <a:t>Click to edit Master text styles</a:t>
             </a:r>
           </a:p>
           <a:p>
             <a:pPr lvl="1"/>
             <a:r>
-              <a:rPr lang="en-US" smtClean="0"/>
+              <a:rPr lang="en-US"/>
               <a:t>Second level</a:t>
             </a:r>
           </a:p>
           <a:p>
             <a:pPr lvl="2"/>
             <a:r>
-              <a:rPr lang="en-US" smtClean="0"/>
+              <a:rPr lang="en-US"/>
               <a:t>Third level</a:t>
             </a:r>
           </a:p>
           <a:p>
             <a:pPr lvl="3"/>
             <a:r>
-              <a:rPr lang="en-US" smtClean="0"/>
+              <a:rPr lang="en-US"/>
               <a:t>Fourth level</a:t>
             </a:r>
           </a:p>
           <a:p>
             <a:pPr lvl="4"/>
             <a:r>
-              <a:rPr lang="en-US" smtClean="0"/>
+              <a:rPr lang="en-US"/>
               <a:t>Fifth level</a:t>
             </a:r>
-            <a:endParaRPr lang="en-US"/>
           </a:p>
         </p:txBody>
       </p:sp>
@@ -2734,7 +2729,7 @@
           <a:p>
             <a:fld id="{5BCAD085-E8A6-8845-BD4E-CB4CCA059FC4}" type="datetimeFigureOut">
               <a:rPr lang="en-US" smtClean="0"/>
-              <a:t>1/27/13</a:t>
+              <a:t>6/7/26</a:t>
             </a:fld>
             <a:endParaRPr lang="en-US"/>
           </a:p>
@@ -2812,7 +2807,7 @@
           <a:p>
             <a:fld id="{C1FF6DA9-008F-8B48-92A6-B652298478BF}" type="slidenum">
               <a:rPr lang="en-US" smtClean="0"/>
-              <a:t>‹#›</a:t>
+              <a:t>‹nº›</a:t>
             </a:fld>
             <a:endParaRPr lang="en-US"/>
           </a:p>
@@ -3093,7 +3088,7 @@
 </file>
 
 <file path=ppt/slides/slide1.xml><?xml version="1.0" encoding="utf-8"?>
-<p:sld xmlns:a="http://schemas.openxmlformats.org/drawingml/2006/main" xmlns:p="http://schemas.openxmlformats.org/presentationml/2006/main" xmlns:r="http://schemas.openxmlformats.org/officeDocument/2006/relationships">
+<p:sld xmlns:a="http://schemas.openxmlformats.org/drawingml/2006/main" xmlns:r="http://schemas.openxmlformats.org/officeDocument/2006/relationships" xmlns:p="http://schemas.openxmlformats.org/presentationml/2006/main">
   <p:cSld>
     <p:spTree>
       <p:nvGrpSpPr>
@@ -3101,7 +3096,14 @@
         <p:cNvGrpSpPr/>
         <p:nvPr/>
       </p:nvGrpSpPr>
-      <p:grpSpPr/>
+      <p:grpSpPr>
+        <a:xfrm>
+          <a:off x="0" y="0"/>
+          <a:ext cx="0" cy="0"/>
+          <a:chOff x="0" y="0"/>
+          <a:chExt cx="0" cy="0"/>
+        </a:xfrm>
+      </p:grpSpPr>
       <p:pic>
         <p:nvPicPr>
           <p:cNvPr id="2" name="Picture 1" descr="background.png"/>
@@ -3279,7 +3281,7 @@
 </file>
 
 <file path=ppt/slides/slide10.xml><?xml version="1.0" encoding="utf-8"?>
-<p:sld xmlns:a="http://schemas.openxmlformats.org/drawingml/2006/main" xmlns:p="http://schemas.openxmlformats.org/presentationml/2006/main" xmlns:r="http://schemas.openxmlformats.org/officeDocument/2006/relationships">
+<p:sld xmlns:a="http://schemas.openxmlformats.org/drawingml/2006/main" xmlns:r="http://schemas.openxmlformats.org/officeDocument/2006/relationships" xmlns:p="http://schemas.openxmlformats.org/presentationml/2006/main">
   <p:cSld>
     <p:spTree>
       <p:nvGrpSpPr>
@@ -3287,7 +3289,14 @@
         <p:cNvGrpSpPr/>
         <p:nvPr/>
       </p:nvGrpSpPr>
-      <p:grpSpPr/>
+      <p:grpSpPr>
+        <a:xfrm>
+          <a:off x="0" y="0"/>
+          <a:ext cx="0" cy="0"/>
+          <a:chOff x="0" y="0"/>
+          <a:chExt cx="0" cy="0"/>
+        </a:xfrm>
+      </p:grpSpPr>
       <p:pic>
         <p:nvPicPr>
           <p:cNvPr id="2" name="Picture 1" descr="background.png"/>
@@ -3462,6 +3471,7 @@
           <a:lstStyle/>
           <a:p>
             <a:pPr algn="ctr"/>
+            <a:endParaRPr/>
           </a:p>
         </p:txBody>
       </p:sp>
@@ -3642,6 +3652,7 @@
           <a:lstStyle/>
           <a:p>
             <a:pPr algn="ctr"/>
+            <a:endParaRPr/>
           </a:p>
         </p:txBody>
       </p:sp>
@@ -3822,6 +3833,7 @@
           <a:lstStyle/>
           <a:p>
             <a:pPr algn="ctr"/>
+            <a:endParaRPr/>
           </a:p>
         </p:txBody>
       </p:sp>
@@ -4005,7 +4017,7 @@
 </file>
 
 <file path=ppt/slides/slide11.xml><?xml version="1.0" encoding="utf-8"?>
-<p:sld xmlns:a="http://schemas.openxmlformats.org/drawingml/2006/main" xmlns:p="http://schemas.openxmlformats.org/presentationml/2006/main" xmlns:r="http://schemas.openxmlformats.org/officeDocument/2006/relationships">
+<p:sld xmlns:a="http://schemas.openxmlformats.org/drawingml/2006/main" xmlns:r="http://schemas.openxmlformats.org/officeDocument/2006/relationships" xmlns:p="http://schemas.openxmlformats.org/presentationml/2006/main">
   <p:cSld>
     <p:spTree>
       <p:nvGrpSpPr>
@@ -4013,7 +4025,14 @@
         <p:cNvGrpSpPr/>
         <p:nvPr/>
       </p:nvGrpSpPr>
-      <p:grpSpPr/>
+      <p:grpSpPr>
+        <a:xfrm>
+          <a:off x="0" y="0"/>
+          <a:ext cx="0" cy="0"/>
+          <a:chOff x="0" y="0"/>
+          <a:chExt cx="0" cy="0"/>
+        </a:xfrm>
+      </p:grpSpPr>
       <p:pic>
         <p:nvPicPr>
           <p:cNvPr id="2" name="Picture 1" descr="background.png"/>
@@ -4271,6 +4290,7 @@
           <a:lstStyle/>
           <a:p>
             <a:pPr algn="ctr"/>
+            <a:endParaRPr/>
           </a:p>
         </p:txBody>
       </p:sp>
@@ -4376,7 +4396,7 @@
 </file>
 
 <file path=ppt/slides/slide12.xml><?xml version="1.0" encoding="utf-8"?>
-<p:sld xmlns:a="http://schemas.openxmlformats.org/drawingml/2006/main" xmlns:p="http://schemas.openxmlformats.org/presentationml/2006/main" xmlns:r="http://schemas.openxmlformats.org/officeDocument/2006/relationships">
+<p:sld xmlns:a="http://schemas.openxmlformats.org/drawingml/2006/main" xmlns:r="http://schemas.openxmlformats.org/officeDocument/2006/relationships" xmlns:p="http://schemas.openxmlformats.org/presentationml/2006/main">
   <p:cSld>
     <p:spTree>
       <p:nvGrpSpPr>
@@ -4384,7 +4404,14 @@
         <p:cNvGrpSpPr/>
         <p:nvPr/>
       </p:nvGrpSpPr>
-      <p:grpSpPr/>
+      <p:grpSpPr>
+        <a:xfrm>
+          <a:off x="0" y="0"/>
+          <a:ext cx="0" cy="0"/>
+          <a:chOff x="0" y="0"/>
+          <a:chExt cx="0" cy="0"/>
+        </a:xfrm>
+      </p:grpSpPr>
       <p:pic>
         <p:nvPicPr>
           <p:cNvPr id="2" name="Picture 1" descr="background.png"/>
@@ -4523,6 +4550,7 @@
           <a:lstStyle/>
           <a:p>
             <a:pPr algn="ctr"/>
+            <a:endParaRPr/>
           </a:p>
         </p:txBody>
       </p:sp>
@@ -4633,6 +4661,7 @@
           <a:lstStyle/>
           <a:p>
             <a:pPr algn="ctr"/>
+            <a:endParaRPr/>
           </a:p>
         </p:txBody>
       </p:sp>
@@ -4743,6 +4772,7 @@
           <a:lstStyle/>
           <a:p>
             <a:pPr algn="ctr"/>
+            <a:endParaRPr/>
           </a:p>
         </p:txBody>
       </p:sp>
@@ -4846,6 +4876,7 @@
           <a:lstStyle/>
           <a:p>
             <a:pPr algn="ctr"/>
+            <a:endParaRPr/>
           </a:p>
         </p:txBody>
       </p:sp>
@@ -4959,7 +4990,7 @@
 </file>
 
 <file path=ppt/slides/slide13.xml><?xml version="1.0" encoding="utf-8"?>
-<p:sld xmlns:a="http://schemas.openxmlformats.org/drawingml/2006/main" xmlns:p="http://schemas.openxmlformats.org/presentationml/2006/main" xmlns:r="http://schemas.openxmlformats.org/officeDocument/2006/relationships">
+<p:sld xmlns:a="http://schemas.openxmlformats.org/drawingml/2006/main" xmlns:r="http://schemas.openxmlformats.org/officeDocument/2006/relationships" xmlns:p="http://schemas.openxmlformats.org/presentationml/2006/main">
   <p:cSld>
     <p:spTree>
       <p:nvGrpSpPr>
@@ -4967,7 +4998,14 @@
         <p:cNvGrpSpPr/>
         <p:nvPr/>
       </p:nvGrpSpPr>
-      <p:grpSpPr/>
+      <p:grpSpPr>
+        <a:xfrm>
+          <a:off x="0" y="0"/>
+          <a:ext cx="0" cy="0"/>
+          <a:chOff x="0" y="0"/>
+          <a:chExt cx="0" cy="0"/>
+        </a:xfrm>
+      </p:grpSpPr>
       <p:pic>
         <p:nvPicPr>
           <p:cNvPr id="2" name="Picture 1" descr="background.png"/>
@@ -4984,7 +5022,7 @@
         </p:blipFill>
         <p:spPr>
           <a:xfrm>
-            <a:off x="0" y="0"/>
+            <a:off x="0" y="287079"/>
             <a:ext cx="12191695" cy="6858000"/>
           </a:xfrm>
           <a:prstGeom prst="rect">
@@ -5106,6 +5144,7 @@
           <a:lstStyle/>
           <a:p>
             <a:pPr algn="ctr"/>
+            <a:endParaRPr/>
           </a:p>
         </p:txBody>
       </p:sp>
@@ -5219,6 +5258,7 @@
           <a:lstStyle/>
           <a:p>
             <a:pPr algn="ctr"/>
+            <a:endParaRPr/>
           </a:p>
         </p:txBody>
       </p:sp>
@@ -5332,6 +5372,7 @@
           <a:lstStyle/>
           <a:p>
             <a:pPr algn="ctr"/>
+            <a:endParaRPr/>
           </a:p>
         </p:txBody>
       </p:sp>
@@ -5344,7 +5385,7 @@
         <p:spPr>
           <a:xfrm>
             <a:off x="3886200" y="2286000"/>
-            <a:ext cx="1310335" cy="3108960"/>
+            <a:ext cx="1310335" cy="1287532"/>
           </a:xfrm>
           <a:prstGeom prst="rect">
             <a:avLst/>
@@ -5369,6 +5410,7 @@
               </a:defRPr>
             </a:pPr>
             <a:r>
+              <a:rPr dirty="0"/>
               <a:t>Fase 3</a:t>
             </a:r>
           </a:p>
@@ -5385,8 +5427,14 @@
               </a:defRPr>
             </a:pPr>
             <a:r>
-              <a:t>Integração NF-e</a:t>
-            </a:r>
+              <a:rPr dirty="0" err="1"/>
+              <a:t>Integração</a:t>
+            </a:r>
+            <a:r>
+              <a:rPr dirty="0"/>
+              <a:t> NF-e</a:t>
+            </a:r>
+            <a:endParaRPr lang="pt-BR" dirty="0"/>
           </a:p>
           <a:p>
             <a:pPr>
@@ -5398,7 +5446,8 @@
               </a:defRPr>
             </a:pPr>
             <a:r>
-              <a:t>✓ Concluído</a:t>
+              <a:rPr lang="pt-BR" dirty="0"/>
+              <a:t>✓ Futuro</a:t>
             </a:r>
           </a:p>
         </p:txBody>
@@ -5445,6 +5494,7 @@
           <a:lstStyle/>
           <a:p>
             <a:pPr algn="ctr"/>
+            <a:endParaRPr/>
           </a:p>
         </p:txBody>
       </p:sp>
@@ -5457,7 +5507,7 @@
         <p:spPr>
           <a:xfrm>
             <a:off x="5440680" y="2286000"/>
-            <a:ext cx="1310335" cy="3108960"/>
+            <a:ext cx="1310335" cy="1287532"/>
           </a:xfrm>
           <a:prstGeom prst="rect">
             <a:avLst/>
@@ -5482,6 +5532,7 @@
               </a:defRPr>
             </a:pPr>
             <a:r>
+              <a:rPr dirty="0"/>
               <a:t>Fase 4</a:t>
             </a:r>
           </a:p>
@@ -5498,7 +5549,20 @@
               </a:defRPr>
             </a:pPr>
             <a:r>
-              <a:t>Inteligência Artif.</a:t>
+              <a:rPr dirty="0" err="1"/>
+              <a:t>Inteligência</a:t>
+            </a:r>
+            <a:r>
+              <a:rPr dirty="0"/>
+              <a:t> </a:t>
+            </a:r>
+            <a:r>
+              <a:rPr dirty="0" err="1"/>
+              <a:t>Artif</a:t>
+            </a:r>
+            <a:r>
+              <a:rPr dirty="0"/>
+              <a:t>.</a:t>
             </a:r>
           </a:p>
           <a:p>
@@ -5511,8 +5575,10 @@
               </a:defRPr>
             </a:pPr>
             <a:r>
-              <a:t>✓ Concluído</a:t>
-            </a:r>
+              <a:rPr lang="pt-BR" dirty="0"/>
+              <a:t>Futuro</a:t>
+            </a:r>
+            <a:endParaRPr dirty="0"/>
           </a:p>
         </p:txBody>
       </p:sp>
@@ -5558,6 +5624,7 @@
           <a:lstStyle/>
           <a:p>
             <a:pPr algn="ctr"/>
+            <a:endParaRPr/>
           </a:p>
         </p:txBody>
       </p:sp>
@@ -5570,7 +5637,7 @@
         <p:spPr>
           <a:xfrm>
             <a:off x="6995159" y="2286000"/>
-            <a:ext cx="1310335" cy="3108960"/>
+            <a:ext cx="1310335" cy="1287532"/>
           </a:xfrm>
           <a:prstGeom prst="rect">
             <a:avLst/>
@@ -5595,6 +5662,7 @@
               </a:defRPr>
             </a:pPr>
             <a:r>
+              <a:rPr dirty="0"/>
               <a:t>Fase 5</a:t>
             </a:r>
           </a:p>
@@ -5611,7 +5679,12 @@
               </a:defRPr>
             </a:pPr>
             <a:r>
-              <a:t>Aplicativo Mobile</a:t>
+              <a:rPr dirty="0" err="1"/>
+              <a:t>Aplicativo</a:t>
+            </a:r>
+            <a:r>
+              <a:rPr dirty="0"/>
+              <a:t> Mobile</a:t>
             </a:r>
           </a:p>
           <a:p>
@@ -5624,8 +5697,10 @@
               </a:defRPr>
             </a:pPr>
             <a:r>
-              <a:t>Próximo</a:t>
-            </a:r>
+              <a:rPr lang="pt-BR" dirty="0"/>
+              <a:t>Futuro</a:t>
+            </a:r>
+            <a:endParaRPr dirty="0"/>
           </a:p>
         </p:txBody>
       </p:sp>
@@ -5671,6 +5746,7 @@
           <a:lstStyle/>
           <a:p>
             <a:pPr algn="ctr"/>
+            <a:endParaRPr/>
           </a:p>
         </p:txBody>
       </p:sp>
@@ -5784,6 +5860,7 @@
           <a:lstStyle/>
           <a:p>
             <a:pPr algn="ctr"/>
+            <a:endParaRPr/>
           </a:p>
         </p:txBody>
       </p:sp>
@@ -5900,7 +5977,7 @@
 </file>
 
 <file path=ppt/slides/slide14.xml><?xml version="1.0" encoding="utf-8"?>
-<p:sld xmlns:a="http://schemas.openxmlformats.org/drawingml/2006/main" xmlns:p="http://schemas.openxmlformats.org/presentationml/2006/main" xmlns:r="http://schemas.openxmlformats.org/officeDocument/2006/relationships">
+<p:sld xmlns:a="http://schemas.openxmlformats.org/drawingml/2006/main" xmlns:r="http://schemas.openxmlformats.org/officeDocument/2006/relationships" xmlns:p="http://schemas.openxmlformats.org/presentationml/2006/main">
   <p:cSld>
     <p:spTree>
       <p:nvGrpSpPr>
@@ -5908,7 +5985,14 @@
         <p:cNvGrpSpPr/>
         <p:nvPr/>
       </p:nvGrpSpPr>
-      <p:grpSpPr/>
+      <p:grpSpPr>
+        <a:xfrm>
+          <a:off x="0" y="0"/>
+          <a:ext cx="0" cy="0"/>
+          <a:chOff x="0" y="0"/>
+          <a:chExt cx="0" cy="0"/>
+        </a:xfrm>
+      </p:grpSpPr>
       <p:pic>
         <p:nvPicPr>
           <p:cNvPr id="2" name="Picture 1" descr="background.png"/>
@@ -6047,6 +6131,7 @@
           <a:lstStyle/>
           <a:p>
             <a:pPr algn="ctr"/>
+            <a:endParaRPr/>
           </a:p>
         </p:txBody>
       </p:sp>
@@ -6144,6 +6229,7 @@
           <a:lstStyle/>
           <a:p>
             <a:pPr algn="ctr"/>
+            <a:endParaRPr/>
           </a:p>
         </p:txBody>
       </p:sp>
@@ -6241,6 +6327,7 @@
           <a:lstStyle/>
           <a:p>
             <a:pPr algn="ctr"/>
+            <a:endParaRPr/>
           </a:p>
         </p:txBody>
       </p:sp>
@@ -6338,6 +6425,7 @@
           <a:lstStyle/>
           <a:p>
             <a:pPr algn="ctr"/>
+            <a:endParaRPr/>
           </a:p>
         </p:txBody>
       </p:sp>
@@ -6438,7 +6526,7 @@
 </file>
 
 <file path=ppt/slides/slide15.xml><?xml version="1.0" encoding="utf-8"?>
-<p:sld xmlns:a="http://schemas.openxmlformats.org/drawingml/2006/main" xmlns:p="http://schemas.openxmlformats.org/presentationml/2006/main" xmlns:r="http://schemas.openxmlformats.org/officeDocument/2006/relationships">
+<p:sld xmlns:a="http://schemas.openxmlformats.org/drawingml/2006/main" xmlns:r="http://schemas.openxmlformats.org/officeDocument/2006/relationships" xmlns:p="http://schemas.openxmlformats.org/presentationml/2006/main">
   <p:cSld>
     <p:spTree>
       <p:nvGrpSpPr>
@@ -6446,7 +6534,14 @@
         <p:cNvGrpSpPr/>
         <p:nvPr/>
       </p:nvGrpSpPr>
-      <p:grpSpPr/>
+      <p:grpSpPr>
+        <a:xfrm>
+          <a:off x="0" y="0"/>
+          <a:ext cx="0" cy="0"/>
+          <a:chOff x="0" y="0"/>
+          <a:chExt cx="0" cy="0"/>
+        </a:xfrm>
+      </p:grpSpPr>
       <p:pic>
         <p:nvPicPr>
           <p:cNvPr id="2" name="Picture 1" descr="background.png"/>
@@ -6513,6 +6608,7 @@
           <a:lstStyle/>
           <a:p>
             <a:pPr algn="ctr"/>
+            <a:endParaRPr/>
           </a:p>
         </p:txBody>
       </p:sp>
@@ -6721,7 +6817,7 @@
 </file>
 
 <file path=ppt/slides/slide2.xml><?xml version="1.0" encoding="utf-8"?>
-<p:sld xmlns:a="http://schemas.openxmlformats.org/drawingml/2006/main" xmlns:p="http://schemas.openxmlformats.org/presentationml/2006/main" xmlns:r="http://schemas.openxmlformats.org/officeDocument/2006/relationships">
+<p:sld xmlns:a="http://schemas.openxmlformats.org/drawingml/2006/main" xmlns:r="http://schemas.openxmlformats.org/officeDocument/2006/relationships" xmlns:p="http://schemas.openxmlformats.org/presentationml/2006/main">
   <p:cSld>
     <p:spTree>
       <p:nvGrpSpPr>
@@ -6729,7 +6825,14 @@
         <p:cNvGrpSpPr/>
         <p:nvPr/>
       </p:nvGrpSpPr>
-      <p:grpSpPr/>
+      <p:grpSpPr>
+        <a:xfrm>
+          <a:off x="0" y="0"/>
+          <a:ext cx="0" cy="0"/>
+          <a:chOff x="0" y="0"/>
+          <a:chExt cx="0" cy="0"/>
+        </a:xfrm>
+      </p:grpSpPr>
       <p:pic>
         <p:nvPicPr>
           <p:cNvPr id="2" name="Picture 1" descr="background.png"/>
@@ -6904,6 +7007,7 @@
           <a:lstStyle/>
           <a:p>
             <a:pPr algn="ctr"/>
+            <a:endParaRPr/>
           </a:p>
         </p:txBody>
       </p:sp>
@@ -7001,6 +7105,7 @@
           <a:lstStyle/>
           <a:p>
             <a:pPr algn="ctr"/>
+            <a:endParaRPr/>
           </a:p>
         </p:txBody>
       </p:sp>
@@ -7098,6 +7203,7 @@
           <a:lstStyle/>
           <a:p>
             <a:pPr algn="ctr"/>
+            <a:endParaRPr/>
           </a:p>
         </p:txBody>
       </p:sp>
@@ -7198,7 +7304,7 @@
 </file>
 
 <file path=ppt/slides/slide3.xml><?xml version="1.0" encoding="utf-8"?>
-<p:sld xmlns:a="http://schemas.openxmlformats.org/drawingml/2006/main" xmlns:p="http://schemas.openxmlformats.org/presentationml/2006/main" xmlns:r="http://schemas.openxmlformats.org/officeDocument/2006/relationships">
+<p:sld xmlns:a="http://schemas.openxmlformats.org/drawingml/2006/main" xmlns:r="http://schemas.openxmlformats.org/officeDocument/2006/relationships" xmlns:p="http://schemas.openxmlformats.org/presentationml/2006/main">
   <p:cSld>
     <p:spTree>
       <p:nvGrpSpPr>
@@ -7206,7 +7312,14 @@
         <p:cNvGrpSpPr/>
         <p:nvPr/>
       </p:nvGrpSpPr>
-      <p:grpSpPr/>
+      <p:grpSpPr>
+        <a:xfrm>
+          <a:off x="0" y="0"/>
+          <a:ext cx="0" cy="0"/>
+          <a:chOff x="0" y="0"/>
+          <a:chExt cx="0" cy="0"/>
+        </a:xfrm>
+      </p:grpSpPr>
       <p:pic>
         <p:nvPicPr>
           <p:cNvPr id="2" name="Picture 1" descr="background.png"/>
@@ -7389,6 +7502,7 @@
           <a:lstStyle/>
           <a:p>
             <a:pPr algn="ctr"/>
+            <a:endParaRPr/>
           </a:p>
         </p:txBody>
       </p:sp>
@@ -7486,6 +7600,7 @@
           <a:lstStyle/>
           <a:p>
             <a:pPr algn="ctr"/>
+            <a:endParaRPr/>
           </a:p>
         </p:txBody>
       </p:sp>
@@ -7583,6 +7698,7 @@
           <a:lstStyle/>
           <a:p>
             <a:pPr algn="ctr"/>
+            <a:endParaRPr/>
           </a:p>
         </p:txBody>
       </p:sp>
@@ -7683,7 +7799,7 @@
 </file>
 
 <file path=ppt/slides/slide4.xml><?xml version="1.0" encoding="utf-8"?>
-<p:sld xmlns:a="http://schemas.openxmlformats.org/drawingml/2006/main" xmlns:p="http://schemas.openxmlformats.org/presentationml/2006/main" xmlns:r="http://schemas.openxmlformats.org/officeDocument/2006/relationships">
+<p:sld xmlns:a="http://schemas.openxmlformats.org/drawingml/2006/main" xmlns:r="http://schemas.openxmlformats.org/officeDocument/2006/relationships" xmlns:p="http://schemas.openxmlformats.org/presentationml/2006/main">
   <p:cSld>
     <p:spTree>
       <p:nvGrpSpPr>
@@ -7691,7 +7807,14 @@
         <p:cNvGrpSpPr/>
         <p:nvPr/>
       </p:nvGrpSpPr>
-      <p:grpSpPr/>
+      <p:grpSpPr>
+        <a:xfrm>
+          <a:off x="0" y="0"/>
+          <a:ext cx="0" cy="0"/>
+          <a:chOff x="0" y="0"/>
+          <a:chExt cx="0" cy="0"/>
+        </a:xfrm>
+      </p:grpSpPr>
       <p:pic>
         <p:nvPicPr>
           <p:cNvPr id="2" name="Picture 1" descr="background.png"/>
@@ -7965,6 +8088,7 @@
           <a:lstStyle/>
           <a:p>
             <a:pPr algn="ctr"/>
+            <a:endParaRPr/>
           </a:p>
         </p:txBody>
       </p:sp>
@@ -8081,7 +8205,7 @@
 </file>
 
 <file path=ppt/slides/slide5.xml><?xml version="1.0" encoding="utf-8"?>
-<p:sld xmlns:a="http://schemas.openxmlformats.org/drawingml/2006/main" xmlns:p="http://schemas.openxmlformats.org/presentationml/2006/main" xmlns:r="http://schemas.openxmlformats.org/officeDocument/2006/relationships">
+<p:sld xmlns:a="http://schemas.openxmlformats.org/drawingml/2006/main" xmlns:r="http://schemas.openxmlformats.org/officeDocument/2006/relationships" xmlns:p="http://schemas.openxmlformats.org/presentationml/2006/main">
   <p:cSld>
     <p:spTree>
       <p:nvGrpSpPr>
@@ -8089,7 +8213,14 @@
         <p:cNvGrpSpPr/>
         <p:nvPr/>
       </p:nvGrpSpPr>
-      <p:grpSpPr/>
+      <p:grpSpPr>
+        <a:xfrm>
+          <a:off x="0" y="0"/>
+          <a:ext cx="0" cy="0"/>
+          <a:chOff x="0" y="0"/>
+          <a:chExt cx="0" cy="0"/>
+        </a:xfrm>
+      </p:grpSpPr>
       <p:pic>
         <p:nvPicPr>
           <p:cNvPr id="2" name="Picture 1" descr="background.png"/>
@@ -8264,6 +8395,7 @@
           <a:lstStyle/>
           <a:p>
             <a:pPr algn="ctr"/>
+            <a:endParaRPr/>
           </a:p>
         </p:txBody>
       </p:sp>
@@ -8361,6 +8493,7 @@
           <a:lstStyle/>
           <a:p>
             <a:pPr algn="ctr"/>
+            <a:endParaRPr/>
           </a:p>
         </p:txBody>
       </p:sp>
@@ -8458,6 +8591,7 @@
           <a:lstStyle/>
           <a:p>
             <a:pPr algn="ctr"/>
+            <a:endParaRPr/>
           </a:p>
         </p:txBody>
       </p:sp>
@@ -8555,6 +8689,7 @@
           <a:lstStyle/>
           <a:p>
             <a:pPr algn="ctr"/>
+            <a:endParaRPr/>
           </a:p>
         </p:txBody>
       </p:sp>
@@ -8655,7 +8790,7 @@
 </file>
 
 <file path=ppt/slides/slide6.xml><?xml version="1.0" encoding="utf-8"?>
-<p:sld xmlns:a="http://schemas.openxmlformats.org/drawingml/2006/main" xmlns:p="http://schemas.openxmlformats.org/presentationml/2006/main" xmlns:r="http://schemas.openxmlformats.org/officeDocument/2006/relationships">
+<p:sld xmlns:a="http://schemas.openxmlformats.org/drawingml/2006/main" xmlns:r="http://schemas.openxmlformats.org/officeDocument/2006/relationships" xmlns:p="http://schemas.openxmlformats.org/presentationml/2006/main">
   <p:cSld>
     <p:spTree>
       <p:nvGrpSpPr>
@@ -8663,7 +8798,14 @@
         <p:cNvGrpSpPr/>
         <p:nvPr/>
       </p:nvGrpSpPr>
-      <p:grpSpPr/>
+      <p:grpSpPr>
+        <a:xfrm>
+          <a:off x="0" y="0"/>
+          <a:ext cx="0" cy="0"/>
+          <a:chOff x="0" y="0"/>
+          <a:chExt cx="0" cy="0"/>
+        </a:xfrm>
+      </p:grpSpPr>
       <p:pic>
         <p:nvPicPr>
           <p:cNvPr id="2" name="Picture 1" descr="background.png"/>
@@ -8937,6 +9079,7 @@
           <a:lstStyle/>
           <a:p>
             <a:pPr algn="ctr"/>
+            <a:endParaRPr/>
           </a:p>
         </p:txBody>
       </p:sp>
@@ -9054,7 +9197,7 @@
 </file>
 
 <file path=ppt/slides/slide7.xml><?xml version="1.0" encoding="utf-8"?>
-<p:sld xmlns:a="http://schemas.openxmlformats.org/drawingml/2006/main" xmlns:p="http://schemas.openxmlformats.org/presentationml/2006/main" xmlns:r="http://schemas.openxmlformats.org/officeDocument/2006/relationships">
+<p:sld xmlns:a="http://schemas.openxmlformats.org/drawingml/2006/main" xmlns:r="http://schemas.openxmlformats.org/officeDocument/2006/relationships" xmlns:p="http://schemas.openxmlformats.org/presentationml/2006/main">
   <p:cSld>
     <p:spTree>
       <p:nvGrpSpPr>
@@ -9062,7 +9205,14 @@
         <p:cNvGrpSpPr/>
         <p:nvPr/>
       </p:nvGrpSpPr>
-      <p:grpSpPr/>
+      <p:grpSpPr>
+        <a:xfrm>
+          <a:off x="0" y="0"/>
+          <a:ext cx="0" cy="0"/>
+          <a:chOff x="0" y="0"/>
+          <a:chExt cx="0" cy="0"/>
+        </a:xfrm>
+      </p:grpSpPr>
       <p:pic>
         <p:nvPicPr>
           <p:cNvPr id="2" name="Picture 1" descr="background.png"/>
@@ -9336,6 +9486,7 @@
           <a:lstStyle/>
           <a:p>
             <a:pPr algn="ctr"/>
+            <a:endParaRPr/>
           </a:p>
         </p:txBody>
       </p:sp>
@@ -9453,7 +9604,7 @@
 </file>
 
 <file path=ppt/slides/slide8.xml><?xml version="1.0" encoding="utf-8"?>
-<p:sld xmlns:a="http://schemas.openxmlformats.org/drawingml/2006/main" xmlns:p="http://schemas.openxmlformats.org/presentationml/2006/main" xmlns:r="http://schemas.openxmlformats.org/officeDocument/2006/relationships">
+<p:sld xmlns:a="http://schemas.openxmlformats.org/drawingml/2006/main" xmlns:r="http://schemas.openxmlformats.org/officeDocument/2006/relationships" xmlns:p="http://schemas.openxmlformats.org/presentationml/2006/main">
   <p:cSld>
     <p:spTree>
       <p:nvGrpSpPr>
@@ -9461,7 +9612,14 @@
         <p:cNvGrpSpPr/>
         <p:nvPr/>
       </p:nvGrpSpPr>
-      <p:grpSpPr/>
+      <p:grpSpPr>
+        <a:xfrm>
+          <a:off x="0" y="0"/>
+          <a:ext cx="0" cy="0"/>
+          <a:chOff x="0" y="0"/>
+          <a:chExt cx="0" cy="0"/>
+        </a:xfrm>
+      </p:grpSpPr>
       <p:pic>
         <p:nvPicPr>
           <p:cNvPr id="2" name="Picture 1" descr="background.png"/>
@@ -9719,6 +9877,7 @@
           <a:lstStyle/>
           <a:p>
             <a:pPr algn="ctr"/>
+            <a:endParaRPr/>
           </a:p>
         </p:txBody>
       </p:sp>
@@ -9837,7 +9996,7 @@
 </file>
 
 <file path=ppt/slides/slide9.xml><?xml version="1.0" encoding="utf-8"?>
-<p:sld xmlns:a="http://schemas.openxmlformats.org/drawingml/2006/main" xmlns:p="http://schemas.openxmlformats.org/presentationml/2006/main" xmlns:r="http://schemas.openxmlformats.org/officeDocument/2006/relationships">
+<p:sld xmlns:a="http://schemas.openxmlformats.org/drawingml/2006/main" xmlns:r="http://schemas.openxmlformats.org/officeDocument/2006/relationships" xmlns:p="http://schemas.openxmlformats.org/presentationml/2006/main">
   <p:cSld>
     <p:spTree>
       <p:nvGrpSpPr>
@@ -9845,7 +10004,14 @@
         <p:cNvGrpSpPr/>
         <p:nvPr/>
       </p:nvGrpSpPr>
-      <p:grpSpPr/>
+      <p:grpSpPr>
+        <a:xfrm>
+          <a:off x="0" y="0"/>
+          <a:ext cx="0" cy="0"/>
+          <a:chOff x="0" y="0"/>
+          <a:chExt cx="0" cy="0"/>
+        </a:xfrm>
+      </p:grpSpPr>
       <p:pic>
         <p:nvPicPr>
           <p:cNvPr id="2" name="Picture 1" descr="background.png"/>
@@ -9984,6 +10150,7 @@
           <a:lstStyle/>
           <a:p>
             <a:pPr algn="ctr"/>
+            <a:endParaRPr/>
           </a:p>
         </p:txBody>
       </p:sp>
@@ -10081,6 +10248,7 @@
           <a:lstStyle/>
           <a:p>
             <a:pPr algn="ctr"/>
+            <a:endParaRPr/>
           </a:p>
         </p:txBody>
       </p:sp>
@@ -10178,6 +10346,7 @@
           <a:lstStyle/>
           <a:p>
             <a:pPr algn="ctr"/>
+            <a:endParaRPr/>
           </a:p>
         </p:txBody>
       </p:sp>
@@ -10275,6 +10444,7 @@
           <a:lstStyle/>
           <a:p>
             <a:pPr algn="ctr"/>
+            <a:endParaRPr/>
           </a:p>
         </p:txBody>
       </p:sp>
@@ -10372,6 +10542,7 @@
           <a:lstStyle/>
           <a:p>
             <a:pPr algn="ctr"/>
+            <a:endParaRPr/>
           </a:p>
         </p:txBody>
       </p:sp>
@@ -10469,6 +10640,7 @@
           <a:lstStyle/>
           <a:p>
             <a:pPr algn="ctr"/>
+            <a:endParaRPr/>
           </a:p>
         </p:txBody>
       </p:sp>
